--- a/HireLane-Pitch.pptx
+++ b/HireLane-Pitch.pptx
@@ -28,11 +28,9 @@
     <p:sldId id="276" r:id="rId22"/>
     <p:sldId id="277" r:id="rId23"/>
     <p:sldId id="278" r:id="rId24"/>
-    <p:sldId id="279" r:id="rId25"/>
-    <p:sldId id="280" r:id="rId26"/>
   </p:sldIdLst>
   <p:notesMasterIdLst>
-    <p:notesMasterId r:id="rId27"/>
+    <p:notesMasterId r:id="rId25"/>
   </p:notesMasterIdLst>
   <p:sldSz cx="12192000" cy="6858000"/>
   <p:notesSz cx="6858000" cy="12192000"/>
@@ -1888,182 +1886,6 @@
 </p:notes>
 </file>
 
-<file path=ppt/notesSlides/notesSlide24.xml><?xml version="1.0" encoding="utf-8"?>
-<p:notes xmlns:a="http://schemas.openxmlformats.org/drawingml/2006/main" xmlns:r="http://schemas.openxmlformats.org/officeDocument/2006/relationships" xmlns:p="http://schemas.openxmlformats.org/presentationml/2006/main">
-  <p:cSld>
-    <p:spTree>
-      <p:nvGrpSpPr>
-        <p:cNvPr id="1" name=""/>
-        <p:cNvGrpSpPr/>
-        <p:nvPr/>
-      </p:nvGrpSpPr>
-      <p:grpSpPr>
-        <a:xfrm>
-          <a:off x="0" y="0"/>
-          <a:ext cx="0" cy="0"/>
-          <a:chOff x="0" y="0"/>
-          <a:chExt cx="0" cy="0"/>
-        </a:xfrm>
-      </p:grpSpPr>
-      <p:sp>
-        <p:nvSpPr>
-          <p:cNvPr id="2" name="Slide Image Placeholder 1"/>
-          <p:cNvSpPr>
-            <a:spLocks noGrp="1" noRot="1" noChangeAspect="1"/>
-          </p:cNvSpPr>
-          <p:nvPr>
-            <p:ph type="sldImg"/>
-          </p:nvPr>
-        </p:nvSpPr>
-        <p:spPr/>
-      </p:sp>
-      <p:sp>
-        <p:nvSpPr>
-          <p:cNvPr id="3" name="Notes Placeholder 2"/>
-          <p:cNvSpPr>
-            <a:spLocks noGrp="1"/>
-          </p:cNvSpPr>
-          <p:nvPr>
-            <p:ph type="body" idx="1"/>
-          </p:nvPr>
-        </p:nvSpPr>
-        <p:spPr/>
-        <p:txBody>
-          <a:bodyPr/>
-          <a:lstStyle/>
-          <a:p>
-            <a:r>
-              <a:rPr lang="en-US" dirty="0"/>
-              <a:t/>
-            </a:r>
-            <a:endParaRPr lang="en-US" dirty="0"/>
-          </a:p>
-        </p:txBody>
-      </p:sp>
-      <p:sp>
-        <p:nvSpPr>
-          <p:cNvPr id="4" name="Slide Number Placeholder 3"/>
-          <p:cNvSpPr>
-            <a:spLocks noGrp="1"/>
-          </p:cNvSpPr>
-          <p:nvPr>
-            <p:ph type="sldNum" sz="quarter" idx="10"/>
-          </p:nvPr>
-        </p:nvSpPr>
-        <p:spPr/>
-        <p:txBody>
-          <a:bodyPr/>
-          <a:lstStyle/>
-          <a:p>
-            <a:fld id="{F7021451-1387-4CA6-816F-3879F97B5CBC}" type="slidenum">
-              <a:rPr lang="en-US"/>
-              <a:t>24</a:t>
-            </a:fld>
-            <a:endParaRPr lang="en-US"/>
-          </a:p>
-        </p:txBody>
-      </p:sp>
-    </p:spTree>
-    <p:extLst>
-      <p:ext uri="{BB962C8B-B14F-4D97-AF65-F5344CB8AC3E}">
-        <p14:creationId xmlns:p14="http://schemas.microsoft.com/office/powerpoint/2010/main" val="1024086991"/>
-      </p:ext>
-    </p:extLst>
-  </p:cSld>
-  <p:clrMapOvr>
-    <a:masterClrMapping/>
-  </p:clrMapOvr>
-</p:notes>
-</file>
-
-<file path=ppt/notesSlides/notesSlide25.xml><?xml version="1.0" encoding="utf-8"?>
-<p:notes xmlns:a="http://schemas.openxmlformats.org/drawingml/2006/main" xmlns:r="http://schemas.openxmlformats.org/officeDocument/2006/relationships" xmlns:p="http://schemas.openxmlformats.org/presentationml/2006/main">
-  <p:cSld>
-    <p:spTree>
-      <p:nvGrpSpPr>
-        <p:cNvPr id="1" name=""/>
-        <p:cNvGrpSpPr/>
-        <p:nvPr/>
-      </p:nvGrpSpPr>
-      <p:grpSpPr>
-        <a:xfrm>
-          <a:off x="0" y="0"/>
-          <a:ext cx="0" cy="0"/>
-          <a:chOff x="0" y="0"/>
-          <a:chExt cx="0" cy="0"/>
-        </a:xfrm>
-      </p:grpSpPr>
-      <p:sp>
-        <p:nvSpPr>
-          <p:cNvPr id="2" name="Slide Image Placeholder 1"/>
-          <p:cNvSpPr>
-            <a:spLocks noGrp="1" noRot="1" noChangeAspect="1"/>
-          </p:cNvSpPr>
-          <p:nvPr>
-            <p:ph type="sldImg"/>
-          </p:nvPr>
-        </p:nvSpPr>
-        <p:spPr/>
-      </p:sp>
-      <p:sp>
-        <p:nvSpPr>
-          <p:cNvPr id="3" name="Notes Placeholder 2"/>
-          <p:cNvSpPr>
-            <a:spLocks noGrp="1"/>
-          </p:cNvSpPr>
-          <p:nvPr>
-            <p:ph type="body" idx="1"/>
-          </p:nvPr>
-        </p:nvSpPr>
-        <p:spPr/>
-        <p:txBody>
-          <a:bodyPr/>
-          <a:lstStyle/>
-          <a:p>
-            <a:r>
-              <a:rPr lang="en-US" dirty="0"/>
-              <a:t/>
-            </a:r>
-            <a:endParaRPr lang="en-US" dirty="0"/>
-          </a:p>
-        </p:txBody>
-      </p:sp>
-      <p:sp>
-        <p:nvSpPr>
-          <p:cNvPr id="4" name="Slide Number Placeholder 3"/>
-          <p:cNvSpPr>
-            <a:spLocks noGrp="1"/>
-          </p:cNvSpPr>
-          <p:nvPr>
-            <p:ph type="sldNum" sz="quarter" idx="10"/>
-          </p:nvPr>
-        </p:nvSpPr>
-        <p:spPr/>
-        <p:txBody>
-          <a:bodyPr/>
-          <a:lstStyle/>
-          <a:p>
-            <a:fld id="{F7021451-1387-4CA6-816F-3879F97B5CBC}" type="slidenum">
-              <a:rPr lang="en-US"/>
-              <a:t>25</a:t>
-            </a:fld>
-            <a:endParaRPr lang="en-US"/>
-          </a:p>
-        </p:txBody>
-      </p:sp>
-    </p:spTree>
-    <p:extLst>
-      <p:ext uri="{BB962C8B-B14F-4D97-AF65-F5344CB8AC3E}">
-        <p14:creationId xmlns:p14="http://schemas.microsoft.com/office/powerpoint/2010/main" val="1024086991"/>
-      </p:ext>
-    </p:extLst>
-  </p:cSld>
-  <p:clrMapOvr>
-    <a:masterClrMapping/>
-  </p:clrMapOvr>
-</p:notes>
-</file>
-
 <file path=ppt/notesSlides/notesSlide3.xml><?xml version="1.0" encoding="utf-8"?>
 <p:notes xmlns:a="http://schemas.openxmlformats.org/drawingml/2006/main" xmlns:r="http://schemas.openxmlformats.org/officeDocument/2006/relationships" xmlns:p="http://schemas.openxmlformats.org/presentationml/2006/main">
   <p:cSld>
@@ -3031,38 +2853,39 @@
           <a:ln/>
         </p:spPr>
       </p:sp>
-      <p:sp>
-        <p:nvSpPr>
-          <p:cNvPr id="3" name="Shape 1"/>
-          <p:cNvSpPr/>
-          <p:nvPr/>
-        </p:nvSpPr>
-        <p:spPr>
-          <a:xfrm>
-            <a:off x="822960" y="1920240"/>
-            <a:ext cx="822960" cy="822960"/>
-          </a:xfrm>
-          <a:prstGeom prst="roundRect">
-            <a:avLst>
-              <a:gd name="adj" fmla="val 15556"/>
-            </a:avLst>
-          </a:prstGeom>
-          <a:solidFill>
-            <a:srgbClr val="E0342C"/>
-          </a:solidFill>
-          <a:ln/>
-        </p:spPr>
-      </p:sp>
-      <p:sp>
-        <p:nvSpPr>
-          <p:cNvPr id="4" name="Text 2"/>
-          <p:cNvSpPr/>
-          <p:nvPr/>
-        </p:nvSpPr>
-        <p:spPr>
-          <a:xfrm>
-            <a:off x="822960" y="1920240"/>
-            <a:ext cx="822960" cy="822960"/>
+      <p:pic>
+        <p:nvPicPr>
+          <p:cNvPr id="3" name="Image 0" descr="D:\Anas\Projects\Learning\ATSPortal\HireLane-Logo.png">    </p:cNvPr>
+          <p:cNvPicPr>
+            <a:picLocks noChangeAspect="1"/>
+          </p:cNvPicPr>
+          <p:nvPr/>
+        </p:nvPicPr>
+        <p:blipFill>
+          <a:blip r:embed="rId1"/>
+          <a:srcRect l="0" r="0" t="0" b="0"/>
+          <a:stretch/>
+        </p:blipFill>
+        <p:spPr>
+          <a:xfrm>
+            <a:off x="777240" y="1371600"/>
+            <a:ext cx="3840480" cy="2560320"/>
+          </a:xfrm>
+          <a:prstGeom prst="rect">
+            <a:avLst/>
+          </a:prstGeom>
+        </p:spPr>
+      </p:pic>
+      <p:sp>
+        <p:nvSpPr>
+          <p:cNvPr id="4" name="Text 1"/>
+          <p:cNvSpPr/>
+          <p:nvPr/>
+        </p:nvSpPr>
+        <p:spPr>
+          <a:xfrm>
+            <a:off x="822960" y="3977640"/>
+            <a:ext cx="10515600" cy="731520"/>
           </a:xfrm>
           <a:prstGeom prst="rect">
             <a:avLst/>
@@ -3074,34 +2897,34 @@
           <a:bodyPr wrap="square" rtlCol="0" anchor="ctr"/>
           <a:lstStyle/>
           <a:p>
-            <a:pPr algn="ctr" indent="0" marL="0">
-              <a:buNone/>
-            </a:pPr>
-            <a:r>
-              <a:rPr lang="en-US" sz="4000" b="1" dirty="0">
-                <a:solidFill>
-                  <a:srgbClr val="FFFFFF"/>
-                </a:solidFill>
-                <a:latin typeface="Arial" pitchFamily="34" charset="0"/>
-                <a:ea typeface="Arial" pitchFamily="34" charset="-122"/>
-                <a:cs typeface="Arial" pitchFamily="34" charset="-120"/>
-              </a:rPr>
-              <a:t>H</a:t>
-            </a:r>
-            <a:endParaRPr lang="en-US" sz="4000" dirty="0"/>
-          </a:p>
-        </p:txBody>
-      </p:sp>
-      <p:sp>
-        <p:nvSpPr>
-          <p:cNvPr id="5" name="Text 3"/>
-          <p:cNvSpPr/>
-          <p:nvPr/>
-        </p:nvSpPr>
-        <p:spPr>
-          <a:xfrm>
-            <a:off x="1828800" y="1965960"/>
-            <a:ext cx="8229600" cy="822960"/>
+            <a:pPr indent="0" marL="0">
+              <a:buNone/>
+            </a:pPr>
+            <a:r>
+              <a:rPr lang="en-US" sz="2600" b="1" dirty="0">
+                <a:solidFill>
+                  <a:srgbClr val="1A1A1A"/>
+                </a:solidFill>
+                <a:latin typeface="Arial" pitchFamily="34" charset="0"/>
+                <a:ea typeface="Arial" pitchFamily="34" charset="-122"/>
+                <a:cs typeface="Arial" pitchFamily="34" charset="-120"/>
+              </a:rPr>
+              <a:t>Every applicant, down to the right hire.</a:t>
+            </a:r>
+            <a:endParaRPr lang="en-US" sz="2600" dirty="0"/>
+          </a:p>
+        </p:txBody>
+      </p:sp>
+      <p:sp>
+        <p:nvSpPr>
+          <p:cNvPr id="5" name="Text 2"/>
+          <p:cNvSpPr/>
+          <p:nvPr/>
+        </p:nvSpPr>
+        <p:spPr>
+          <a:xfrm>
+            <a:off x="822960" y="4709160"/>
+            <a:ext cx="9692640" cy="1097280"/>
           </a:xfrm>
           <a:prstGeom prst="rect">
             <a:avLst/>
@@ -3117,98 +2940,6 @@
               <a:buNone/>
             </a:pPr>
             <a:r>
-              <a:rPr lang="en-US" sz="4400" b="1" dirty="0">
-                <a:solidFill>
-                  <a:srgbClr val="1A1A1A"/>
-                </a:solidFill>
-                <a:latin typeface="Arial" pitchFamily="34" charset="0"/>
-                <a:ea typeface="Arial" pitchFamily="34" charset="-122"/>
-                <a:cs typeface="Arial" pitchFamily="34" charset="-120"/>
-              </a:rPr>
-              <a:t>Hire</a:t>
-            </a:r>
-            <a:pPr indent="0" marL="0">
-              <a:buNone/>
-            </a:pPr>
-            <a:r>
-              <a:rPr lang="en-US" sz="4400" b="1" dirty="0">
-                <a:solidFill>
-                  <a:srgbClr val="E0342C"/>
-                </a:solidFill>
-                <a:latin typeface="Arial" pitchFamily="34" charset="0"/>
-                <a:ea typeface="Arial" pitchFamily="34" charset="-122"/>
-                <a:cs typeface="Arial" pitchFamily="34" charset="-120"/>
-              </a:rPr>
-              <a:t>Lane</a:t>
-            </a:r>
-            <a:endParaRPr lang="en-US" sz="4400" dirty="0"/>
-          </a:p>
-        </p:txBody>
-      </p:sp>
-      <p:sp>
-        <p:nvSpPr>
-          <p:cNvPr id="6" name="Text 4"/>
-          <p:cNvSpPr/>
-          <p:nvPr/>
-        </p:nvSpPr>
-        <p:spPr>
-          <a:xfrm>
-            <a:off x="822960" y="3063240"/>
-            <a:ext cx="10515600" cy="731520"/>
-          </a:xfrm>
-          <a:prstGeom prst="rect">
-            <a:avLst/>
-          </a:prstGeom>
-          <a:noFill/>
-          <a:ln/>
-        </p:spPr>
-        <p:txBody>
-          <a:bodyPr wrap="square" rtlCol="0" anchor="ctr"/>
-          <a:lstStyle/>
-          <a:p>
-            <a:pPr indent="0" marL="0">
-              <a:buNone/>
-            </a:pPr>
-            <a:r>
-              <a:rPr lang="en-US" sz="2600" b="1" dirty="0">
-                <a:solidFill>
-                  <a:srgbClr val="1A1A1A"/>
-                </a:solidFill>
-                <a:latin typeface="Arial" pitchFamily="34" charset="0"/>
-                <a:ea typeface="Arial" pitchFamily="34" charset="-122"/>
-                <a:cs typeface="Arial" pitchFamily="34" charset="-120"/>
-              </a:rPr>
-              <a:t>Every applicant, down to the right hire.</a:t>
-            </a:r>
-            <a:endParaRPr lang="en-US" sz="2600" dirty="0"/>
-          </a:p>
-        </p:txBody>
-      </p:sp>
-      <p:sp>
-        <p:nvSpPr>
-          <p:cNvPr id="7" name="Text 5"/>
-          <p:cNvSpPr/>
-          <p:nvPr/>
-        </p:nvSpPr>
-        <p:spPr>
-          <a:xfrm>
-            <a:off x="822960" y="3794760"/>
-            <a:ext cx="9692640" cy="1097280"/>
-          </a:xfrm>
-          <a:prstGeom prst="rect">
-            <a:avLst/>
-          </a:prstGeom>
-          <a:noFill/>
-          <a:ln/>
-        </p:spPr>
-        <p:txBody>
-          <a:bodyPr wrap="square" rtlCol="0" anchor="ctr"/>
-          <a:lstStyle/>
-          <a:p>
-            <a:pPr indent="0" marL="0">
-              <a:buNone/>
-            </a:pPr>
-            <a:r>
               <a:rPr lang="en-US" sz="1500" dirty="0">
                 <a:solidFill>
                   <a:srgbClr val="6B6B6B"/>
@@ -3225,13 +2956,13 @@
       </p:sp>
       <p:sp>
         <p:nvSpPr>
-          <p:cNvPr id="8" name="Text 6"/>
-          <p:cNvSpPr/>
-          <p:nvPr/>
-        </p:nvSpPr>
-        <p:spPr>
-          <a:xfrm>
-            <a:off x="822960" y="5852160"/>
+          <p:cNvPr id="6" name="Text 3"/>
+          <p:cNvSpPr/>
+          <p:nvPr/>
+        </p:nvSpPr>
+        <p:spPr>
+          <a:xfrm>
+            <a:off x="822960" y="5989320"/>
             <a:ext cx="8229600" cy="365760"/>
           </a:xfrm>
           <a:prstGeom prst="rect">
@@ -3273,6 +3004,175 @@
 <file path=ppt/slides/slide10.xml><?xml version="1.0" encoding="utf-8"?>
 <p:sld xmlns:a="http://schemas.openxmlformats.org/drawingml/2006/main" xmlns:r="http://schemas.openxmlformats.org/officeDocument/2006/relationships" xmlns:p="http://schemas.openxmlformats.org/presentationml/2006/main">
   <p:cSld name="Slide 10">
+    <p:bg>
+      <p:bgPr>
+        <a:solidFill>
+          <a:srgbClr val="1A1A1A"/>
+        </a:solidFill>
+      </p:bgPr>
+    </p:bg>
+    <p:spTree>
+      <p:nvGrpSpPr>
+        <p:cNvPr id="1" name=""/>
+        <p:cNvGrpSpPr/>
+        <p:nvPr/>
+      </p:nvGrpSpPr>
+      <p:grpSpPr>
+        <a:xfrm>
+          <a:off x="0" y="0"/>
+          <a:ext cx="0" cy="0"/>
+          <a:chOff x="0" y="0"/>
+          <a:chExt cx="0" cy="0"/>
+        </a:xfrm>
+      </p:grpSpPr>
+      <p:sp>
+        <p:nvSpPr>
+          <p:cNvPr id="2" name="Shape 0"/>
+          <p:cNvSpPr/>
+          <p:nvPr/>
+        </p:nvSpPr>
+        <p:spPr>
+          <a:xfrm>
+            <a:off x="0" y="3200400"/>
+            <a:ext cx="12191695" cy="45720"/>
+          </a:xfrm>
+          <a:prstGeom prst="rect">
+            <a:avLst/>
+          </a:prstGeom>
+          <a:solidFill>
+            <a:srgbClr val="E0342C"/>
+          </a:solidFill>
+          <a:ln/>
+        </p:spPr>
+      </p:sp>
+      <p:sp>
+        <p:nvSpPr>
+          <p:cNvPr id="3" name="Text 1"/>
+          <p:cNvSpPr/>
+          <p:nvPr/>
+        </p:nvSpPr>
+        <p:spPr>
+          <a:xfrm>
+            <a:off x="822960" y="2286000"/>
+            <a:ext cx="10058400" cy="365760"/>
+          </a:xfrm>
+          <a:prstGeom prst="rect">
+            <a:avLst/>
+          </a:prstGeom>
+          <a:noFill/>
+          <a:ln/>
+        </p:spPr>
+        <p:txBody>
+          <a:bodyPr wrap="square" rtlCol="0" anchor="ctr"/>
+          <a:lstStyle/>
+          <a:p>
+            <a:pPr indent="0" marL="0">
+              <a:buNone/>
+            </a:pPr>
+            <a:r>
+              <a:rPr lang="en-US" sz="1400" b="1" spc="300" kern="0" dirty="0">
+                <a:solidFill>
+                  <a:srgbClr val="E0342C"/>
+                </a:solidFill>
+                <a:latin typeface="Arial" pitchFamily="34" charset="0"/>
+                <a:ea typeface="Arial" pitchFamily="34" charset="-122"/>
+                <a:cs typeface="Arial" pitchFamily="34" charset="-120"/>
+              </a:rPr>
+              <a:t>HOW-TO · ROLE 2</a:t>
+            </a:r>
+            <a:endParaRPr lang="en-US" sz="1400" dirty="0"/>
+          </a:p>
+        </p:txBody>
+      </p:sp>
+      <p:sp>
+        <p:nvSpPr>
+          <p:cNvPr id="4" name="Text 2"/>
+          <p:cNvSpPr/>
+          <p:nvPr/>
+        </p:nvSpPr>
+        <p:spPr>
+          <a:xfrm>
+            <a:off x="822960" y="2651760"/>
+            <a:ext cx="10515600" cy="914400"/>
+          </a:xfrm>
+          <a:prstGeom prst="rect">
+            <a:avLst/>
+          </a:prstGeom>
+          <a:noFill/>
+          <a:ln/>
+        </p:spPr>
+        <p:txBody>
+          <a:bodyPr wrap="square" rtlCol="0" anchor="ctr"/>
+          <a:lstStyle/>
+          <a:p>
+            <a:pPr indent="0" marL="0">
+              <a:buNone/>
+            </a:pPr>
+            <a:r>
+              <a:rPr lang="en-US" sz="4000" b="1" dirty="0">
+                <a:solidFill>
+                  <a:srgbClr val="FFFFFF"/>
+                </a:solidFill>
+                <a:latin typeface="Arial" pitchFamily="34" charset="0"/>
+                <a:ea typeface="Arial" pitchFamily="34" charset="-122"/>
+                <a:cs typeface="Arial" pitchFamily="34" charset="-120"/>
+              </a:rPr>
+              <a:t>Recruiter</a:t>
+            </a:r>
+            <a:endParaRPr lang="en-US" sz="4000" dirty="0"/>
+          </a:p>
+        </p:txBody>
+      </p:sp>
+      <p:sp>
+        <p:nvSpPr>
+          <p:cNvPr id="5" name="Text 3"/>
+          <p:cNvSpPr/>
+          <p:nvPr/>
+        </p:nvSpPr>
+        <p:spPr>
+          <a:xfrm>
+            <a:off x="822960" y="3401568"/>
+            <a:ext cx="10058400" cy="731520"/>
+          </a:xfrm>
+          <a:prstGeom prst="rect">
+            <a:avLst/>
+          </a:prstGeom>
+          <a:noFill/>
+          <a:ln/>
+        </p:spPr>
+        <p:txBody>
+          <a:bodyPr wrap="square" rtlCol="0" anchor="ctr"/>
+          <a:lstStyle/>
+          <a:p>
+            <a:pPr indent="0" marL="0">
+              <a:buNone/>
+            </a:pPr>
+            <a:r>
+              <a:rPr lang="en-US" sz="1600" dirty="0">
+                <a:solidFill>
+                  <a:srgbClr val="C9C4BD"/>
+                </a:solidFill>
+                <a:latin typeface="Arial" pitchFamily="34" charset="0"/>
+                <a:ea typeface="Arial" pitchFamily="34" charset="-122"/>
+                <a:cs typeface="Arial" pitchFamily="34" charset="-120"/>
+              </a:rPr>
+              <a:t>Source, screen, and move candidates</a:t>
+            </a:r>
+            <a:endParaRPr lang="en-US" sz="1600" dirty="0"/>
+          </a:p>
+        </p:txBody>
+      </p:sp>
+    </p:spTree>
+  </p:cSld>
+  <p:clrMapOvr>
+    <a:masterClrMapping/>
+  </p:clrMapOvr>
+</p:sld>
+</file>
+
+<file path=ppt/slides/slide11.xml><?xml version="1.0" encoding="utf-8"?>
+<p:sld xmlns:a="http://schemas.openxmlformats.org/drawingml/2006/main" xmlns:r="http://schemas.openxmlformats.org/officeDocument/2006/relationships" xmlns:p="http://schemas.openxmlformats.org/presentationml/2006/main">
+  <p:cSld name="Slide 11">
     <p:bg>
       <p:bgPr>
         <a:solidFill>
@@ -3347,7 +3247,7 @@
                 <a:ea typeface="Arial" pitchFamily="34" charset="-122"/>
                 <a:cs typeface="Arial" pitchFamily="34" charset="-120"/>
               </a:rPr>
-              <a:t>COMPANY ADMIN · STEP 4</a:t>
+              <a:t>RECRUITER · STEP 1</a:t>
             </a:r>
             <a:endParaRPr lang="en-US" sz="1200" dirty="0"/>
           </a:p>
@@ -3386,7 +3286,7 @@
                 <a:ea typeface="Arial" pitchFamily="34" charset="-122"/>
                 <a:cs typeface="Arial" pitchFamily="34" charset="-120"/>
               </a:rPr>
-              <a:t>Stay accountable</a:t>
+              <a:t>Start from the dashboard</a:t>
             </a:r>
             <a:endParaRPr lang="en-US" sz="2500" dirty="0"/>
           </a:p>
@@ -3492,7 +3392,7 @@
                 <a:ea typeface="Arial" pitchFamily="34" charset="-122"/>
                 <a:cs typeface="Arial" pitchFamily="34" charset="-120"/>
               </a:rPr>
-              <a:t>Admin → Audit Log
+              <a:t>Open Dashboard
 </a:t>
             </a:r>
             <a:pPr indent="0" marL="0">
@@ -3510,7 +3410,7 @@
                 <a:ea typeface="Arial" pitchFamily="34" charset="-122"/>
                 <a:cs typeface="Arial" pitchFamily="34" charset="-120"/>
               </a:rPr>
-              <a:t>A complete trail of who changed what, and when.</a:t>
+              <a:t>Pipeline funnel, upcoming interviews and recent activity at a glance.</a:t>
             </a:r>
             <a:endParaRPr lang="en-US" sz="1300" dirty="0"/>
           </a:p>
@@ -3524,7 +3424,7 @@
         </p:nvSpPr>
         <p:spPr>
           <a:xfrm>
-            <a:off x="548640" y="2450592"/>
+            <a:off x="548640" y="2560320"/>
             <a:ext cx="384048" cy="384048"/>
           </a:xfrm>
           <a:prstGeom prst="ellipse">
@@ -3549,7 +3449,7 @@
         </p:nvSpPr>
         <p:spPr>
           <a:xfrm>
-            <a:off x="548640" y="2450592"/>
+            <a:off x="548640" y="2560320"/>
             <a:ext cx="384048" cy="384048"/>
           </a:xfrm>
           <a:prstGeom prst="rect">
@@ -3588,7 +3488,7 @@
         </p:nvSpPr>
         <p:spPr>
           <a:xfrm>
-            <a:off x="1097280" y="2386584"/>
+            <a:off x="1097280" y="2496312"/>
             <a:ext cx="4754880" cy="914400"/>
           </a:xfrm>
           <a:prstGeom prst="rect">
@@ -3616,7 +3516,7 @@
                 <a:ea typeface="Arial" pitchFamily="34" charset="-122"/>
                 <a:cs typeface="Arial" pitchFamily="34" charset="-120"/>
               </a:rPr>
-              <a:t>Assessment policy
+              <a:t>Live, not sample
 </a:t>
             </a:r>
             <a:pPr indent="0" marL="0">
@@ -3634,7 +3534,7 @@
                 <a:ea typeface="Arial" pitchFamily="34" charset="-122"/>
                 <a:cs typeface="Arial" pitchFamily="34" charset="-120"/>
               </a:rPr>
-              <a:t>Set default proctoring and retake rules for every new test.</a:t>
+              <a:t>Every number is your real data, scoped to your workspace.</a:t>
             </a:r>
             <a:endParaRPr lang="en-US" sz="1300" dirty="0"/>
           </a:p>
@@ -3787,7 +3687,7 @@
                 <a:ea typeface="Arial" pitchFamily="34" charset="-122"/>
                 <a:cs typeface="Arial" pitchFamily="34" charset="-120"/>
               </a:rPr>
-              <a:t>Admin · Audit log</a:t>
+              <a:t>Recruiter · Dashboard</a:t>
             </a:r>
             <a:endParaRPr lang="en-US" sz="1200" dirty="0"/>
           </a:p>
@@ -3826,7 +3726,7 @@
                 <a:ea typeface="Arial" pitchFamily="34" charset="-122"/>
                 <a:cs typeface="Arial" pitchFamily="34" charset="-120"/>
               </a:rPr>
-              <a:t>Full accountability</a:t>
+              <a:t>Your hiring at a glance</a:t>
             </a:r>
             <a:endParaRPr lang="en-US" sz="1700" dirty="0"/>
           </a:p>
@@ -3869,7 +3769,7 @@
                 <a:ea typeface="Arial" pitchFamily="34" charset="-122"/>
                 <a:cs typeface="Arial" pitchFamily="34" charset="-120"/>
               </a:rPr>
-              <a:t>Every privileged action logged</a:t>
+              <a:t>Open positions &amp; active candidates</a:t>
             </a:r>
             <a:endParaRPr lang="en-US" sz="1250" dirty="0"/>
           </a:p>
@@ -3890,7 +3790,7 @@
                 <a:ea typeface="Arial" pitchFamily="34" charset="-122"/>
                 <a:cs typeface="Arial" pitchFamily="34" charset="-120"/>
               </a:rPr>
-              <a:t>Org-wide assessment defaults</a:t>
+              <a:t>Pipeline funnel by stage</a:t>
             </a:r>
             <a:endParaRPr lang="en-US" sz="1250" dirty="0"/>
           </a:p>
@@ -3911,178 +3811,9 @@
                 <a:ea typeface="Arial" pitchFamily="34" charset="-122"/>
                 <a:cs typeface="Arial" pitchFamily="34" charset="-120"/>
               </a:rPr>
-              <a:t>Exportable trail</a:t>
+              <a:t>Upcoming interviews &amp; activity</a:t>
             </a:r>
             <a:endParaRPr lang="en-US" sz="1250" dirty="0"/>
-          </a:p>
-        </p:txBody>
-      </p:sp>
-    </p:spTree>
-  </p:cSld>
-  <p:clrMapOvr>
-    <a:masterClrMapping/>
-  </p:clrMapOvr>
-</p:sld>
-</file>
-
-<file path=ppt/slides/slide11.xml><?xml version="1.0" encoding="utf-8"?>
-<p:sld xmlns:a="http://schemas.openxmlformats.org/drawingml/2006/main" xmlns:r="http://schemas.openxmlformats.org/officeDocument/2006/relationships" xmlns:p="http://schemas.openxmlformats.org/presentationml/2006/main">
-  <p:cSld name="Slide 11">
-    <p:bg>
-      <p:bgPr>
-        <a:solidFill>
-          <a:srgbClr val="1A1A1A"/>
-        </a:solidFill>
-      </p:bgPr>
-    </p:bg>
-    <p:spTree>
-      <p:nvGrpSpPr>
-        <p:cNvPr id="1" name=""/>
-        <p:cNvGrpSpPr/>
-        <p:nvPr/>
-      </p:nvGrpSpPr>
-      <p:grpSpPr>
-        <a:xfrm>
-          <a:off x="0" y="0"/>
-          <a:ext cx="0" cy="0"/>
-          <a:chOff x="0" y="0"/>
-          <a:chExt cx="0" cy="0"/>
-        </a:xfrm>
-      </p:grpSpPr>
-      <p:sp>
-        <p:nvSpPr>
-          <p:cNvPr id="2" name="Shape 0"/>
-          <p:cNvSpPr/>
-          <p:nvPr/>
-        </p:nvSpPr>
-        <p:spPr>
-          <a:xfrm>
-            <a:off x="0" y="3200400"/>
-            <a:ext cx="12191695" cy="45720"/>
-          </a:xfrm>
-          <a:prstGeom prst="rect">
-            <a:avLst/>
-          </a:prstGeom>
-          <a:solidFill>
-            <a:srgbClr val="E0342C"/>
-          </a:solidFill>
-          <a:ln/>
-        </p:spPr>
-      </p:sp>
-      <p:sp>
-        <p:nvSpPr>
-          <p:cNvPr id="3" name="Text 1"/>
-          <p:cNvSpPr/>
-          <p:nvPr/>
-        </p:nvSpPr>
-        <p:spPr>
-          <a:xfrm>
-            <a:off x="822960" y="2286000"/>
-            <a:ext cx="10058400" cy="365760"/>
-          </a:xfrm>
-          <a:prstGeom prst="rect">
-            <a:avLst/>
-          </a:prstGeom>
-          <a:noFill/>
-          <a:ln/>
-        </p:spPr>
-        <p:txBody>
-          <a:bodyPr wrap="square" rtlCol="0" anchor="ctr"/>
-          <a:lstStyle/>
-          <a:p>
-            <a:pPr indent="0" marL="0">
-              <a:buNone/>
-            </a:pPr>
-            <a:r>
-              <a:rPr lang="en-US" sz="1400" b="1" spc="300" kern="0" dirty="0">
-                <a:solidFill>
-                  <a:srgbClr val="E0342C"/>
-                </a:solidFill>
-                <a:latin typeface="Arial" pitchFamily="34" charset="0"/>
-                <a:ea typeface="Arial" pitchFamily="34" charset="-122"/>
-                <a:cs typeface="Arial" pitchFamily="34" charset="-120"/>
-              </a:rPr>
-              <a:t>HOW-TO · ROLE 2</a:t>
-            </a:r>
-            <a:endParaRPr lang="en-US" sz="1400" dirty="0"/>
-          </a:p>
-        </p:txBody>
-      </p:sp>
-      <p:sp>
-        <p:nvSpPr>
-          <p:cNvPr id="4" name="Text 2"/>
-          <p:cNvSpPr/>
-          <p:nvPr/>
-        </p:nvSpPr>
-        <p:spPr>
-          <a:xfrm>
-            <a:off x="822960" y="2651760"/>
-            <a:ext cx="10515600" cy="914400"/>
-          </a:xfrm>
-          <a:prstGeom prst="rect">
-            <a:avLst/>
-          </a:prstGeom>
-          <a:noFill/>
-          <a:ln/>
-        </p:spPr>
-        <p:txBody>
-          <a:bodyPr wrap="square" rtlCol="0" anchor="ctr"/>
-          <a:lstStyle/>
-          <a:p>
-            <a:pPr indent="0" marL="0">
-              <a:buNone/>
-            </a:pPr>
-            <a:r>
-              <a:rPr lang="en-US" sz="4000" b="1" dirty="0">
-                <a:solidFill>
-                  <a:srgbClr val="FFFFFF"/>
-                </a:solidFill>
-                <a:latin typeface="Arial" pitchFamily="34" charset="0"/>
-                <a:ea typeface="Arial" pitchFamily="34" charset="-122"/>
-                <a:cs typeface="Arial" pitchFamily="34" charset="-120"/>
-              </a:rPr>
-              <a:t>Recruiter</a:t>
-            </a:r>
-            <a:endParaRPr lang="en-US" sz="4000" dirty="0"/>
-          </a:p>
-        </p:txBody>
-      </p:sp>
-      <p:sp>
-        <p:nvSpPr>
-          <p:cNvPr id="5" name="Text 3"/>
-          <p:cNvSpPr/>
-          <p:nvPr/>
-        </p:nvSpPr>
-        <p:spPr>
-          <a:xfrm>
-            <a:off x="822960" y="3401568"/>
-            <a:ext cx="10058400" cy="731520"/>
-          </a:xfrm>
-          <a:prstGeom prst="rect">
-            <a:avLst/>
-          </a:prstGeom>
-          <a:noFill/>
-          <a:ln/>
-        </p:spPr>
-        <p:txBody>
-          <a:bodyPr wrap="square" rtlCol="0" anchor="ctr"/>
-          <a:lstStyle/>
-          <a:p>
-            <a:pPr indent="0" marL="0">
-              <a:buNone/>
-            </a:pPr>
-            <a:r>
-              <a:rPr lang="en-US" sz="1600" dirty="0">
-                <a:solidFill>
-                  <a:srgbClr val="C9C4BD"/>
-                </a:solidFill>
-                <a:latin typeface="Arial" pitchFamily="34" charset="0"/>
-                <a:ea typeface="Arial" pitchFamily="34" charset="-122"/>
-                <a:cs typeface="Arial" pitchFamily="34" charset="-120"/>
-              </a:rPr>
-              <a:t>Source, screen, and move candidates</a:t>
-            </a:r>
-            <a:endParaRPr lang="en-US" sz="1600" dirty="0"/>
           </a:p>
         </p:txBody>
       </p:sp>
@@ -4171,7 +3902,7 @@
                 <a:ea typeface="Arial" pitchFamily="34" charset="-122"/>
                 <a:cs typeface="Arial" pitchFamily="34" charset="-120"/>
               </a:rPr>
-              <a:t>RECRUITER · STEP 1</a:t>
+              <a:t>RECRUITER · STEP 2</a:t>
             </a:r>
             <a:endParaRPr lang="en-US" sz="1200" dirty="0"/>
           </a:p>
@@ -4210,7 +3941,7 @@
                 <a:ea typeface="Arial" pitchFamily="34" charset="-122"/>
                 <a:cs typeface="Arial" pitchFamily="34" charset="-120"/>
               </a:rPr>
-              <a:t>Start from the dashboard</a:t>
+              <a:t>Create a job opening</a:t>
             </a:r>
             <a:endParaRPr lang="en-US" sz="2500" dirty="0"/>
           </a:p>
@@ -4316,7 +4047,7 @@
                 <a:ea typeface="Arial" pitchFamily="34" charset="-122"/>
                 <a:cs typeface="Arial" pitchFamily="34" charset="-120"/>
               </a:rPr>
-              <a:t>Open Dashboard
+              <a:t>Openings → New
 </a:t>
             </a:r>
             <a:pPr indent="0" marL="0">
@@ -4334,7 +4065,7 @@
                 <a:ea typeface="Arial" pitchFamily="34" charset="-122"/>
                 <a:cs typeface="Arial" pitchFamily="34" charset="-120"/>
               </a:rPr>
-              <a:t>Pipeline funnel, upcoming interviews and recent activity at a glance.</a:t>
+              <a:t>Add the title, department, and must-have requirements.</a:t>
             </a:r>
             <a:endParaRPr lang="en-US" sz="1300" dirty="0"/>
           </a:p>
@@ -4348,7 +4079,7 @@
         </p:nvSpPr>
         <p:spPr>
           <a:xfrm>
-            <a:off x="548640" y="2560320"/>
+            <a:off x="548640" y="2450592"/>
             <a:ext cx="384048" cy="384048"/>
           </a:xfrm>
           <a:prstGeom prst="ellipse">
@@ -4373,7 +4104,7 @@
         </p:nvSpPr>
         <p:spPr>
           <a:xfrm>
-            <a:off x="548640" y="2560320"/>
+            <a:off x="548640" y="2450592"/>
             <a:ext cx="384048" cy="384048"/>
           </a:xfrm>
           <a:prstGeom prst="rect">
@@ -4412,7 +4143,7 @@
         </p:nvSpPr>
         <p:spPr>
           <a:xfrm>
-            <a:off x="1097280" y="2496312"/>
+            <a:off x="1097280" y="2386584"/>
             <a:ext cx="4754880" cy="914400"/>
           </a:xfrm>
           <a:prstGeom prst="rect">
@@ -4440,7 +4171,7 @@
                 <a:ea typeface="Arial" pitchFamily="34" charset="-122"/>
                 <a:cs typeface="Arial" pitchFamily="34" charset="-120"/>
               </a:rPr>
-              <a:t>Live, not sample
+              <a:t>Set screening weights
 </a:t>
             </a:r>
             <a:pPr indent="0" marL="0">
@@ -4458,7 +4189,7 @@
                 <a:ea typeface="Arial" pitchFamily="34" charset="-122"/>
                 <a:cs typeface="Arial" pitchFamily="34" charset="-120"/>
               </a:rPr>
-              <a:t>Every number is your real data, scoped to your workspace.</a:t>
+              <a:t>Tell the AI what matters most for this role.</a:t>
             </a:r>
             <a:endParaRPr lang="en-US" sz="1300" dirty="0"/>
           </a:p>
@@ -4467,6 +4198,130 @@
       <p:sp>
         <p:nvSpPr>
           <p:cNvPr id="11" name="Shape 9"/>
+          <p:cNvSpPr/>
+          <p:nvPr/>
+        </p:nvSpPr>
+        <p:spPr>
+          <a:xfrm>
+            <a:off x="548640" y="3236976"/>
+            <a:ext cx="384048" cy="384048"/>
+          </a:xfrm>
+          <a:prstGeom prst="ellipse">
+            <a:avLst/>
+          </a:prstGeom>
+          <a:solidFill>
+            <a:srgbClr val="FBE3E0"/>
+          </a:solidFill>
+          <a:ln w="12700">
+            <a:solidFill>
+              <a:srgbClr val="E0342C"/>
+            </a:solidFill>
+            <a:prstDash val="solid"/>
+          </a:ln>
+        </p:spPr>
+      </p:sp>
+      <p:sp>
+        <p:nvSpPr>
+          <p:cNvPr id="12" name="Text 10"/>
+          <p:cNvSpPr/>
+          <p:nvPr/>
+        </p:nvSpPr>
+        <p:spPr>
+          <a:xfrm>
+            <a:off x="548640" y="3236976"/>
+            <a:ext cx="384048" cy="384048"/>
+          </a:xfrm>
+          <a:prstGeom prst="rect">
+            <a:avLst/>
+          </a:prstGeom>
+          <a:noFill/>
+          <a:ln/>
+        </p:spPr>
+        <p:txBody>
+          <a:bodyPr wrap="square" rtlCol="0" anchor="ctr"/>
+          <a:lstStyle/>
+          <a:p>
+            <a:pPr algn="ctr" indent="0" marL="0">
+              <a:buNone/>
+            </a:pPr>
+            <a:r>
+              <a:rPr lang="en-US" sz="1300" b="1" dirty="0">
+                <a:solidFill>
+                  <a:srgbClr val="E0342C"/>
+                </a:solidFill>
+                <a:latin typeface="Arial" pitchFamily="34" charset="0"/>
+                <a:ea typeface="Arial" pitchFamily="34" charset="-122"/>
+                <a:cs typeface="Arial" pitchFamily="34" charset="-120"/>
+              </a:rPr>
+              <a:t>3</a:t>
+            </a:r>
+            <a:endParaRPr lang="en-US" sz="1300" dirty="0"/>
+          </a:p>
+        </p:txBody>
+      </p:sp>
+      <p:sp>
+        <p:nvSpPr>
+          <p:cNvPr id="13" name="Text 11"/>
+          <p:cNvSpPr/>
+          <p:nvPr/>
+        </p:nvSpPr>
+        <p:spPr>
+          <a:xfrm>
+            <a:off x="1097280" y="3172968"/>
+            <a:ext cx="4754880" cy="914400"/>
+          </a:xfrm>
+          <a:prstGeom prst="rect">
+            <a:avLst/>
+          </a:prstGeom>
+          <a:noFill/>
+          <a:ln/>
+        </p:spPr>
+        <p:txBody>
+          <a:bodyPr wrap="square" rtlCol="0" anchor="t"/>
+          <a:lstStyle/>
+          <a:p>
+            <a:pPr indent="0" marL="0">
+              <a:lnSpc>
+                <a:spcPct val="95000"/>
+              </a:lnSpc>
+              <a:buNone/>
+            </a:pPr>
+            <a:r>
+              <a:rPr lang="en-US" sz="1300" b="1" dirty="0">
+                <a:solidFill>
+                  <a:srgbClr val="1A1A1A"/>
+                </a:solidFill>
+                <a:latin typeface="Arial" pitchFamily="34" charset="0"/>
+                <a:ea typeface="Arial" pitchFamily="34" charset="-122"/>
+                <a:cs typeface="Arial" pitchFamily="34" charset="-120"/>
+              </a:rPr>
+              <a:t>Publish &amp; share
+</a:t>
+            </a:r>
+            <a:pPr indent="0" marL="0">
+              <a:lnSpc>
+                <a:spcPct val="95000"/>
+              </a:lnSpc>
+              <a:buNone/>
+            </a:pPr>
+            <a:r>
+              <a:rPr lang="en-US" sz="1100" dirty="0">
+                <a:solidFill>
+                  <a:srgbClr val="6B6B6B"/>
+                </a:solidFill>
+                <a:latin typeface="Arial" pitchFamily="34" charset="0"/>
+                <a:ea typeface="Arial" pitchFamily="34" charset="-122"/>
+                <a:cs typeface="Arial" pitchFamily="34" charset="-120"/>
+              </a:rPr>
+              <a:t>Open the role and share the apply link with candidates.</a:t>
+            </a:r>
+            <a:endParaRPr lang="en-US" sz="1300" dirty="0"/>
+          </a:p>
+        </p:txBody>
+      </p:sp>
+      <p:sp>
+        <p:nvSpPr>
+          <p:cNvPr id="14" name="Shape 12"/>
           <p:cNvSpPr/>
           <p:nvPr/>
         </p:nvSpPr>
@@ -4500,7 +4355,7 @@
       </p:sp>
       <p:sp>
         <p:nvSpPr>
-          <p:cNvPr id="12" name="Shape 10"/>
+          <p:cNvPr id="15" name="Shape 13"/>
           <p:cNvSpPr/>
           <p:nvPr/>
         </p:nvSpPr>
@@ -4520,7 +4375,7 @@
       </p:sp>
       <p:sp>
         <p:nvSpPr>
-          <p:cNvPr id="13" name="Shape 11"/>
+          <p:cNvPr id="16" name="Shape 14"/>
           <p:cNvSpPr/>
           <p:nvPr/>
         </p:nvSpPr>
@@ -4540,7 +4395,7 @@
       </p:sp>
       <p:sp>
         <p:nvSpPr>
-          <p:cNvPr id="14" name="Shape 12"/>
+          <p:cNvPr id="17" name="Shape 15"/>
           <p:cNvSpPr/>
           <p:nvPr/>
         </p:nvSpPr>
@@ -4560,7 +4415,7 @@
       </p:sp>
       <p:sp>
         <p:nvSpPr>
-          <p:cNvPr id="15" name="Shape 13"/>
+          <p:cNvPr id="18" name="Shape 16"/>
           <p:cNvSpPr/>
           <p:nvPr/>
         </p:nvSpPr>
@@ -4580,7 +4435,7 @@
       </p:sp>
       <p:sp>
         <p:nvSpPr>
-          <p:cNvPr id="16" name="Text 14"/>
+          <p:cNvPr id="19" name="Text 17"/>
           <p:cNvSpPr/>
           <p:nvPr/>
         </p:nvSpPr>
@@ -4611,7 +4466,7 @@
                 <a:ea typeface="Arial" pitchFamily="34" charset="-122"/>
                 <a:cs typeface="Arial" pitchFamily="34" charset="-120"/>
               </a:rPr>
-              <a:t>Recruiter · Dashboard</a:t>
+              <a:t>Recruiter · New opening</a:t>
             </a:r>
             <a:endParaRPr lang="en-US" sz="1200" dirty="0"/>
           </a:p>
@@ -4619,7 +4474,7 @@
       </p:sp>
       <p:sp>
         <p:nvSpPr>
-          <p:cNvPr id="17" name="Text 15"/>
+          <p:cNvPr id="20" name="Text 18"/>
           <p:cNvSpPr/>
           <p:nvPr/>
         </p:nvSpPr>
@@ -4650,7 +4505,7 @@
                 <a:ea typeface="Arial" pitchFamily="34" charset="-122"/>
                 <a:cs typeface="Arial" pitchFamily="34" charset="-120"/>
               </a:rPr>
-              <a:t>Your hiring at a glance</a:t>
+              <a:t>Define the role</a:t>
             </a:r>
             <a:endParaRPr lang="en-US" sz="1700" dirty="0"/>
           </a:p>
@@ -4658,7 +4513,7 @@
       </p:sp>
       <p:sp>
         <p:nvSpPr>
-          <p:cNvPr id="18" name="Text 16"/>
+          <p:cNvPr id="21" name="Text 19"/>
           <p:cNvSpPr/>
           <p:nvPr/>
         </p:nvSpPr>
@@ -4693,7 +4548,7 @@
                 <a:ea typeface="Arial" pitchFamily="34" charset="-122"/>
                 <a:cs typeface="Arial" pitchFamily="34" charset="-120"/>
               </a:rPr>
-              <a:t>Open positions &amp; active candidates</a:t>
+              <a:t>Title, department, requirements</a:t>
             </a:r>
             <a:endParaRPr lang="en-US" sz="1250" dirty="0"/>
           </a:p>
@@ -4714,7 +4569,7 @@
                 <a:ea typeface="Arial" pitchFamily="34" charset="-122"/>
                 <a:cs typeface="Arial" pitchFamily="34" charset="-120"/>
               </a:rPr>
-              <a:t>Pipeline funnel by stage</a:t>
+              <a:t>Weighted screening criteria</a:t>
             </a:r>
             <a:endParaRPr lang="en-US" sz="1250" dirty="0"/>
           </a:p>
@@ -4735,7 +4590,7 @@
                 <a:ea typeface="Arial" pitchFamily="34" charset="-122"/>
                 <a:cs typeface="Arial" pitchFamily="34" charset="-120"/>
               </a:rPr>
-              <a:t>Upcoming interviews &amp; activity</a:t>
+              <a:t>One-click public apply link</a:t>
             </a:r>
             <a:endParaRPr lang="en-US" sz="1250" dirty="0"/>
           </a:p>
@@ -4826,7 +4681,7 @@
                 <a:ea typeface="Arial" pitchFamily="34" charset="-122"/>
                 <a:cs typeface="Arial" pitchFamily="34" charset="-120"/>
               </a:rPr>
-              <a:t>RECRUITER · STEP 2</a:t>
+              <a:t>RECRUITER · STEP 3</a:t>
             </a:r>
             <a:endParaRPr lang="en-US" sz="1200" dirty="0"/>
           </a:p>
@@ -4865,7 +4720,7 @@
                 <a:ea typeface="Arial" pitchFamily="34" charset="-122"/>
                 <a:cs typeface="Arial" pitchFamily="34" charset="-120"/>
               </a:rPr>
-              <a:t>Create a job opening</a:t>
+              <a:t>Generate AI job posts</a:t>
             </a:r>
             <a:endParaRPr lang="en-US" sz="2500" dirty="0"/>
           </a:p>
@@ -4971,7 +4826,7 @@
                 <a:ea typeface="Arial" pitchFamily="34" charset="-122"/>
                 <a:cs typeface="Arial" pitchFamily="34" charset="-120"/>
               </a:rPr>
-              <a:t>Openings → New
+              <a:t>Opening → Posts
 </a:t>
             </a:r>
             <a:pPr indent="0" marL="0">
@@ -4989,7 +4844,7 @@
                 <a:ea typeface="Arial" pitchFamily="34" charset="-122"/>
                 <a:cs typeface="Arial" pitchFamily="34" charset="-120"/>
               </a:rPr>
-              <a:t>Add the title, department, and must-have requirements.</a:t>
+              <a:t>AI writes a platform-tuned post for each channel in seconds.</a:t>
             </a:r>
             <a:endParaRPr lang="en-US" sz="1300" dirty="0"/>
           </a:p>
@@ -5003,7 +4858,7 @@
         </p:nvSpPr>
         <p:spPr>
           <a:xfrm>
-            <a:off x="548640" y="2450592"/>
+            <a:off x="548640" y="2560320"/>
             <a:ext cx="384048" cy="384048"/>
           </a:xfrm>
           <a:prstGeom prst="ellipse">
@@ -5028,7 +4883,7 @@
         </p:nvSpPr>
         <p:spPr>
           <a:xfrm>
-            <a:off x="548640" y="2450592"/>
+            <a:off x="548640" y="2560320"/>
             <a:ext cx="384048" cy="384048"/>
           </a:xfrm>
           <a:prstGeom prst="rect">
@@ -5067,7 +4922,7 @@
         </p:nvSpPr>
         <p:spPr>
           <a:xfrm>
-            <a:off x="1097280" y="2386584"/>
+            <a:off x="1097280" y="2496312"/>
             <a:ext cx="4754880" cy="914400"/>
           </a:xfrm>
           <a:prstGeom prst="rect">
@@ -5095,7 +4950,7 @@
                 <a:ea typeface="Arial" pitchFamily="34" charset="-122"/>
                 <a:cs typeface="Arial" pitchFamily="34" charset="-120"/>
               </a:rPr>
-              <a:t>Set screening weights
+              <a:t>Review &amp; publish
 </a:t>
             </a:r>
             <a:pPr indent="0" marL="0">
@@ -5113,7 +4968,7 @@
                 <a:ea typeface="Arial" pitchFamily="34" charset="-122"/>
                 <a:cs typeface="Arial" pitchFamily="34" charset="-120"/>
               </a:rPr>
-              <a:t>Tell the AI what matters most for this role.</a:t>
+              <a:t>Edit, then publish in assisted mode.</a:t>
             </a:r>
             <a:endParaRPr lang="en-US" sz="1300" dirty="0"/>
           </a:p>
@@ -5127,7 +4982,7 @@
         </p:nvSpPr>
         <p:spPr>
           <a:xfrm>
-            <a:off x="548640" y="3236976"/>
+            <a:off x="548640" y="3346704"/>
             <a:ext cx="384048" cy="384048"/>
           </a:xfrm>
           <a:prstGeom prst="ellipse">
@@ -5152,7 +5007,7 @@
         </p:nvSpPr>
         <p:spPr>
           <a:xfrm>
-            <a:off x="548640" y="3236976"/>
+            <a:off x="548640" y="3346704"/>
             <a:ext cx="384048" cy="384048"/>
           </a:xfrm>
           <a:prstGeom prst="rect">
@@ -5191,7 +5046,7 @@
         </p:nvSpPr>
         <p:spPr>
           <a:xfrm>
-            <a:off x="1097280" y="3172968"/>
+            <a:off x="1097280" y="3282696"/>
             <a:ext cx="4754880" cy="914400"/>
           </a:xfrm>
           <a:prstGeom prst="rect">
@@ -5219,7 +5074,7 @@
                 <a:ea typeface="Arial" pitchFamily="34" charset="-122"/>
                 <a:cs typeface="Arial" pitchFamily="34" charset="-120"/>
               </a:rPr>
-              <a:t>Publish &amp; share
+              <a:t>Coming soon
 </a:t>
             </a:r>
             <a:pPr indent="0" marL="0">
@@ -5237,7 +5092,7 @@
                 <a:ea typeface="Arial" pitchFamily="34" charset="-122"/>
                 <a:cs typeface="Arial" pitchFamily="34" charset="-120"/>
               </a:rPr>
-              <a:t>Open the role and share the apply link with candidates.</a:t>
+              <a:t>One-click posting to LinkedIn/Indeed via integrations is on the way.</a:t>
             </a:r>
             <a:endParaRPr lang="en-US" sz="1300" dirty="0"/>
           </a:p>
@@ -5390,7 +5245,7 @@
                 <a:ea typeface="Arial" pitchFamily="34" charset="-122"/>
                 <a:cs typeface="Arial" pitchFamily="34" charset="-120"/>
               </a:rPr>
-              <a:t>Recruiter · New opening</a:t>
+              <a:t>Recruiter · AI posts</a:t>
             </a:r>
             <a:endParaRPr lang="en-US" sz="1200" dirty="0"/>
           </a:p>
@@ -5429,7 +5284,7 @@
                 <a:ea typeface="Arial" pitchFamily="34" charset="-122"/>
                 <a:cs typeface="Arial" pitchFamily="34" charset="-120"/>
               </a:rPr>
-              <a:t>Define the role</a:t>
+              <a:t>From title to post in seconds</a:t>
             </a:r>
             <a:endParaRPr lang="en-US" sz="1700" dirty="0"/>
           </a:p>
@@ -5472,7 +5327,7 @@
                 <a:ea typeface="Arial" pitchFamily="34" charset="-122"/>
                 <a:cs typeface="Arial" pitchFamily="34" charset="-120"/>
               </a:rPr>
-              <a:t>Title, department, requirements</a:t>
+              <a:t>Platform-tuned AI drafts</a:t>
             </a:r>
             <a:endParaRPr lang="en-US" sz="1250" dirty="0"/>
           </a:p>
@@ -5493,7 +5348,7 @@
                 <a:ea typeface="Arial" pitchFamily="34" charset="-122"/>
                 <a:cs typeface="Arial" pitchFamily="34" charset="-120"/>
               </a:rPr>
-              <a:t>Weighted screening criteria</a:t>
+              <a:t>Edit &amp; publish (assisted)</a:t>
             </a:r>
             <a:endParaRPr lang="en-US" sz="1250" dirty="0"/>
           </a:p>
@@ -5514,7 +5369,7 @@
                 <a:ea typeface="Arial" pitchFamily="34" charset="-122"/>
                 <a:cs typeface="Arial" pitchFamily="34" charset="-120"/>
               </a:rPr>
-              <a:t>One-click public apply link</a:t>
+              <a:t>SEO-scored content</a:t>
             </a:r>
             <a:endParaRPr lang="en-US" sz="1250" dirty="0"/>
           </a:p>
@@ -5605,7 +5460,7 @@
                 <a:ea typeface="Arial" pitchFamily="34" charset="-122"/>
                 <a:cs typeface="Arial" pitchFamily="34" charset="-120"/>
               </a:rPr>
-              <a:t>RECRUITER · STEP 3</a:t>
+              <a:t>RECRUITER · STEP 4</a:t>
             </a:r>
             <a:endParaRPr lang="en-US" sz="1200" dirty="0"/>
           </a:p>
@@ -5644,7 +5499,7 @@
                 <a:ea typeface="Arial" pitchFamily="34" charset="-122"/>
                 <a:cs typeface="Arial" pitchFamily="34" charset="-120"/>
               </a:rPr>
-              <a:t>Generate AI job posts</a:t>
+              <a:t>Add &amp; AI-screen candidates</a:t>
             </a:r>
             <a:endParaRPr lang="en-US" sz="2500" dirty="0"/>
           </a:p>
@@ -5750,7 +5605,7 @@
                 <a:ea typeface="Arial" pitchFamily="34" charset="-122"/>
                 <a:cs typeface="Arial" pitchFamily="34" charset="-120"/>
               </a:rPr>
-              <a:t>Opening → Posts
+              <a:t>Candidates / Applicants
 </a:t>
             </a:r>
             <a:pPr indent="0" marL="0">
@@ -5768,7 +5623,7 @@
                 <a:ea typeface="Arial" pitchFamily="34" charset="-122"/>
                 <a:cs typeface="Arial" pitchFamily="34" charset="-120"/>
               </a:rPr>
-              <a:t>AI writes a platform-tuned post for each channel in seconds.</a:t>
+              <a:t>Add candidates manually or let them apply via the link.</a:t>
             </a:r>
             <a:endParaRPr lang="en-US" sz="1300" dirty="0"/>
           </a:p>
@@ -5782,7 +5637,7 @@
         </p:nvSpPr>
         <p:spPr>
           <a:xfrm>
-            <a:off x="548640" y="2560320"/>
+            <a:off x="548640" y="2450592"/>
             <a:ext cx="384048" cy="384048"/>
           </a:xfrm>
           <a:prstGeom prst="ellipse">
@@ -5807,7 +5662,7 @@
         </p:nvSpPr>
         <p:spPr>
           <a:xfrm>
-            <a:off x="548640" y="2560320"/>
+            <a:off x="548640" y="2450592"/>
             <a:ext cx="384048" cy="384048"/>
           </a:xfrm>
           <a:prstGeom prst="rect">
@@ -5846,7 +5701,7 @@
         </p:nvSpPr>
         <p:spPr>
           <a:xfrm>
-            <a:off x="1097280" y="2496312"/>
+            <a:off x="1097280" y="2386584"/>
             <a:ext cx="4754880" cy="914400"/>
           </a:xfrm>
           <a:prstGeom prst="rect">
@@ -5874,7 +5729,7 @@
                 <a:ea typeface="Arial" pitchFamily="34" charset="-122"/>
                 <a:cs typeface="Arial" pitchFamily="34" charset="-120"/>
               </a:rPr>
-              <a:t>Review &amp; publish
+              <a:t>AI ranking
 </a:t>
             </a:r>
             <a:pPr indent="0" marL="0">
@@ -5892,7 +5747,7 @@
                 <a:ea typeface="Arial" pitchFamily="34" charset="-122"/>
                 <a:cs typeface="Arial" pitchFamily="34" charset="-120"/>
               </a:rPr>
-              <a:t>Edit, then publish in assisted mode.</a:t>
+              <a:t>Every applicant is scored against the role with an explainable match report.</a:t>
             </a:r>
             <a:endParaRPr lang="en-US" sz="1300" dirty="0"/>
           </a:p>
@@ -5998,7 +5853,7 @@
                 <a:ea typeface="Arial" pitchFamily="34" charset="-122"/>
                 <a:cs typeface="Arial" pitchFamily="34" charset="-120"/>
               </a:rPr>
-              <a:t>Coming soon
+              <a:t>Work the pipeline
 </a:t>
             </a:r>
             <a:pPr indent="0" marL="0">
@@ -6016,7 +5871,7 @@
                 <a:ea typeface="Arial" pitchFamily="34" charset="-122"/>
                 <a:cs typeface="Arial" pitchFamily="34" charset="-120"/>
               </a:rPr>
-              <a:t>One-click posting to LinkedIn/Indeed via integrations is on the way.</a:t>
+              <a:t>Move candidates from Applied all the way to Hired.</a:t>
             </a:r>
             <a:endParaRPr lang="en-US" sz="1300" dirty="0"/>
           </a:p>
@@ -6169,7 +6024,7 @@
                 <a:ea typeface="Arial" pitchFamily="34" charset="-122"/>
                 <a:cs typeface="Arial" pitchFamily="34" charset="-120"/>
               </a:rPr>
-              <a:t>Recruiter · AI posts</a:t>
+              <a:t>Recruiter · Candidates</a:t>
             </a:r>
             <a:endParaRPr lang="en-US" sz="1200" dirty="0"/>
           </a:p>
@@ -6208,7 +6063,7 @@
                 <a:ea typeface="Arial" pitchFamily="34" charset="-122"/>
                 <a:cs typeface="Arial" pitchFamily="34" charset="-120"/>
               </a:rPr>
-              <a:t>From title to post in seconds</a:t>
+              <a:t>Rank, don't read</a:t>
             </a:r>
             <a:endParaRPr lang="en-US" sz="1700" dirty="0"/>
           </a:p>
@@ -6251,7 +6106,7 @@
                 <a:ea typeface="Arial" pitchFamily="34" charset="-122"/>
                 <a:cs typeface="Arial" pitchFamily="34" charset="-120"/>
               </a:rPr>
-              <a:t>Platform-tuned AI drafts</a:t>
+              <a:t>Explainable AI match scores</a:t>
             </a:r>
             <a:endParaRPr lang="en-US" sz="1250" dirty="0"/>
           </a:p>
@@ -6272,7 +6127,7 @@
                 <a:ea typeface="Arial" pitchFamily="34" charset="-122"/>
                 <a:cs typeface="Arial" pitchFamily="34" charset="-120"/>
               </a:rPr>
-              <a:t>Edit &amp; publish (assisted)</a:t>
+              <a:t>Add candidates or accept applies</a:t>
             </a:r>
             <a:endParaRPr lang="en-US" sz="1250" dirty="0"/>
           </a:p>
@@ -6293,7 +6148,7 @@
                 <a:ea typeface="Arial" pitchFamily="34" charset="-122"/>
                 <a:cs typeface="Arial" pitchFamily="34" charset="-120"/>
               </a:rPr>
-              <a:t>SEO-scored content</a:t>
+              <a:t>Drag through the hiring pipeline</a:t>
             </a:r>
             <a:endParaRPr lang="en-US" sz="1250" dirty="0"/>
           </a:p>
@@ -6310,6 +6165,175 @@
 <file path=ppt/slides/slide15.xml><?xml version="1.0" encoding="utf-8"?>
 <p:sld xmlns:a="http://schemas.openxmlformats.org/drawingml/2006/main" xmlns:r="http://schemas.openxmlformats.org/officeDocument/2006/relationships" xmlns:p="http://schemas.openxmlformats.org/presentationml/2006/main">
   <p:cSld name="Slide 15">
+    <p:bg>
+      <p:bgPr>
+        <a:solidFill>
+          <a:srgbClr val="1A1A1A"/>
+        </a:solidFill>
+      </p:bgPr>
+    </p:bg>
+    <p:spTree>
+      <p:nvGrpSpPr>
+        <p:cNvPr id="1" name=""/>
+        <p:cNvGrpSpPr/>
+        <p:nvPr/>
+      </p:nvGrpSpPr>
+      <p:grpSpPr>
+        <a:xfrm>
+          <a:off x="0" y="0"/>
+          <a:ext cx="0" cy="0"/>
+          <a:chOff x="0" y="0"/>
+          <a:chExt cx="0" cy="0"/>
+        </a:xfrm>
+      </p:grpSpPr>
+      <p:sp>
+        <p:nvSpPr>
+          <p:cNvPr id="2" name="Shape 0"/>
+          <p:cNvSpPr/>
+          <p:nvPr/>
+        </p:nvSpPr>
+        <p:spPr>
+          <a:xfrm>
+            <a:off x="0" y="3200400"/>
+            <a:ext cx="12191695" cy="45720"/>
+          </a:xfrm>
+          <a:prstGeom prst="rect">
+            <a:avLst/>
+          </a:prstGeom>
+          <a:solidFill>
+            <a:srgbClr val="E0342C"/>
+          </a:solidFill>
+          <a:ln/>
+        </p:spPr>
+      </p:sp>
+      <p:sp>
+        <p:nvSpPr>
+          <p:cNvPr id="3" name="Text 1"/>
+          <p:cNvSpPr/>
+          <p:nvPr/>
+        </p:nvSpPr>
+        <p:spPr>
+          <a:xfrm>
+            <a:off x="822960" y="2286000"/>
+            <a:ext cx="10058400" cy="365760"/>
+          </a:xfrm>
+          <a:prstGeom prst="rect">
+            <a:avLst/>
+          </a:prstGeom>
+          <a:noFill/>
+          <a:ln/>
+        </p:spPr>
+        <p:txBody>
+          <a:bodyPr wrap="square" rtlCol="0" anchor="ctr"/>
+          <a:lstStyle/>
+          <a:p>
+            <a:pPr indent="0" marL="0">
+              <a:buNone/>
+            </a:pPr>
+            <a:r>
+              <a:rPr lang="en-US" sz="1400" b="1" spc="300" kern="0" dirty="0">
+                <a:solidFill>
+                  <a:srgbClr val="E0342C"/>
+                </a:solidFill>
+                <a:latin typeface="Arial" pitchFamily="34" charset="0"/>
+                <a:ea typeface="Arial" pitchFamily="34" charset="-122"/>
+                <a:cs typeface="Arial" pitchFamily="34" charset="-120"/>
+              </a:rPr>
+              <a:t>HOW-TO · ROLE 3</a:t>
+            </a:r>
+            <a:endParaRPr lang="en-US" sz="1400" dirty="0"/>
+          </a:p>
+        </p:txBody>
+      </p:sp>
+      <p:sp>
+        <p:nvSpPr>
+          <p:cNvPr id="4" name="Text 2"/>
+          <p:cNvSpPr/>
+          <p:nvPr/>
+        </p:nvSpPr>
+        <p:spPr>
+          <a:xfrm>
+            <a:off x="822960" y="2651760"/>
+            <a:ext cx="10515600" cy="914400"/>
+          </a:xfrm>
+          <a:prstGeom prst="rect">
+            <a:avLst/>
+          </a:prstGeom>
+          <a:noFill/>
+          <a:ln/>
+        </p:spPr>
+        <p:txBody>
+          <a:bodyPr wrap="square" rtlCol="0" anchor="ctr"/>
+          <a:lstStyle/>
+          <a:p>
+            <a:pPr indent="0" marL="0">
+              <a:buNone/>
+            </a:pPr>
+            <a:r>
+              <a:rPr lang="en-US" sz="4000" b="1" dirty="0">
+                <a:solidFill>
+                  <a:srgbClr val="FFFFFF"/>
+                </a:solidFill>
+                <a:latin typeface="Arial" pitchFamily="34" charset="0"/>
+                <a:ea typeface="Arial" pitchFamily="34" charset="-122"/>
+                <a:cs typeface="Arial" pitchFamily="34" charset="-120"/>
+              </a:rPr>
+              <a:t>Hiring Lead / Manager &amp; Interviewer</a:t>
+            </a:r>
+            <a:endParaRPr lang="en-US" sz="4000" dirty="0"/>
+          </a:p>
+        </p:txBody>
+      </p:sp>
+      <p:sp>
+        <p:nvSpPr>
+          <p:cNvPr id="5" name="Text 3"/>
+          <p:cNvSpPr/>
+          <p:nvPr/>
+        </p:nvSpPr>
+        <p:spPr>
+          <a:xfrm>
+            <a:off x="822960" y="3401568"/>
+            <a:ext cx="10058400" cy="731520"/>
+          </a:xfrm>
+          <a:prstGeom prst="rect">
+            <a:avLst/>
+          </a:prstGeom>
+          <a:noFill/>
+          <a:ln/>
+        </p:spPr>
+        <p:txBody>
+          <a:bodyPr wrap="square" rtlCol="0" anchor="ctr"/>
+          <a:lstStyle/>
+          <a:p>
+            <a:pPr indent="0" marL="0">
+              <a:buNone/>
+            </a:pPr>
+            <a:r>
+              <a:rPr lang="en-US" sz="1600" dirty="0">
+                <a:solidFill>
+                  <a:srgbClr val="C9C4BD"/>
+                </a:solidFill>
+                <a:latin typeface="Arial" pitchFamily="34" charset="0"/>
+                <a:ea typeface="Arial" pitchFamily="34" charset="-122"/>
+                <a:cs typeface="Arial" pitchFamily="34" charset="-120"/>
+              </a:rPr>
+              <a:t>Review, assess, interview, decide</a:t>
+            </a:r>
+            <a:endParaRPr lang="en-US" sz="1600" dirty="0"/>
+          </a:p>
+        </p:txBody>
+      </p:sp>
+    </p:spTree>
+  </p:cSld>
+  <p:clrMapOvr>
+    <a:masterClrMapping/>
+  </p:clrMapOvr>
+</p:sld>
+</file>
+
+<file path=ppt/slides/slide16.xml><?xml version="1.0" encoding="utf-8"?>
+<p:sld xmlns:a="http://schemas.openxmlformats.org/drawingml/2006/main" xmlns:r="http://schemas.openxmlformats.org/officeDocument/2006/relationships" xmlns:p="http://schemas.openxmlformats.org/presentationml/2006/main">
+  <p:cSld name="Slide 16">
     <p:bg>
       <p:bgPr>
         <a:solidFill>
@@ -6384,7 +6408,7 @@
                 <a:ea typeface="Arial" pitchFamily="34" charset="-122"/>
                 <a:cs typeface="Arial" pitchFamily="34" charset="-120"/>
               </a:rPr>
-              <a:t>RECRUITER · STEP 4</a:t>
+              <a:t>HIRING MANAGER · STEP 1</a:t>
             </a:r>
             <a:endParaRPr lang="en-US" sz="1200" dirty="0"/>
           </a:p>
@@ -6423,7 +6447,7 @@
                 <a:ea typeface="Arial" pitchFamily="34" charset="-122"/>
                 <a:cs typeface="Arial" pitchFamily="34" charset="-120"/>
               </a:rPr>
-              <a:t>Add &amp; AI-screen candidates</a:t>
+              <a:t>Assign assessments</a:t>
             </a:r>
             <a:endParaRPr lang="en-US" sz="2500" dirty="0"/>
           </a:p>
@@ -6529,7 +6553,7 @@
                 <a:ea typeface="Arial" pitchFamily="34" charset="-122"/>
                 <a:cs typeface="Arial" pitchFamily="34" charset="-120"/>
               </a:rPr>
-              <a:t>Candidates / Applicants
+              <a:t>Assessments
 </a:t>
             </a:r>
             <a:pPr indent="0" marL="0">
@@ -6547,7 +6571,7 @@
                 <a:ea typeface="Arial" pitchFamily="34" charset="-122"/>
                 <a:cs typeface="Arial" pitchFamily="34" charset="-120"/>
               </a:rPr>
-              <a:t>Add candidates manually or let them apply via the link.</a:t>
+              <a:t>Generate a role-specific test with AI, or reuse one from the library.</a:t>
             </a:r>
             <a:endParaRPr lang="en-US" sz="1300" dirty="0"/>
           </a:p>
@@ -6561,7 +6585,7 @@
         </p:nvSpPr>
         <p:spPr>
           <a:xfrm>
-            <a:off x="548640" y="2450592"/>
+            <a:off x="548640" y="2560320"/>
             <a:ext cx="384048" cy="384048"/>
           </a:xfrm>
           <a:prstGeom prst="ellipse">
@@ -6586,7 +6610,7 @@
         </p:nvSpPr>
         <p:spPr>
           <a:xfrm>
-            <a:off x="548640" y="2450592"/>
+            <a:off x="548640" y="2560320"/>
             <a:ext cx="384048" cy="384048"/>
           </a:xfrm>
           <a:prstGeom prst="rect">
@@ -6625,7 +6649,7 @@
         </p:nvSpPr>
         <p:spPr>
           <a:xfrm>
-            <a:off x="1097280" y="2386584"/>
+            <a:off x="1097280" y="2496312"/>
             <a:ext cx="4754880" cy="914400"/>
           </a:xfrm>
           <a:prstGeom prst="rect">
@@ -6653,7 +6677,7 @@
                 <a:ea typeface="Arial" pitchFamily="34" charset="-122"/>
                 <a:cs typeface="Arial" pitchFamily="34" charset="-120"/>
               </a:rPr>
-              <a:t>AI ranking
+              <a:t>Auto-graded + proctored
 </a:t>
             </a:r>
             <a:pPr indent="0" marL="0">
@@ -6671,7 +6695,7 @@
                 <a:ea typeface="Arial" pitchFamily="34" charset="-122"/>
                 <a:cs typeface="Arial" pitchFamily="34" charset="-120"/>
               </a:rPr>
-              <a:t>Every applicant is scored against the role with an explainable match report.</a:t>
+              <a:t>Objective questions grade instantly; integrity signals are flagged.</a:t>
             </a:r>
             <a:endParaRPr lang="en-US" sz="1300" dirty="0"/>
           </a:p>
@@ -6680,130 +6704,6 @@
       <p:sp>
         <p:nvSpPr>
           <p:cNvPr id="11" name="Shape 9"/>
-          <p:cNvSpPr/>
-          <p:nvPr/>
-        </p:nvSpPr>
-        <p:spPr>
-          <a:xfrm>
-            <a:off x="548640" y="3346704"/>
-            <a:ext cx="384048" cy="384048"/>
-          </a:xfrm>
-          <a:prstGeom prst="ellipse">
-            <a:avLst/>
-          </a:prstGeom>
-          <a:solidFill>
-            <a:srgbClr val="FBE3E0"/>
-          </a:solidFill>
-          <a:ln w="12700">
-            <a:solidFill>
-              <a:srgbClr val="E0342C"/>
-            </a:solidFill>
-            <a:prstDash val="solid"/>
-          </a:ln>
-        </p:spPr>
-      </p:sp>
-      <p:sp>
-        <p:nvSpPr>
-          <p:cNvPr id="12" name="Text 10"/>
-          <p:cNvSpPr/>
-          <p:nvPr/>
-        </p:nvSpPr>
-        <p:spPr>
-          <a:xfrm>
-            <a:off x="548640" y="3346704"/>
-            <a:ext cx="384048" cy="384048"/>
-          </a:xfrm>
-          <a:prstGeom prst="rect">
-            <a:avLst/>
-          </a:prstGeom>
-          <a:noFill/>
-          <a:ln/>
-        </p:spPr>
-        <p:txBody>
-          <a:bodyPr wrap="square" rtlCol="0" anchor="ctr"/>
-          <a:lstStyle/>
-          <a:p>
-            <a:pPr algn="ctr" indent="0" marL="0">
-              <a:buNone/>
-            </a:pPr>
-            <a:r>
-              <a:rPr lang="en-US" sz="1300" b="1" dirty="0">
-                <a:solidFill>
-                  <a:srgbClr val="E0342C"/>
-                </a:solidFill>
-                <a:latin typeface="Arial" pitchFamily="34" charset="0"/>
-                <a:ea typeface="Arial" pitchFamily="34" charset="-122"/>
-                <a:cs typeface="Arial" pitchFamily="34" charset="-120"/>
-              </a:rPr>
-              <a:t>3</a:t>
-            </a:r>
-            <a:endParaRPr lang="en-US" sz="1300" dirty="0"/>
-          </a:p>
-        </p:txBody>
-      </p:sp>
-      <p:sp>
-        <p:nvSpPr>
-          <p:cNvPr id="13" name="Text 11"/>
-          <p:cNvSpPr/>
-          <p:nvPr/>
-        </p:nvSpPr>
-        <p:spPr>
-          <a:xfrm>
-            <a:off x="1097280" y="3282696"/>
-            <a:ext cx="4754880" cy="914400"/>
-          </a:xfrm>
-          <a:prstGeom prst="rect">
-            <a:avLst/>
-          </a:prstGeom>
-          <a:noFill/>
-          <a:ln/>
-        </p:spPr>
-        <p:txBody>
-          <a:bodyPr wrap="square" rtlCol="0" anchor="t"/>
-          <a:lstStyle/>
-          <a:p>
-            <a:pPr indent="0" marL="0">
-              <a:lnSpc>
-                <a:spcPct val="95000"/>
-              </a:lnSpc>
-              <a:buNone/>
-            </a:pPr>
-            <a:r>
-              <a:rPr lang="en-US" sz="1300" b="1" dirty="0">
-                <a:solidFill>
-                  <a:srgbClr val="1A1A1A"/>
-                </a:solidFill>
-                <a:latin typeface="Arial" pitchFamily="34" charset="0"/>
-                <a:ea typeface="Arial" pitchFamily="34" charset="-122"/>
-                <a:cs typeface="Arial" pitchFamily="34" charset="-120"/>
-              </a:rPr>
-              <a:t>Work the pipeline
-</a:t>
-            </a:r>
-            <a:pPr indent="0" marL="0">
-              <a:lnSpc>
-                <a:spcPct val="95000"/>
-              </a:lnSpc>
-              <a:buNone/>
-            </a:pPr>
-            <a:r>
-              <a:rPr lang="en-US" sz="1100" dirty="0">
-                <a:solidFill>
-                  <a:srgbClr val="6B6B6B"/>
-                </a:solidFill>
-                <a:latin typeface="Arial" pitchFamily="34" charset="0"/>
-                <a:ea typeface="Arial" pitchFamily="34" charset="-122"/>
-                <a:cs typeface="Arial" pitchFamily="34" charset="-120"/>
-              </a:rPr>
-              <a:t>Move candidates from Applied all the way to Hired.</a:t>
-            </a:r>
-            <a:endParaRPr lang="en-US" sz="1300" dirty="0"/>
-          </a:p>
-        </p:txBody>
-      </p:sp>
-      <p:sp>
-        <p:nvSpPr>
-          <p:cNvPr id="14" name="Shape 12"/>
           <p:cNvSpPr/>
           <p:nvPr/>
         </p:nvSpPr>
@@ -6837,7 +6737,7 @@
       </p:sp>
       <p:sp>
         <p:nvSpPr>
-          <p:cNvPr id="15" name="Shape 13"/>
+          <p:cNvPr id="12" name="Shape 10"/>
           <p:cNvSpPr/>
           <p:nvPr/>
         </p:nvSpPr>
@@ -6857,7 +6757,7 @@
       </p:sp>
       <p:sp>
         <p:nvSpPr>
-          <p:cNvPr id="16" name="Shape 14"/>
+          <p:cNvPr id="13" name="Shape 11"/>
           <p:cNvSpPr/>
           <p:nvPr/>
         </p:nvSpPr>
@@ -6877,7 +6777,7 @@
       </p:sp>
       <p:sp>
         <p:nvSpPr>
-          <p:cNvPr id="17" name="Shape 15"/>
+          <p:cNvPr id="14" name="Shape 12"/>
           <p:cNvSpPr/>
           <p:nvPr/>
         </p:nvSpPr>
@@ -6897,7 +6797,7 @@
       </p:sp>
       <p:sp>
         <p:nvSpPr>
-          <p:cNvPr id="18" name="Shape 16"/>
+          <p:cNvPr id="15" name="Shape 13"/>
           <p:cNvSpPr/>
           <p:nvPr/>
         </p:nvSpPr>
@@ -6917,7 +6817,7 @@
       </p:sp>
       <p:sp>
         <p:nvSpPr>
-          <p:cNvPr id="19" name="Text 17"/>
+          <p:cNvPr id="16" name="Text 14"/>
           <p:cNvSpPr/>
           <p:nvPr/>
         </p:nvSpPr>
@@ -6948,7 +6848,7 @@
                 <a:ea typeface="Arial" pitchFamily="34" charset="-122"/>
                 <a:cs typeface="Arial" pitchFamily="34" charset="-120"/>
               </a:rPr>
-              <a:t>Recruiter · Candidates</a:t>
+              <a:t>Manager · Assessments</a:t>
             </a:r>
             <a:endParaRPr lang="en-US" sz="1200" dirty="0"/>
           </a:p>
@@ -6956,7 +6856,7 @@
       </p:sp>
       <p:sp>
         <p:nvSpPr>
-          <p:cNvPr id="20" name="Text 18"/>
+          <p:cNvPr id="17" name="Text 15"/>
           <p:cNvSpPr/>
           <p:nvPr/>
         </p:nvSpPr>
@@ -6987,7 +6887,7 @@
                 <a:ea typeface="Arial" pitchFamily="34" charset="-122"/>
                 <a:cs typeface="Arial" pitchFamily="34" charset="-120"/>
               </a:rPr>
-              <a:t>Rank, don't read</a:t>
+              <a:t>Test for skill, fast</a:t>
             </a:r>
             <a:endParaRPr lang="en-US" sz="1700" dirty="0"/>
           </a:p>
@@ -6995,7 +6895,7 @@
       </p:sp>
       <p:sp>
         <p:nvSpPr>
-          <p:cNvPr id="21" name="Text 19"/>
+          <p:cNvPr id="18" name="Text 16"/>
           <p:cNvSpPr/>
           <p:nvPr/>
         </p:nvSpPr>
@@ -7030,7 +6930,7 @@
                 <a:ea typeface="Arial" pitchFamily="34" charset="-122"/>
                 <a:cs typeface="Arial" pitchFamily="34" charset="-120"/>
               </a:rPr>
-              <a:t>Explainable AI match scores</a:t>
+              <a:t>AI-generated or reusable tests</a:t>
             </a:r>
             <a:endParaRPr lang="en-US" sz="1250" dirty="0"/>
           </a:p>
@@ -7051,7 +6951,7 @@
                 <a:ea typeface="Arial" pitchFamily="34" charset="-122"/>
                 <a:cs typeface="Arial" pitchFamily="34" charset="-120"/>
               </a:rPr>
-              <a:t>Add candidates or accept applies</a:t>
+              <a:t>Instant auto-grading</a:t>
             </a:r>
             <a:endParaRPr lang="en-US" sz="1250" dirty="0"/>
           </a:p>
@@ -7072,178 +6972,9 @@
                 <a:ea typeface="Arial" pitchFamily="34" charset="-122"/>
                 <a:cs typeface="Arial" pitchFamily="34" charset="-120"/>
               </a:rPr>
-              <a:t>Drag through the hiring pipeline</a:t>
+              <a:t>Proctoring &amp; integrity flags</a:t>
             </a:r>
             <a:endParaRPr lang="en-US" sz="1250" dirty="0"/>
-          </a:p>
-        </p:txBody>
-      </p:sp>
-    </p:spTree>
-  </p:cSld>
-  <p:clrMapOvr>
-    <a:masterClrMapping/>
-  </p:clrMapOvr>
-</p:sld>
-</file>
-
-<file path=ppt/slides/slide16.xml><?xml version="1.0" encoding="utf-8"?>
-<p:sld xmlns:a="http://schemas.openxmlformats.org/drawingml/2006/main" xmlns:r="http://schemas.openxmlformats.org/officeDocument/2006/relationships" xmlns:p="http://schemas.openxmlformats.org/presentationml/2006/main">
-  <p:cSld name="Slide 16">
-    <p:bg>
-      <p:bgPr>
-        <a:solidFill>
-          <a:srgbClr val="1A1A1A"/>
-        </a:solidFill>
-      </p:bgPr>
-    </p:bg>
-    <p:spTree>
-      <p:nvGrpSpPr>
-        <p:cNvPr id="1" name=""/>
-        <p:cNvGrpSpPr/>
-        <p:nvPr/>
-      </p:nvGrpSpPr>
-      <p:grpSpPr>
-        <a:xfrm>
-          <a:off x="0" y="0"/>
-          <a:ext cx="0" cy="0"/>
-          <a:chOff x="0" y="0"/>
-          <a:chExt cx="0" cy="0"/>
-        </a:xfrm>
-      </p:grpSpPr>
-      <p:sp>
-        <p:nvSpPr>
-          <p:cNvPr id="2" name="Shape 0"/>
-          <p:cNvSpPr/>
-          <p:nvPr/>
-        </p:nvSpPr>
-        <p:spPr>
-          <a:xfrm>
-            <a:off x="0" y="3200400"/>
-            <a:ext cx="12191695" cy="45720"/>
-          </a:xfrm>
-          <a:prstGeom prst="rect">
-            <a:avLst/>
-          </a:prstGeom>
-          <a:solidFill>
-            <a:srgbClr val="E0342C"/>
-          </a:solidFill>
-          <a:ln/>
-        </p:spPr>
-      </p:sp>
-      <p:sp>
-        <p:nvSpPr>
-          <p:cNvPr id="3" name="Text 1"/>
-          <p:cNvSpPr/>
-          <p:nvPr/>
-        </p:nvSpPr>
-        <p:spPr>
-          <a:xfrm>
-            <a:off x="822960" y="2286000"/>
-            <a:ext cx="10058400" cy="365760"/>
-          </a:xfrm>
-          <a:prstGeom prst="rect">
-            <a:avLst/>
-          </a:prstGeom>
-          <a:noFill/>
-          <a:ln/>
-        </p:spPr>
-        <p:txBody>
-          <a:bodyPr wrap="square" rtlCol="0" anchor="ctr"/>
-          <a:lstStyle/>
-          <a:p>
-            <a:pPr indent="0" marL="0">
-              <a:buNone/>
-            </a:pPr>
-            <a:r>
-              <a:rPr lang="en-US" sz="1400" b="1" spc="300" kern="0" dirty="0">
-                <a:solidFill>
-                  <a:srgbClr val="E0342C"/>
-                </a:solidFill>
-                <a:latin typeface="Arial" pitchFamily="34" charset="0"/>
-                <a:ea typeface="Arial" pitchFamily="34" charset="-122"/>
-                <a:cs typeface="Arial" pitchFamily="34" charset="-120"/>
-              </a:rPr>
-              <a:t>HOW-TO · ROLE 3</a:t>
-            </a:r>
-            <a:endParaRPr lang="en-US" sz="1400" dirty="0"/>
-          </a:p>
-        </p:txBody>
-      </p:sp>
-      <p:sp>
-        <p:nvSpPr>
-          <p:cNvPr id="4" name="Text 2"/>
-          <p:cNvSpPr/>
-          <p:nvPr/>
-        </p:nvSpPr>
-        <p:spPr>
-          <a:xfrm>
-            <a:off x="822960" y="2651760"/>
-            <a:ext cx="10515600" cy="914400"/>
-          </a:xfrm>
-          <a:prstGeom prst="rect">
-            <a:avLst/>
-          </a:prstGeom>
-          <a:noFill/>
-          <a:ln/>
-        </p:spPr>
-        <p:txBody>
-          <a:bodyPr wrap="square" rtlCol="0" anchor="ctr"/>
-          <a:lstStyle/>
-          <a:p>
-            <a:pPr indent="0" marL="0">
-              <a:buNone/>
-            </a:pPr>
-            <a:r>
-              <a:rPr lang="en-US" sz="4000" b="1" dirty="0">
-                <a:solidFill>
-                  <a:srgbClr val="FFFFFF"/>
-                </a:solidFill>
-                <a:latin typeface="Arial" pitchFamily="34" charset="0"/>
-                <a:ea typeface="Arial" pitchFamily="34" charset="-122"/>
-                <a:cs typeface="Arial" pitchFamily="34" charset="-120"/>
-              </a:rPr>
-              <a:t>Hiring Lead / Manager &amp; Interviewer</a:t>
-            </a:r>
-            <a:endParaRPr lang="en-US" sz="4000" dirty="0"/>
-          </a:p>
-        </p:txBody>
-      </p:sp>
-      <p:sp>
-        <p:nvSpPr>
-          <p:cNvPr id="5" name="Text 3"/>
-          <p:cNvSpPr/>
-          <p:nvPr/>
-        </p:nvSpPr>
-        <p:spPr>
-          <a:xfrm>
-            <a:off x="822960" y="3401568"/>
-            <a:ext cx="10058400" cy="731520"/>
-          </a:xfrm>
-          <a:prstGeom prst="rect">
-            <a:avLst/>
-          </a:prstGeom>
-          <a:noFill/>
-          <a:ln/>
-        </p:spPr>
-        <p:txBody>
-          <a:bodyPr wrap="square" rtlCol="0" anchor="ctr"/>
-          <a:lstStyle/>
-          <a:p>
-            <a:pPr indent="0" marL="0">
-              <a:buNone/>
-            </a:pPr>
-            <a:r>
-              <a:rPr lang="en-US" sz="1600" dirty="0">
-                <a:solidFill>
-                  <a:srgbClr val="C9C4BD"/>
-                </a:solidFill>
-                <a:latin typeface="Arial" pitchFamily="34" charset="0"/>
-                <a:ea typeface="Arial" pitchFamily="34" charset="-122"/>
-                <a:cs typeface="Arial" pitchFamily="34" charset="-120"/>
-              </a:rPr>
-              <a:t>Review, assess, interview, decide</a:t>
-            </a:r>
-            <a:endParaRPr lang="en-US" sz="1600" dirty="0"/>
           </a:p>
         </p:txBody>
       </p:sp>
@@ -7332,7 +7063,7 @@
                 <a:ea typeface="Arial" pitchFamily="34" charset="-122"/>
                 <a:cs typeface="Arial" pitchFamily="34" charset="-120"/>
               </a:rPr>
-              <a:t>HIRING MANAGER · STEP 1</a:t>
+              <a:t>HIRING MANAGER · STEP 2</a:t>
             </a:r>
             <a:endParaRPr lang="en-US" sz="1200" dirty="0"/>
           </a:p>
@@ -7371,7 +7102,7 @@
                 <a:ea typeface="Arial" pitchFamily="34" charset="-122"/>
                 <a:cs typeface="Arial" pitchFamily="34" charset="-120"/>
               </a:rPr>
-              <a:t>Assign assessments</a:t>
+              <a:t>Schedule &amp; run interviews</a:t>
             </a:r>
             <a:endParaRPr lang="en-US" sz="2500" dirty="0"/>
           </a:p>
@@ -7477,7 +7208,7 @@
                 <a:ea typeface="Arial" pitchFamily="34" charset="-122"/>
                 <a:cs typeface="Arial" pitchFamily="34" charset="-120"/>
               </a:rPr>
-              <a:t>Assessments
+              <a:t>Interviews → Schedule
 </a:t>
             </a:r>
             <a:pPr indent="0" marL="0">
@@ -7495,7 +7226,7 @@
                 <a:ea typeface="Arial" pitchFamily="34" charset="-122"/>
                 <a:cs typeface="Arial" pitchFamily="34" charset="-120"/>
               </a:rPr>
-              <a:t>Generate a role-specific test with AI, or reuse one from the library.</a:t>
+              <a:t>Pick an applicant (candidate + role), time, and panel.</a:t>
             </a:r>
             <a:endParaRPr lang="en-US" sz="1300" dirty="0"/>
           </a:p>
@@ -7509,7 +7240,7 @@
         </p:nvSpPr>
         <p:spPr>
           <a:xfrm>
-            <a:off x="548640" y="2560320"/>
+            <a:off x="548640" y="2450592"/>
             <a:ext cx="384048" cy="384048"/>
           </a:xfrm>
           <a:prstGeom prst="ellipse">
@@ -7534,7 +7265,7 @@
         </p:nvSpPr>
         <p:spPr>
           <a:xfrm>
-            <a:off x="548640" y="2560320"/>
+            <a:off x="548640" y="2450592"/>
             <a:ext cx="384048" cy="384048"/>
           </a:xfrm>
           <a:prstGeom prst="rect">
@@ -7573,7 +7304,7 @@
         </p:nvSpPr>
         <p:spPr>
           <a:xfrm>
-            <a:off x="1097280" y="2496312"/>
+            <a:off x="1097280" y="2386584"/>
             <a:ext cx="4754880" cy="914400"/>
           </a:xfrm>
           <a:prstGeom prst="rect">
@@ -7601,7 +7332,7 @@
                 <a:ea typeface="Arial" pitchFamily="34" charset="-122"/>
                 <a:cs typeface="Arial" pitchFamily="34" charset="-120"/>
               </a:rPr>
-              <a:t>Auto-graded + proctored
+              <a:t>Run in-app
 </a:t>
             </a:r>
             <a:pPr indent="0" marL="0">
@@ -7619,7 +7350,7 @@
                 <a:ea typeface="Arial" pitchFamily="34" charset="-122"/>
                 <a:cs typeface="Arial" pitchFamily="34" charset="-120"/>
               </a:rPr>
-              <a:t>Objective questions grade instantly; integrity signals are flagged.</a:t>
+              <a:t>A built-in interview room — no external tool.</a:t>
             </a:r>
             <a:endParaRPr lang="en-US" sz="1300" dirty="0"/>
           </a:p>
@@ -7628,6 +7359,130 @@
       <p:sp>
         <p:nvSpPr>
           <p:cNvPr id="11" name="Shape 9"/>
+          <p:cNvSpPr/>
+          <p:nvPr/>
+        </p:nvSpPr>
+        <p:spPr>
+          <a:xfrm>
+            <a:off x="548640" y="3236976"/>
+            <a:ext cx="384048" cy="384048"/>
+          </a:xfrm>
+          <a:prstGeom prst="ellipse">
+            <a:avLst/>
+          </a:prstGeom>
+          <a:solidFill>
+            <a:srgbClr val="FBE3E0"/>
+          </a:solidFill>
+          <a:ln w="12700">
+            <a:solidFill>
+              <a:srgbClr val="E0342C"/>
+            </a:solidFill>
+            <a:prstDash val="solid"/>
+          </a:ln>
+        </p:spPr>
+      </p:sp>
+      <p:sp>
+        <p:nvSpPr>
+          <p:cNvPr id="12" name="Text 10"/>
+          <p:cNvSpPr/>
+          <p:nvPr/>
+        </p:nvSpPr>
+        <p:spPr>
+          <a:xfrm>
+            <a:off x="548640" y="3236976"/>
+            <a:ext cx="384048" cy="384048"/>
+          </a:xfrm>
+          <a:prstGeom prst="rect">
+            <a:avLst/>
+          </a:prstGeom>
+          <a:noFill/>
+          <a:ln/>
+        </p:spPr>
+        <p:txBody>
+          <a:bodyPr wrap="square" rtlCol="0" anchor="ctr"/>
+          <a:lstStyle/>
+          <a:p>
+            <a:pPr algn="ctr" indent="0" marL="0">
+              <a:buNone/>
+            </a:pPr>
+            <a:r>
+              <a:rPr lang="en-US" sz="1300" b="1" dirty="0">
+                <a:solidFill>
+                  <a:srgbClr val="E0342C"/>
+                </a:solidFill>
+                <a:latin typeface="Arial" pitchFamily="34" charset="0"/>
+                <a:ea typeface="Arial" pitchFamily="34" charset="-122"/>
+                <a:cs typeface="Arial" pitchFamily="34" charset="-120"/>
+              </a:rPr>
+              <a:t>3</a:t>
+            </a:r>
+            <a:endParaRPr lang="en-US" sz="1300" dirty="0"/>
+          </a:p>
+        </p:txBody>
+      </p:sp>
+      <p:sp>
+        <p:nvSpPr>
+          <p:cNvPr id="13" name="Text 11"/>
+          <p:cNvSpPr/>
+          <p:nvPr/>
+        </p:nvSpPr>
+        <p:spPr>
+          <a:xfrm>
+            <a:off x="1097280" y="3172968"/>
+            <a:ext cx="4754880" cy="914400"/>
+          </a:xfrm>
+          <a:prstGeom prst="rect">
+            <a:avLst/>
+          </a:prstGeom>
+          <a:noFill/>
+          <a:ln/>
+        </p:spPr>
+        <p:txBody>
+          <a:bodyPr wrap="square" rtlCol="0" anchor="t"/>
+          <a:lstStyle/>
+          <a:p>
+            <a:pPr indent="0" marL="0">
+              <a:lnSpc>
+                <a:spcPct val="95000"/>
+              </a:lnSpc>
+              <a:buNone/>
+            </a:pPr>
+            <a:r>
+              <a:rPr lang="en-US" sz="1300" b="1" dirty="0">
+                <a:solidFill>
+                  <a:srgbClr val="1A1A1A"/>
+                </a:solidFill>
+                <a:latin typeface="Arial" pitchFamily="34" charset="0"/>
+                <a:ea typeface="Arial" pitchFamily="34" charset="-122"/>
+                <a:cs typeface="Arial" pitchFamily="34" charset="-120"/>
+              </a:rPr>
+              <a:t>Blind scorecards
+</a:t>
+            </a:r>
+            <a:pPr indent="0" marL="0">
+              <a:lnSpc>
+                <a:spcPct val="95000"/>
+              </a:lnSpc>
+              <a:buNone/>
+            </a:pPr>
+            <a:r>
+              <a:rPr lang="en-US" sz="1100" dirty="0">
+                <a:solidFill>
+                  <a:srgbClr val="6B6B6B"/>
+                </a:solidFill>
+                <a:latin typeface="Arial" pitchFamily="34" charset="0"/>
+                <a:ea typeface="Arial" pitchFamily="34" charset="-122"/>
+                <a:cs typeface="Arial" pitchFamily="34" charset="-120"/>
+              </a:rPr>
+              <a:t>Panelists score independently; peers' ratings unlock only after you submit.</a:t>
+            </a:r>
+            <a:endParaRPr lang="en-US" sz="1300" dirty="0"/>
+          </a:p>
+        </p:txBody>
+      </p:sp>
+      <p:sp>
+        <p:nvSpPr>
+          <p:cNvPr id="14" name="Shape 12"/>
           <p:cNvSpPr/>
           <p:nvPr/>
         </p:nvSpPr>
@@ -7661,7 +7516,7 @@
       </p:sp>
       <p:sp>
         <p:nvSpPr>
-          <p:cNvPr id="12" name="Shape 10"/>
+          <p:cNvPr id="15" name="Shape 13"/>
           <p:cNvSpPr/>
           <p:nvPr/>
         </p:nvSpPr>
@@ -7681,7 +7536,7 @@
       </p:sp>
       <p:sp>
         <p:nvSpPr>
-          <p:cNvPr id="13" name="Shape 11"/>
+          <p:cNvPr id="16" name="Shape 14"/>
           <p:cNvSpPr/>
           <p:nvPr/>
         </p:nvSpPr>
@@ -7701,7 +7556,7 @@
       </p:sp>
       <p:sp>
         <p:nvSpPr>
-          <p:cNvPr id="14" name="Shape 12"/>
+          <p:cNvPr id="17" name="Shape 15"/>
           <p:cNvSpPr/>
           <p:nvPr/>
         </p:nvSpPr>
@@ -7721,7 +7576,7 @@
       </p:sp>
       <p:sp>
         <p:nvSpPr>
-          <p:cNvPr id="15" name="Shape 13"/>
+          <p:cNvPr id="18" name="Shape 16"/>
           <p:cNvSpPr/>
           <p:nvPr/>
         </p:nvSpPr>
@@ -7741,7 +7596,7 @@
       </p:sp>
       <p:sp>
         <p:nvSpPr>
-          <p:cNvPr id="16" name="Text 14"/>
+          <p:cNvPr id="19" name="Text 17"/>
           <p:cNvSpPr/>
           <p:nvPr/>
         </p:nvSpPr>
@@ -7772,7 +7627,7 @@
                 <a:ea typeface="Arial" pitchFamily="34" charset="-122"/>
                 <a:cs typeface="Arial" pitchFamily="34" charset="-120"/>
               </a:rPr>
-              <a:t>Manager · Assessments</a:t>
+              <a:t>Manager · Interviews</a:t>
             </a:r>
             <a:endParaRPr lang="en-US" sz="1200" dirty="0"/>
           </a:p>
@@ -7780,7 +7635,7 @@
       </p:sp>
       <p:sp>
         <p:nvSpPr>
-          <p:cNvPr id="17" name="Text 15"/>
+          <p:cNvPr id="20" name="Text 18"/>
           <p:cNvSpPr/>
           <p:nvPr/>
         </p:nvSpPr>
@@ -7811,7 +7666,7 @@
                 <a:ea typeface="Arial" pitchFamily="34" charset="-122"/>
                 <a:cs typeface="Arial" pitchFamily="34" charset="-120"/>
               </a:rPr>
-              <a:t>Test for skill, fast</a:t>
+              <a:t>Structured, unbiased interviews</a:t>
             </a:r>
             <a:endParaRPr lang="en-US" sz="1700" dirty="0"/>
           </a:p>
@@ -7819,7 +7674,7 @@
       </p:sp>
       <p:sp>
         <p:nvSpPr>
-          <p:cNvPr id="18" name="Text 16"/>
+          <p:cNvPr id="21" name="Text 19"/>
           <p:cNvSpPr/>
           <p:nvPr/>
         </p:nvSpPr>
@@ -7854,7 +7709,7 @@
                 <a:ea typeface="Arial" pitchFamily="34" charset="-122"/>
                 <a:cs typeface="Arial" pitchFamily="34" charset="-120"/>
               </a:rPr>
-              <a:t>AI-generated or reusable tests</a:t>
+              <a:t>In-app scheduling &amp; room</a:t>
             </a:r>
             <a:endParaRPr lang="en-US" sz="1250" dirty="0"/>
           </a:p>
@@ -7875,7 +7730,7 @@
                 <a:ea typeface="Arial" pitchFamily="34" charset="-122"/>
                 <a:cs typeface="Arial" pitchFamily="34" charset="-120"/>
               </a:rPr>
-              <a:t>Instant auto-grading</a:t>
+              <a:t>Panel management</a:t>
             </a:r>
             <a:endParaRPr lang="en-US" sz="1250" dirty="0"/>
           </a:p>
@@ -7896,7 +7751,7 @@
                 <a:ea typeface="Arial" pitchFamily="34" charset="-122"/>
                 <a:cs typeface="Arial" pitchFamily="34" charset="-120"/>
               </a:rPr>
-              <a:t>Proctoring &amp; integrity flags</a:t>
+              <a:t>Blind scorecards — no anchoring</a:t>
             </a:r>
             <a:endParaRPr lang="en-US" sz="1250" dirty="0"/>
           </a:p>
@@ -7987,7 +7842,7 @@
                 <a:ea typeface="Arial" pitchFamily="34" charset="-122"/>
                 <a:cs typeface="Arial" pitchFamily="34" charset="-120"/>
               </a:rPr>
-              <a:t>HIRING MANAGER · STEP 2</a:t>
+              <a:t>HIRING MANAGER · STEP 3</a:t>
             </a:r>
             <a:endParaRPr lang="en-US" sz="1200" dirty="0"/>
           </a:p>
@@ -8026,7 +7881,7 @@
                 <a:ea typeface="Arial" pitchFamily="34" charset="-122"/>
                 <a:cs typeface="Arial" pitchFamily="34" charset="-120"/>
               </a:rPr>
-              <a:t>Schedule &amp; run interviews</a:t>
+              <a:t>Decide with the full picture</a:t>
             </a:r>
             <a:endParaRPr lang="en-US" sz="2500" dirty="0"/>
           </a:p>
@@ -8132,7 +7987,7 @@
                 <a:ea typeface="Arial" pitchFamily="34" charset="-122"/>
                 <a:cs typeface="Arial" pitchFamily="34" charset="-120"/>
               </a:rPr>
-              <a:t>Interviews → Schedule
+              <a:t>Reports
 </a:t>
             </a:r>
             <a:pPr indent="0" marL="0">
@@ -8150,7 +8005,7 @@
                 <a:ea typeface="Arial" pitchFamily="34" charset="-122"/>
                 <a:cs typeface="Arial" pitchFamily="34" charset="-120"/>
               </a:rPr>
-              <a:t>Pick an applicant (candidate + role), time, and panel.</a:t>
+              <a:t>Funnel, time-to-hire and source metrics across the org.</a:t>
             </a:r>
             <a:endParaRPr lang="en-US" sz="1300" dirty="0"/>
           </a:p>
@@ -8256,7 +8111,7 @@
                 <a:ea typeface="Arial" pitchFamily="34" charset="-122"/>
                 <a:cs typeface="Arial" pitchFamily="34" charset="-120"/>
               </a:rPr>
-              <a:t>Run in-app
+              <a:t>One record
 </a:t>
             </a:r>
             <a:pPr indent="0" marL="0">
@@ -8274,7 +8129,7 @@
                 <a:ea typeface="Arial" pitchFamily="34" charset="-122"/>
                 <a:cs typeface="Arial" pitchFamily="34" charset="-120"/>
               </a:rPr>
-              <a:t>A built-in interview room — no external tool.</a:t>
+              <a:t>Scores, assessments, interviews and notes all live on the candidate.</a:t>
             </a:r>
             <a:endParaRPr lang="en-US" sz="1300" dirty="0"/>
           </a:p>
@@ -8288,7 +8143,7 @@
         </p:nvSpPr>
         <p:spPr>
           <a:xfrm>
-            <a:off x="548640" y="3236976"/>
+            <a:off x="548640" y="3346704"/>
             <a:ext cx="384048" cy="384048"/>
           </a:xfrm>
           <a:prstGeom prst="ellipse">
@@ -8313,7 +8168,7 @@
         </p:nvSpPr>
         <p:spPr>
           <a:xfrm>
-            <a:off x="548640" y="3236976"/>
+            <a:off x="548640" y="3346704"/>
             <a:ext cx="384048" cy="384048"/>
           </a:xfrm>
           <a:prstGeom prst="rect">
@@ -8352,7 +8207,7 @@
         </p:nvSpPr>
         <p:spPr>
           <a:xfrm>
-            <a:off x="1097280" y="3172968"/>
+            <a:off x="1097280" y="3282696"/>
             <a:ext cx="4754880" cy="914400"/>
           </a:xfrm>
           <a:prstGeom prst="rect">
@@ -8380,7 +8235,7 @@
                 <a:ea typeface="Arial" pitchFamily="34" charset="-122"/>
                 <a:cs typeface="Arial" pitchFamily="34" charset="-120"/>
               </a:rPr>
-              <a:t>Blind scorecards
+              <a:t>Collaborate
 </a:t>
             </a:r>
             <a:pPr indent="0" marL="0">
@@ -8398,7 +8253,7 @@
                 <a:ea typeface="Arial" pitchFamily="34" charset="-122"/>
                 <a:cs typeface="Arial" pitchFamily="34" charset="-120"/>
               </a:rPr>
-              <a:t>Panelists score independently; peers' ratings unlock only after you submit.</a:t>
+              <a:t>Notes and @mentions keep the whole panel aligned.</a:t>
             </a:r>
             <a:endParaRPr lang="en-US" sz="1300" dirty="0"/>
           </a:p>
@@ -8551,7 +8406,7 @@
                 <a:ea typeface="Arial" pitchFamily="34" charset="-122"/>
                 <a:cs typeface="Arial" pitchFamily="34" charset="-120"/>
               </a:rPr>
-              <a:t>Manager · Interviews</a:t>
+              <a:t>Manager · Reports</a:t>
             </a:r>
             <a:endParaRPr lang="en-US" sz="1200" dirty="0"/>
           </a:p>
@@ -8590,7 +8445,7 @@
                 <a:ea typeface="Arial" pitchFamily="34" charset="-122"/>
                 <a:cs typeface="Arial" pitchFamily="34" charset="-120"/>
               </a:rPr>
-              <a:t>Structured, unbiased interviews</a:t>
+              <a:t>Data-driven decisions</a:t>
             </a:r>
             <a:endParaRPr lang="en-US" sz="1700" dirty="0"/>
           </a:p>
@@ -8633,7 +8488,7 @@
                 <a:ea typeface="Arial" pitchFamily="34" charset="-122"/>
                 <a:cs typeface="Arial" pitchFamily="34" charset="-120"/>
               </a:rPr>
-              <a:t>In-app scheduling &amp; room</a:t>
+              <a:t>Funnel &amp; time-to-hire</a:t>
             </a:r>
             <a:endParaRPr lang="en-US" sz="1250" dirty="0"/>
           </a:p>
@@ -8654,7 +8509,7 @@
                 <a:ea typeface="Arial" pitchFamily="34" charset="-122"/>
                 <a:cs typeface="Arial" pitchFamily="34" charset="-120"/>
               </a:rPr>
-              <a:t>Panel management</a:t>
+              <a:t>One auditable candidate record</a:t>
             </a:r>
             <a:endParaRPr lang="en-US" sz="1250" dirty="0"/>
           </a:p>
@@ -8675,7 +8530,7 @@
                 <a:ea typeface="Arial" pitchFamily="34" charset="-122"/>
                 <a:cs typeface="Arial" pitchFamily="34" charset="-120"/>
               </a:rPr>
-              <a:t>Blind scorecards — no anchoring</a:t>
+              <a:t>Notes &amp; @mentions</a:t>
             </a:r>
             <a:endParaRPr lang="en-US" sz="1250" dirty="0"/>
           </a:p>
@@ -8695,7 +8550,7 @@
     <p:bg>
       <p:bgPr>
         <a:solidFill>
-          <a:srgbClr val="FBF7F1"/>
+          <a:srgbClr val="1A1A1A"/>
         </a:solidFill>
       </p:bgPr>
     </p:bg>
@@ -8721,8 +8576,8 @@
         </p:nvSpPr>
         <p:spPr>
           <a:xfrm>
-            <a:off x="0" y="0"/>
-            <a:ext cx="164592" cy="6858000"/>
+            <a:off x="0" y="3200400"/>
+            <a:ext cx="12191695" cy="45720"/>
           </a:xfrm>
           <a:prstGeom prst="rect">
             <a:avLst/>
@@ -8741,8 +8596,8 @@
         </p:nvSpPr>
         <p:spPr>
           <a:xfrm>
-            <a:off x="548640" y="457200"/>
-            <a:ext cx="5486400" cy="320040"/>
+            <a:off x="822960" y="2286000"/>
+            <a:ext cx="10058400" cy="365760"/>
           </a:xfrm>
           <a:prstGeom prst="rect">
             <a:avLst/>
@@ -8758,7 +8613,7 @@
               <a:buNone/>
             </a:pPr>
             <a:r>
-              <a:rPr lang="en-US" sz="1200" b="1" spc="200" kern="0" dirty="0">
+              <a:rPr lang="en-US" sz="1400" b="1" spc="300" kern="0" dirty="0">
                 <a:solidFill>
                   <a:srgbClr val="E0342C"/>
                 </a:solidFill>
@@ -8766,9 +8621,9 @@
                 <a:ea typeface="Arial" pitchFamily="34" charset="-122"/>
                 <a:cs typeface="Arial" pitchFamily="34" charset="-120"/>
               </a:rPr>
-              <a:t>HIRING MANAGER · STEP 3</a:t>
-            </a:r>
-            <a:endParaRPr lang="en-US" sz="1200" dirty="0"/>
+              <a:t>HOW-TO · ROLE 4</a:t>
+            </a:r>
+            <a:endParaRPr lang="en-US" sz="1400" dirty="0"/>
           </a:p>
         </p:txBody>
       </p:sp>
@@ -8780,8 +8635,8 @@
         </p:nvSpPr>
         <p:spPr>
           <a:xfrm>
-            <a:off x="548640" y="758952"/>
-            <a:ext cx="5486400" cy="640080"/>
+            <a:off x="822960" y="2651760"/>
+            <a:ext cx="10515600" cy="914400"/>
           </a:xfrm>
           <a:prstGeom prst="rect">
             <a:avLst/>
@@ -8797,55 +8652,30 @@
               <a:buNone/>
             </a:pPr>
             <a:r>
-              <a:rPr lang="en-US" sz="2500" b="1" dirty="0">
-                <a:solidFill>
-                  <a:srgbClr val="1A1A1A"/>
-                </a:solidFill>
-                <a:latin typeface="Arial" pitchFamily="34" charset="0"/>
-                <a:ea typeface="Arial" pitchFamily="34" charset="-122"/>
-                <a:cs typeface="Arial" pitchFamily="34" charset="-120"/>
-              </a:rPr>
-              <a:t>Decide with the full picture</a:t>
-            </a:r>
-            <a:endParaRPr lang="en-US" sz="2500" dirty="0"/>
-          </a:p>
-        </p:txBody>
-      </p:sp>
-      <p:sp>
-        <p:nvSpPr>
-          <p:cNvPr id="5" name="Shape 3"/>
-          <p:cNvSpPr/>
-          <p:nvPr/>
-        </p:nvSpPr>
-        <p:spPr>
-          <a:xfrm>
-            <a:off x="548640" y="1664208"/>
-            <a:ext cx="384048" cy="384048"/>
-          </a:xfrm>
-          <a:prstGeom prst="ellipse">
-            <a:avLst/>
-          </a:prstGeom>
-          <a:solidFill>
-            <a:srgbClr val="FBE3E0"/>
-          </a:solidFill>
-          <a:ln w="12700">
-            <a:solidFill>
-              <a:srgbClr val="E0342C"/>
-            </a:solidFill>
-            <a:prstDash val="solid"/>
-          </a:ln>
-        </p:spPr>
-      </p:sp>
-      <p:sp>
-        <p:nvSpPr>
-          <p:cNvPr id="6" name="Text 4"/>
-          <p:cNvSpPr/>
-          <p:nvPr/>
-        </p:nvSpPr>
-        <p:spPr>
-          <a:xfrm>
-            <a:off x="548640" y="1664208"/>
-            <a:ext cx="384048" cy="384048"/>
+              <a:rPr lang="en-US" sz="4000" b="1" dirty="0">
+                <a:solidFill>
+                  <a:srgbClr val="FFFFFF"/>
+                </a:solidFill>
+                <a:latin typeface="Arial" pitchFamily="34" charset="0"/>
+                <a:ea typeface="Arial" pitchFamily="34" charset="-122"/>
+                <a:cs typeface="Arial" pitchFamily="34" charset="-120"/>
+              </a:rPr>
+              <a:t>Candidate</a:t>
+            </a:r>
+            <a:endParaRPr lang="en-US" sz="4000" dirty="0"/>
+          </a:p>
+        </p:txBody>
+      </p:sp>
+      <p:sp>
+        <p:nvSpPr>
+          <p:cNvPr id="5" name="Text 3"/>
+          <p:cNvSpPr/>
+          <p:nvPr/>
+        </p:nvSpPr>
+        <p:spPr>
+          <a:xfrm>
+            <a:off x="822960" y="3401568"/>
+            <a:ext cx="10058400" cy="731520"/>
           </a:xfrm>
           <a:prstGeom prst="rect">
             <a:avLst/>
@@ -8857,606 +8687,21 @@
           <a:bodyPr wrap="square" rtlCol="0" anchor="ctr"/>
           <a:lstStyle/>
           <a:p>
-            <a:pPr algn="ctr" indent="0" marL="0">
-              <a:buNone/>
-            </a:pPr>
-            <a:r>
-              <a:rPr lang="en-US" sz="1300" b="1" dirty="0">
-                <a:solidFill>
-                  <a:srgbClr val="E0342C"/>
-                </a:solidFill>
-                <a:latin typeface="Arial" pitchFamily="34" charset="0"/>
-                <a:ea typeface="Arial" pitchFamily="34" charset="-122"/>
-                <a:cs typeface="Arial" pitchFamily="34" charset="-120"/>
-              </a:rPr>
-              <a:t>1</a:t>
-            </a:r>
-            <a:endParaRPr lang="en-US" sz="1300" dirty="0"/>
-          </a:p>
-        </p:txBody>
-      </p:sp>
-      <p:sp>
-        <p:nvSpPr>
-          <p:cNvPr id="7" name="Text 5"/>
-          <p:cNvSpPr/>
-          <p:nvPr/>
-        </p:nvSpPr>
-        <p:spPr>
-          <a:xfrm>
-            <a:off x="1097280" y="1600200"/>
-            <a:ext cx="4754880" cy="914400"/>
-          </a:xfrm>
-          <a:prstGeom prst="rect">
-            <a:avLst/>
-          </a:prstGeom>
-          <a:noFill/>
-          <a:ln/>
-        </p:spPr>
-        <p:txBody>
-          <a:bodyPr wrap="square" rtlCol="0" anchor="t"/>
-          <a:lstStyle/>
-          <a:p>
-            <a:pPr indent="0" marL="0">
-              <a:lnSpc>
-                <a:spcPct val="95000"/>
-              </a:lnSpc>
-              <a:buNone/>
-            </a:pPr>
-            <a:r>
-              <a:rPr lang="en-US" sz="1300" b="1" dirty="0">
-                <a:solidFill>
-                  <a:srgbClr val="1A1A1A"/>
-                </a:solidFill>
-                <a:latin typeface="Arial" pitchFamily="34" charset="0"/>
-                <a:ea typeface="Arial" pitchFamily="34" charset="-122"/>
-                <a:cs typeface="Arial" pitchFamily="34" charset="-120"/>
-              </a:rPr>
-              <a:t>Reports
-</a:t>
-            </a:r>
-            <a:pPr indent="0" marL="0">
-              <a:lnSpc>
-                <a:spcPct val="95000"/>
-              </a:lnSpc>
-              <a:buNone/>
-            </a:pPr>
-            <a:r>
-              <a:rPr lang="en-US" sz="1100" dirty="0">
-                <a:solidFill>
-                  <a:srgbClr val="6B6B6B"/>
-                </a:solidFill>
-                <a:latin typeface="Arial" pitchFamily="34" charset="0"/>
-                <a:ea typeface="Arial" pitchFamily="34" charset="-122"/>
-                <a:cs typeface="Arial" pitchFamily="34" charset="-120"/>
-              </a:rPr>
-              <a:t>Funnel, time-to-hire and source metrics across the org.</a:t>
-            </a:r>
-            <a:endParaRPr lang="en-US" sz="1300" dirty="0"/>
-          </a:p>
-        </p:txBody>
-      </p:sp>
-      <p:sp>
-        <p:nvSpPr>
-          <p:cNvPr id="8" name="Shape 6"/>
-          <p:cNvSpPr/>
-          <p:nvPr/>
-        </p:nvSpPr>
-        <p:spPr>
-          <a:xfrm>
-            <a:off x="548640" y="2450592"/>
-            <a:ext cx="384048" cy="384048"/>
-          </a:xfrm>
-          <a:prstGeom prst="ellipse">
-            <a:avLst/>
-          </a:prstGeom>
-          <a:solidFill>
-            <a:srgbClr val="FBE3E0"/>
-          </a:solidFill>
-          <a:ln w="12700">
-            <a:solidFill>
-              <a:srgbClr val="E0342C"/>
-            </a:solidFill>
-            <a:prstDash val="solid"/>
-          </a:ln>
-        </p:spPr>
-      </p:sp>
-      <p:sp>
-        <p:nvSpPr>
-          <p:cNvPr id="9" name="Text 7"/>
-          <p:cNvSpPr/>
-          <p:nvPr/>
-        </p:nvSpPr>
-        <p:spPr>
-          <a:xfrm>
-            <a:off x="548640" y="2450592"/>
-            <a:ext cx="384048" cy="384048"/>
-          </a:xfrm>
-          <a:prstGeom prst="rect">
-            <a:avLst/>
-          </a:prstGeom>
-          <a:noFill/>
-          <a:ln/>
-        </p:spPr>
-        <p:txBody>
-          <a:bodyPr wrap="square" rtlCol="0" anchor="ctr"/>
-          <a:lstStyle/>
-          <a:p>
-            <a:pPr algn="ctr" indent="0" marL="0">
-              <a:buNone/>
-            </a:pPr>
-            <a:r>
-              <a:rPr lang="en-US" sz="1300" b="1" dirty="0">
-                <a:solidFill>
-                  <a:srgbClr val="E0342C"/>
-                </a:solidFill>
-                <a:latin typeface="Arial" pitchFamily="34" charset="0"/>
-                <a:ea typeface="Arial" pitchFamily="34" charset="-122"/>
-                <a:cs typeface="Arial" pitchFamily="34" charset="-120"/>
-              </a:rPr>
-              <a:t>2</a:t>
-            </a:r>
-            <a:endParaRPr lang="en-US" sz="1300" dirty="0"/>
-          </a:p>
-        </p:txBody>
-      </p:sp>
-      <p:sp>
-        <p:nvSpPr>
-          <p:cNvPr id="10" name="Text 8"/>
-          <p:cNvSpPr/>
-          <p:nvPr/>
-        </p:nvSpPr>
-        <p:spPr>
-          <a:xfrm>
-            <a:off x="1097280" y="2386584"/>
-            <a:ext cx="4754880" cy="914400"/>
-          </a:xfrm>
-          <a:prstGeom prst="rect">
-            <a:avLst/>
-          </a:prstGeom>
-          <a:noFill/>
-          <a:ln/>
-        </p:spPr>
-        <p:txBody>
-          <a:bodyPr wrap="square" rtlCol="0" anchor="t"/>
-          <a:lstStyle/>
-          <a:p>
-            <a:pPr indent="0" marL="0">
-              <a:lnSpc>
-                <a:spcPct val="95000"/>
-              </a:lnSpc>
-              <a:buNone/>
-            </a:pPr>
-            <a:r>
-              <a:rPr lang="en-US" sz="1300" b="1" dirty="0">
-                <a:solidFill>
-                  <a:srgbClr val="1A1A1A"/>
-                </a:solidFill>
-                <a:latin typeface="Arial" pitchFamily="34" charset="0"/>
-                <a:ea typeface="Arial" pitchFamily="34" charset="-122"/>
-                <a:cs typeface="Arial" pitchFamily="34" charset="-120"/>
-              </a:rPr>
-              <a:t>One record
-</a:t>
-            </a:r>
-            <a:pPr indent="0" marL="0">
-              <a:lnSpc>
-                <a:spcPct val="95000"/>
-              </a:lnSpc>
-              <a:buNone/>
-            </a:pPr>
-            <a:r>
-              <a:rPr lang="en-US" sz="1100" dirty="0">
-                <a:solidFill>
-                  <a:srgbClr val="6B6B6B"/>
-                </a:solidFill>
-                <a:latin typeface="Arial" pitchFamily="34" charset="0"/>
-                <a:ea typeface="Arial" pitchFamily="34" charset="-122"/>
-                <a:cs typeface="Arial" pitchFamily="34" charset="-120"/>
-              </a:rPr>
-              <a:t>Scores, assessments, interviews and notes all live on the candidate.</a:t>
-            </a:r>
-            <a:endParaRPr lang="en-US" sz="1300" dirty="0"/>
-          </a:p>
-        </p:txBody>
-      </p:sp>
-      <p:sp>
-        <p:nvSpPr>
-          <p:cNvPr id="11" name="Shape 9"/>
-          <p:cNvSpPr/>
-          <p:nvPr/>
-        </p:nvSpPr>
-        <p:spPr>
-          <a:xfrm>
-            <a:off x="548640" y="3346704"/>
-            <a:ext cx="384048" cy="384048"/>
-          </a:xfrm>
-          <a:prstGeom prst="ellipse">
-            <a:avLst/>
-          </a:prstGeom>
-          <a:solidFill>
-            <a:srgbClr val="FBE3E0"/>
-          </a:solidFill>
-          <a:ln w="12700">
-            <a:solidFill>
-              <a:srgbClr val="E0342C"/>
-            </a:solidFill>
-            <a:prstDash val="solid"/>
-          </a:ln>
-        </p:spPr>
-      </p:sp>
-      <p:sp>
-        <p:nvSpPr>
-          <p:cNvPr id="12" name="Text 10"/>
-          <p:cNvSpPr/>
-          <p:nvPr/>
-        </p:nvSpPr>
-        <p:spPr>
-          <a:xfrm>
-            <a:off x="548640" y="3346704"/>
-            <a:ext cx="384048" cy="384048"/>
-          </a:xfrm>
-          <a:prstGeom prst="rect">
-            <a:avLst/>
-          </a:prstGeom>
-          <a:noFill/>
-          <a:ln/>
-        </p:spPr>
-        <p:txBody>
-          <a:bodyPr wrap="square" rtlCol="0" anchor="ctr"/>
-          <a:lstStyle/>
-          <a:p>
-            <a:pPr algn="ctr" indent="0" marL="0">
-              <a:buNone/>
-            </a:pPr>
-            <a:r>
-              <a:rPr lang="en-US" sz="1300" b="1" dirty="0">
-                <a:solidFill>
-                  <a:srgbClr val="E0342C"/>
-                </a:solidFill>
-                <a:latin typeface="Arial" pitchFamily="34" charset="0"/>
-                <a:ea typeface="Arial" pitchFamily="34" charset="-122"/>
-                <a:cs typeface="Arial" pitchFamily="34" charset="-120"/>
-              </a:rPr>
-              <a:t>3</a:t>
-            </a:r>
-            <a:endParaRPr lang="en-US" sz="1300" dirty="0"/>
-          </a:p>
-        </p:txBody>
-      </p:sp>
-      <p:sp>
-        <p:nvSpPr>
-          <p:cNvPr id="13" name="Text 11"/>
-          <p:cNvSpPr/>
-          <p:nvPr/>
-        </p:nvSpPr>
-        <p:spPr>
-          <a:xfrm>
-            <a:off x="1097280" y="3282696"/>
-            <a:ext cx="4754880" cy="914400"/>
-          </a:xfrm>
-          <a:prstGeom prst="rect">
-            <a:avLst/>
-          </a:prstGeom>
-          <a:noFill/>
-          <a:ln/>
-        </p:spPr>
-        <p:txBody>
-          <a:bodyPr wrap="square" rtlCol="0" anchor="t"/>
-          <a:lstStyle/>
-          <a:p>
-            <a:pPr indent="0" marL="0">
-              <a:lnSpc>
-                <a:spcPct val="95000"/>
-              </a:lnSpc>
-              <a:buNone/>
-            </a:pPr>
-            <a:r>
-              <a:rPr lang="en-US" sz="1300" b="1" dirty="0">
-                <a:solidFill>
-                  <a:srgbClr val="1A1A1A"/>
-                </a:solidFill>
-                <a:latin typeface="Arial" pitchFamily="34" charset="0"/>
-                <a:ea typeface="Arial" pitchFamily="34" charset="-122"/>
-                <a:cs typeface="Arial" pitchFamily="34" charset="-120"/>
-              </a:rPr>
-              <a:t>Collaborate
-</a:t>
-            </a:r>
-            <a:pPr indent="0" marL="0">
-              <a:lnSpc>
-                <a:spcPct val="95000"/>
-              </a:lnSpc>
-              <a:buNone/>
-            </a:pPr>
-            <a:r>
-              <a:rPr lang="en-US" sz="1100" dirty="0">
-                <a:solidFill>
-                  <a:srgbClr val="6B6B6B"/>
-                </a:solidFill>
-                <a:latin typeface="Arial" pitchFamily="34" charset="0"/>
-                <a:ea typeface="Arial" pitchFamily="34" charset="-122"/>
-                <a:cs typeface="Arial" pitchFamily="34" charset="-120"/>
-              </a:rPr>
-              <a:t>Notes and @mentions keep the whole panel aligned.</a:t>
-            </a:r>
-            <a:endParaRPr lang="en-US" sz="1300" dirty="0"/>
-          </a:p>
-        </p:txBody>
-      </p:sp>
-      <p:sp>
-        <p:nvSpPr>
-          <p:cNvPr id="14" name="Shape 12"/>
-          <p:cNvSpPr/>
-          <p:nvPr/>
-        </p:nvSpPr>
-        <p:spPr>
-          <a:xfrm>
-            <a:off x="6016752" y="1216152"/>
-            <a:ext cx="5797296" cy="4791456"/>
-          </a:xfrm>
-          <a:prstGeom prst="roundRect">
-            <a:avLst>
-              <a:gd name="adj" fmla="val 1527"/>
-            </a:avLst>
-          </a:prstGeom>
-          <a:solidFill>
-            <a:srgbClr val="FFFFFF"/>
-          </a:solidFill>
-          <a:ln w="12700">
-            <a:solidFill>
-              <a:srgbClr val="E6DED3"/>
-            </a:solidFill>
-            <a:prstDash val="solid"/>
-          </a:ln>
-          <a:effectLst>
-            <a:outerShdw sx="100000" sy="100000" kx="0" ky="0" algn="bl" rotWithShape="0" blurRad="152400" dist="38100" dir="5400000">
-              <a:srgbClr val="999999">
-                <a:alpha val="30000"/>
-              </a:srgbClr>
-            </a:outerShdw>
-          </a:effectLst>
-        </p:spPr>
-      </p:sp>
-      <p:sp>
-        <p:nvSpPr>
-          <p:cNvPr id="15" name="Shape 13"/>
-          <p:cNvSpPr/>
-          <p:nvPr/>
-        </p:nvSpPr>
-        <p:spPr>
-          <a:xfrm>
-            <a:off x="6126480" y="1325880"/>
-            <a:ext cx="5577840" cy="502920"/>
-          </a:xfrm>
-          <a:prstGeom prst="rect">
-            <a:avLst/>
-          </a:prstGeom>
-          <a:solidFill>
-            <a:srgbClr val="1A1A1A"/>
-          </a:solidFill>
-          <a:ln/>
-        </p:spPr>
-      </p:sp>
-      <p:sp>
-        <p:nvSpPr>
-          <p:cNvPr id="16" name="Shape 14"/>
-          <p:cNvSpPr/>
-          <p:nvPr/>
-        </p:nvSpPr>
-        <p:spPr>
-          <a:xfrm>
-            <a:off x="6291072" y="1508760"/>
-            <a:ext cx="146304" cy="146304"/>
-          </a:xfrm>
-          <a:prstGeom prst="ellipse">
-            <a:avLst/>
-          </a:prstGeom>
-          <a:solidFill>
-            <a:srgbClr val="FF5F57"/>
-          </a:solidFill>
-          <a:ln/>
-        </p:spPr>
-      </p:sp>
-      <p:sp>
-        <p:nvSpPr>
-          <p:cNvPr id="17" name="Shape 15"/>
-          <p:cNvSpPr/>
-          <p:nvPr/>
-        </p:nvSpPr>
-        <p:spPr>
-          <a:xfrm>
-            <a:off x="6510528" y="1508760"/>
-            <a:ext cx="146304" cy="146304"/>
-          </a:xfrm>
-          <a:prstGeom prst="ellipse">
-            <a:avLst/>
-          </a:prstGeom>
-          <a:solidFill>
-            <a:srgbClr val="FEBC2E"/>
-          </a:solidFill>
-          <a:ln/>
-        </p:spPr>
-      </p:sp>
-      <p:sp>
-        <p:nvSpPr>
-          <p:cNvPr id="18" name="Shape 16"/>
-          <p:cNvSpPr/>
-          <p:nvPr/>
-        </p:nvSpPr>
-        <p:spPr>
-          <a:xfrm>
-            <a:off x="6729984" y="1508760"/>
-            <a:ext cx="146304" cy="146304"/>
-          </a:xfrm>
-          <a:prstGeom prst="ellipse">
-            <a:avLst/>
-          </a:prstGeom>
-          <a:solidFill>
-            <a:srgbClr val="28C840"/>
-          </a:solidFill>
-          <a:ln/>
-        </p:spPr>
-      </p:sp>
-      <p:sp>
-        <p:nvSpPr>
-          <p:cNvPr id="19" name="Text 17"/>
-          <p:cNvSpPr/>
-          <p:nvPr/>
-        </p:nvSpPr>
-        <p:spPr>
-          <a:xfrm>
-            <a:off x="7132320" y="1325880"/>
-            <a:ext cx="4480560" cy="502920"/>
-          </a:xfrm>
-          <a:prstGeom prst="rect">
-            <a:avLst/>
-          </a:prstGeom>
-          <a:noFill/>
-          <a:ln/>
-        </p:spPr>
-        <p:txBody>
-          <a:bodyPr wrap="square" rtlCol="0" anchor="ctr"/>
-          <a:lstStyle/>
-          <a:p>
-            <a:pPr indent="0" marL="0">
-              <a:buNone/>
-            </a:pPr>
-            <a:r>
-              <a:rPr lang="en-US" sz="1200" b="1" dirty="0">
-                <a:solidFill>
-                  <a:srgbClr val="FFFFFF"/>
-                </a:solidFill>
-                <a:latin typeface="Arial" pitchFamily="34" charset="0"/>
-                <a:ea typeface="Arial" pitchFamily="34" charset="-122"/>
-                <a:cs typeface="Arial" pitchFamily="34" charset="-120"/>
-              </a:rPr>
-              <a:t>Manager · Reports</a:t>
-            </a:r>
-            <a:endParaRPr lang="en-US" sz="1200" dirty="0"/>
-          </a:p>
-        </p:txBody>
-      </p:sp>
-      <p:sp>
-        <p:nvSpPr>
-          <p:cNvPr id="20" name="Text 18"/>
-          <p:cNvSpPr/>
-          <p:nvPr/>
-        </p:nvSpPr>
-        <p:spPr>
-          <a:xfrm>
-            <a:off x="6446520" y="2103120"/>
-            <a:ext cx="4937760" cy="457200"/>
-          </a:xfrm>
-          <a:prstGeom prst="rect">
-            <a:avLst/>
-          </a:prstGeom>
-          <a:noFill/>
-          <a:ln/>
-        </p:spPr>
-        <p:txBody>
-          <a:bodyPr wrap="square" rtlCol="0" anchor="ctr"/>
-          <a:lstStyle/>
-          <a:p>
-            <a:pPr indent="0" marL="0">
-              <a:buNone/>
-            </a:pPr>
-            <a:r>
-              <a:rPr lang="en-US" sz="1700" b="1" dirty="0">
-                <a:solidFill>
-                  <a:srgbClr val="1A1A1A"/>
-                </a:solidFill>
-                <a:latin typeface="Arial" pitchFamily="34" charset="0"/>
-                <a:ea typeface="Arial" pitchFamily="34" charset="-122"/>
-                <a:cs typeface="Arial" pitchFamily="34" charset="-120"/>
-              </a:rPr>
-              <a:t>Data-driven decisions</a:t>
-            </a:r>
-            <a:endParaRPr lang="en-US" sz="1700" dirty="0"/>
-          </a:p>
-        </p:txBody>
-      </p:sp>
-      <p:sp>
-        <p:nvSpPr>
-          <p:cNvPr id="21" name="Text 19"/>
-          <p:cNvSpPr/>
-          <p:nvPr/>
-        </p:nvSpPr>
-        <p:spPr>
-          <a:xfrm>
-            <a:off x="6492240" y="2697480"/>
-            <a:ext cx="4846320" cy="3017520"/>
-          </a:xfrm>
-          <a:prstGeom prst="rect">
-            <a:avLst/>
-          </a:prstGeom>
-          <a:noFill/>
-          <a:ln/>
-        </p:spPr>
-        <p:txBody>
-          <a:bodyPr wrap="square" rtlCol="0" anchor="t"/>
-          <a:lstStyle/>
-          <a:p>
-            <a:pPr marL="203200" indent="-203200">
-              <a:spcAft>
-                <a:spcPts val="900"/>
-              </a:spcAft>
-              <a:buSzPct val="100000"/>
-              <a:buChar char="✓"/>
-            </a:pPr>
-            <a:r>
-              <a:rPr lang="en-US" sz="1250" dirty="0">
-                <a:solidFill>
-                  <a:srgbClr val="6B6B6B"/>
-                </a:solidFill>
-                <a:latin typeface="Arial" pitchFamily="34" charset="0"/>
-                <a:ea typeface="Arial" pitchFamily="34" charset="-122"/>
-                <a:cs typeface="Arial" pitchFamily="34" charset="-120"/>
-              </a:rPr>
-              <a:t>Funnel &amp; time-to-hire</a:t>
-            </a:r>
-            <a:endParaRPr lang="en-US" sz="1250" dirty="0"/>
-          </a:p>
-          <a:p>
-            <a:pPr marL="203200" indent="-203200">
-              <a:spcAft>
-                <a:spcPts val="900"/>
-              </a:spcAft>
-              <a:buSzPct val="100000"/>
-              <a:buChar char="✓"/>
-            </a:pPr>
-            <a:r>
-              <a:rPr lang="en-US" sz="1250" dirty="0">
-                <a:solidFill>
-                  <a:srgbClr val="6B6B6B"/>
-                </a:solidFill>
-                <a:latin typeface="Arial" pitchFamily="34" charset="0"/>
-                <a:ea typeface="Arial" pitchFamily="34" charset="-122"/>
-                <a:cs typeface="Arial" pitchFamily="34" charset="-120"/>
-              </a:rPr>
-              <a:t>One auditable candidate record</a:t>
-            </a:r>
-            <a:endParaRPr lang="en-US" sz="1250" dirty="0"/>
-          </a:p>
-          <a:p>
-            <a:pPr marL="203200" indent="-203200">
-              <a:spcAft>
-                <a:spcPts val="900"/>
-              </a:spcAft>
-              <a:buSzPct val="100000"/>
-              <a:buChar char="✓"/>
-            </a:pPr>
-            <a:r>
-              <a:rPr lang="en-US" sz="1250" dirty="0">
-                <a:solidFill>
-                  <a:srgbClr val="6B6B6B"/>
-                </a:solidFill>
-                <a:latin typeface="Arial" pitchFamily="34" charset="0"/>
-                <a:ea typeface="Arial" pitchFamily="34" charset="-122"/>
-                <a:cs typeface="Arial" pitchFamily="34" charset="-120"/>
-              </a:rPr>
-              <a:t>Notes &amp; @mentions</a:t>
-            </a:r>
-            <a:endParaRPr lang="en-US" sz="1250" dirty="0"/>
+            <a:pPr indent="0" marL="0">
+              <a:buNone/>
+            </a:pPr>
+            <a:r>
+              <a:rPr lang="en-US" sz="1600" dirty="0">
+                <a:solidFill>
+                  <a:srgbClr val="C9C4BD"/>
+                </a:solidFill>
+                <a:latin typeface="Arial" pitchFamily="34" charset="0"/>
+                <a:ea typeface="Arial" pitchFamily="34" charset="-122"/>
+                <a:cs typeface="Arial" pitchFamily="34" charset="-120"/>
+              </a:rPr>
+              <a:t>The external experience</a:t>
+            </a:r>
+            <a:endParaRPr lang="en-US" sz="1600" dirty="0"/>
           </a:p>
         </p:txBody>
       </p:sp>
@@ -9731,7 +8976,7 @@
     <p:bg>
       <p:bgPr>
         <a:solidFill>
-          <a:srgbClr val="1A1A1A"/>
+          <a:srgbClr val="FBF7F1"/>
         </a:solidFill>
       </p:bgPr>
     </p:bg>
@@ -9757,8 +9002,8 @@
         </p:nvSpPr>
         <p:spPr>
           <a:xfrm>
-            <a:off x="0" y="3200400"/>
-            <a:ext cx="12191695" cy="45720"/>
+            <a:off x="0" y="0"/>
+            <a:ext cx="164592" cy="6858000"/>
           </a:xfrm>
           <a:prstGeom prst="rect">
             <a:avLst/>
@@ -9777,8 +9022,8 @@
         </p:nvSpPr>
         <p:spPr>
           <a:xfrm>
-            <a:off x="822960" y="2286000"/>
-            <a:ext cx="10058400" cy="365760"/>
+            <a:off x="548640" y="457200"/>
+            <a:ext cx="5486400" cy="320040"/>
           </a:xfrm>
           <a:prstGeom prst="rect">
             <a:avLst/>
@@ -9794,7 +9039,7 @@
               <a:buNone/>
             </a:pPr>
             <a:r>
-              <a:rPr lang="en-US" sz="1400" b="1" spc="300" kern="0" dirty="0">
+              <a:rPr lang="en-US" sz="1200" b="1" spc="200" kern="0" dirty="0">
                 <a:solidFill>
                   <a:srgbClr val="E0342C"/>
                 </a:solidFill>
@@ -9802,9 +9047,9 @@
                 <a:ea typeface="Arial" pitchFamily="34" charset="-122"/>
                 <a:cs typeface="Arial" pitchFamily="34" charset="-120"/>
               </a:rPr>
-              <a:t>HOW-TO · ROLE 4</a:t>
-            </a:r>
-            <a:endParaRPr lang="en-US" sz="1400" dirty="0"/>
+              <a:t>CANDIDATE · STEP 1</a:t>
+            </a:r>
+            <a:endParaRPr lang="en-US" sz="1200" dirty="0"/>
           </a:p>
         </p:txBody>
       </p:sp>
@@ -9816,8 +9061,8 @@
         </p:nvSpPr>
         <p:spPr>
           <a:xfrm>
-            <a:off x="822960" y="2651760"/>
-            <a:ext cx="10515600" cy="914400"/>
+            <a:off x="548640" y="758952"/>
+            <a:ext cx="5486400" cy="640080"/>
           </a:xfrm>
           <a:prstGeom prst="rect">
             <a:avLst/>
@@ -9833,7 +9078,408 @@
               <a:buNone/>
             </a:pPr>
             <a:r>
-              <a:rPr lang="en-US" sz="4000" b="1" dirty="0">
+              <a:rPr lang="en-US" sz="2500" b="1" dirty="0">
+                <a:solidFill>
+                  <a:srgbClr val="1A1A1A"/>
+                </a:solidFill>
+                <a:latin typeface="Arial" pitchFamily="34" charset="0"/>
+                <a:ea typeface="Arial" pitchFamily="34" charset="-122"/>
+                <a:cs typeface="Arial" pitchFamily="34" charset="-120"/>
+              </a:rPr>
+              <a:t>Apply in minutes</a:t>
+            </a:r>
+            <a:endParaRPr lang="en-US" sz="2500" dirty="0"/>
+          </a:p>
+        </p:txBody>
+      </p:sp>
+      <p:sp>
+        <p:nvSpPr>
+          <p:cNvPr id="5" name="Shape 3"/>
+          <p:cNvSpPr/>
+          <p:nvPr/>
+        </p:nvSpPr>
+        <p:spPr>
+          <a:xfrm>
+            <a:off x="548640" y="1664208"/>
+            <a:ext cx="384048" cy="384048"/>
+          </a:xfrm>
+          <a:prstGeom prst="ellipse">
+            <a:avLst/>
+          </a:prstGeom>
+          <a:solidFill>
+            <a:srgbClr val="FBE3E0"/>
+          </a:solidFill>
+          <a:ln w="12700">
+            <a:solidFill>
+              <a:srgbClr val="E0342C"/>
+            </a:solidFill>
+            <a:prstDash val="solid"/>
+          </a:ln>
+        </p:spPr>
+      </p:sp>
+      <p:sp>
+        <p:nvSpPr>
+          <p:cNvPr id="6" name="Text 4"/>
+          <p:cNvSpPr/>
+          <p:nvPr/>
+        </p:nvSpPr>
+        <p:spPr>
+          <a:xfrm>
+            <a:off x="548640" y="1664208"/>
+            <a:ext cx="384048" cy="384048"/>
+          </a:xfrm>
+          <a:prstGeom prst="rect">
+            <a:avLst/>
+          </a:prstGeom>
+          <a:noFill/>
+          <a:ln/>
+        </p:spPr>
+        <p:txBody>
+          <a:bodyPr wrap="square" rtlCol="0" anchor="ctr"/>
+          <a:lstStyle/>
+          <a:p>
+            <a:pPr algn="ctr" indent="0" marL="0">
+              <a:buNone/>
+            </a:pPr>
+            <a:r>
+              <a:rPr lang="en-US" sz="1300" b="1" dirty="0">
+                <a:solidFill>
+                  <a:srgbClr val="E0342C"/>
+                </a:solidFill>
+                <a:latin typeface="Arial" pitchFamily="34" charset="0"/>
+                <a:ea typeface="Arial" pitchFamily="34" charset="-122"/>
+                <a:cs typeface="Arial" pitchFamily="34" charset="-120"/>
+              </a:rPr>
+              <a:t>1</a:t>
+            </a:r>
+            <a:endParaRPr lang="en-US" sz="1300" dirty="0"/>
+          </a:p>
+        </p:txBody>
+      </p:sp>
+      <p:sp>
+        <p:nvSpPr>
+          <p:cNvPr id="7" name="Text 5"/>
+          <p:cNvSpPr/>
+          <p:nvPr/>
+        </p:nvSpPr>
+        <p:spPr>
+          <a:xfrm>
+            <a:off x="1097280" y="1600200"/>
+            <a:ext cx="4754880" cy="914400"/>
+          </a:xfrm>
+          <a:prstGeom prst="rect">
+            <a:avLst/>
+          </a:prstGeom>
+          <a:noFill/>
+          <a:ln/>
+        </p:spPr>
+        <p:txBody>
+          <a:bodyPr wrap="square" rtlCol="0" anchor="t"/>
+          <a:lstStyle/>
+          <a:p>
+            <a:pPr indent="0" marL="0">
+              <a:lnSpc>
+                <a:spcPct val="95000"/>
+              </a:lnSpc>
+              <a:buNone/>
+            </a:pPr>
+            <a:r>
+              <a:rPr lang="en-US" sz="1300" b="1" dirty="0">
+                <a:solidFill>
+                  <a:srgbClr val="1A1A1A"/>
+                </a:solidFill>
+                <a:latin typeface="Arial" pitchFamily="34" charset="0"/>
+                <a:ea typeface="Arial" pitchFamily="34" charset="-122"/>
+                <a:cs typeface="Arial" pitchFamily="34" charset="-120"/>
+              </a:rPr>
+              <a:t>Public apply link
+</a:t>
+            </a:r>
+            <a:pPr indent="0" marL="0">
+              <a:lnSpc>
+                <a:spcPct val="95000"/>
+              </a:lnSpc>
+              <a:buNone/>
+            </a:pPr>
+            <a:r>
+              <a:rPr lang="en-US" sz="1100" dirty="0">
+                <a:solidFill>
+                  <a:srgbClr val="6B6B6B"/>
+                </a:solidFill>
+                <a:latin typeface="Arial" pitchFamily="34" charset="0"/>
+                <a:ea typeface="Arial" pitchFamily="34" charset="-122"/>
+                <a:cs typeface="Arial" pitchFamily="34" charset="-120"/>
+              </a:rPr>
+              <a:t>No account needed — add profile details and upload a CV.</a:t>
+            </a:r>
+            <a:endParaRPr lang="en-US" sz="1300" dirty="0"/>
+          </a:p>
+        </p:txBody>
+      </p:sp>
+      <p:sp>
+        <p:nvSpPr>
+          <p:cNvPr id="8" name="Shape 6"/>
+          <p:cNvSpPr/>
+          <p:nvPr/>
+        </p:nvSpPr>
+        <p:spPr>
+          <a:xfrm>
+            <a:off x="548640" y="2450592"/>
+            <a:ext cx="384048" cy="384048"/>
+          </a:xfrm>
+          <a:prstGeom prst="ellipse">
+            <a:avLst/>
+          </a:prstGeom>
+          <a:solidFill>
+            <a:srgbClr val="FBE3E0"/>
+          </a:solidFill>
+          <a:ln w="12700">
+            <a:solidFill>
+              <a:srgbClr val="E0342C"/>
+            </a:solidFill>
+            <a:prstDash val="solid"/>
+          </a:ln>
+        </p:spPr>
+      </p:sp>
+      <p:sp>
+        <p:nvSpPr>
+          <p:cNvPr id="9" name="Text 7"/>
+          <p:cNvSpPr/>
+          <p:nvPr/>
+        </p:nvSpPr>
+        <p:spPr>
+          <a:xfrm>
+            <a:off x="548640" y="2450592"/>
+            <a:ext cx="384048" cy="384048"/>
+          </a:xfrm>
+          <a:prstGeom prst="rect">
+            <a:avLst/>
+          </a:prstGeom>
+          <a:noFill/>
+          <a:ln/>
+        </p:spPr>
+        <p:txBody>
+          <a:bodyPr wrap="square" rtlCol="0" anchor="ctr"/>
+          <a:lstStyle/>
+          <a:p>
+            <a:pPr algn="ctr" indent="0" marL="0">
+              <a:buNone/>
+            </a:pPr>
+            <a:r>
+              <a:rPr lang="en-US" sz="1300" b="1" dirty="0">
+                <a:solidFill>
+                  <a:srgbClr val="E0342C"/>
+                </a:solidFill>
+                <a:latin typeface="Arial" pitchFamily="34" charset="0"/>
+                <a:ea typeface="Arial" pitchFamily="34" charset="-122"/>
+                <a:cs typeface="Arial" pitchFamily="34" charset="-120"/>
+              </a:rPr>
+              <a:t>2</a:t>
+            </a:r>
+            <a:endParaRPr lang="en-US" sz="1300" dirty="0"/>
+          </a:p>
+        </p:txBody>
+      </p:sp>
+      <p:sp>
+        <p:nvSpPr>
+          <p:cNvPr id="10" name="Text 8"/>
+          <p:cNvSpPr/>
+          <p:nvPr/>
+        </p:nvSpPr>
+        <p:spPr>
+          <a:xfrm>
+            <a:off x="1097280" y="2386584"/>
+            <a:ext cx="4754880" cy="914400"/>
+          </a:xfrm>
+          <a:prstGeom prst="rect">
+            <a:avLst/>
+          </a:prstGeom>
+          <a:noFill/>
+          <a:ln/>
+        </p:spPr>
+        <p:txBody>
+          <a:bodyPr wrap="square" rtlCol="0" anchor="t"/>
+          <a:lstStyle/>
+          <a:p>
+            <a:pPr indent="0" marL="0">
+              <a:lnSpc>
+                <a:spcPct val="95000"/>
+              </a:lnSpc>
+              <a:buNone/>
+            </a:pPr>
+            <a:r>
+              <a:rPr lang="en-US" sz="1300" b="1" dirty="0">
+                <a:solidFill>
+                  <a:srgbClr val="1A1A1A"/>
+                </a:solidFill>
+                <a:latin typeface="Arial" pitchFamily="34" charset="0"/>
+                <a:ea typeface="Arial" pitchFamily="34" charset="-122"/>
+                <a:cs typeface="Arial" pitchFamily="34" charset="-120"/>
+              </a:rPr>
+              <a:t>Branded &amp; clear
+</a:t>
+            </a:r>
+            <a:pPr indent="0" marL="0">
+              <a:lnSpc>
+                <a:spcPct val="95000"/>
+              </a:lnSpc>
+              <a:buNone/>
+            </a:pPr>
+            <a:r>
+              <a:rPr lang="en-US" sz="1100" dirty="0">
+                <a:solidFill>
+                  <a:srgbClr val="6B6B6B"/>
+                </a:solidFill>
+                <a:latin typeface="Arial" pitchFamily="34" charset="0"/>
+                <a:ea typeface="Arial" pitchFamily="34" charset="-122"/>
+                <a:cs typeface="Arial" pitchFamily="34" charset="-120"/>
+              </a:rPr>
+              <a:t>Candidates see your company's brand, not a generic form.</a:t>
+            </a:r>
+            <a:endParaRPr lang="en-US" sz="1300" dirty="0"/>
+          </a:p>
+        </p:txBody>
+      </p:sp>
+      <p:sp>
+        <p:nvSpPr>
+          <p:cNvPr id="11" name="Shape 9"/>
+          <p:cNvSpPr/>
+          <p:nvPr/>
+        </p:nvSpPr>
+        <p:spPr>
+          <a:xfrm>
+            <a:off x="6016752" y="1216152"/>
+            <a:ext cx="5797296" cy="4791456"/>
+          </a:xfrm>
+          <a:prstGeom prst="roundRect">
+            <a:avLst>
+              <a:gd name="adj" fmla="val 1527"/>
+            </a:avLst>
+          </a:prstGeom>
+          <a:solidFill>
+            <a:srgbClr val="FFFFFF"/>
+          </a:solidFill>
+          <a:ln w="12700">
+            <a:solidFill>
+              <a:srgbClr val="E6DED3"/>
+            </a:solidFill>
+            <a:prstDash val="solid"/>
+          </a:ln>
+          <a:effectLst>
+            <a:outerShdw sx="100000" sy="100000" kx="0" ky="0" algn="bl" rotWithShape="0" blurRad="152400" dist="38100" dir="5400000">
+              <a:srgbClr val="999999">
+                <a:alpha val="30000"/>
+              </a:srgbClr>
+            </a:outerShdw>
+          </a:effectLst>
+        </p:spPr>
+      </p:sp>
+      <p:sp>
+        <p:nvSpPr>
+          <p:cNvPr id="12" name="Shape 10"/>
+          <p:cNvSpPr/>
+          <p:nvPr/>
+        </p:nvSpPr>
+        <p:spPr>
+          <a:xfrm>
+            <a:off x="6126480" y="1325880"/>
+            <a:ext cx="5577840" cy="502920"/>
+          </a:xfrm>
+          <a:prstGeom prst="rect">
+            <a:avLst/>
+          </a:prstGeom>
+          <a:solidFill>
+            <a:srgbClr val="1A1A1A"/>
+          </a:solidFill>
+          <a:ln/>
+        </p:spPr>
+      </p:sp>
+      <p:sp>
+        <p:nvSpPr>
+          <p:cNvPr id="13" name="Shape 11"/>
+          <p:cNvSpPr/>
+          <p:nvPr/>
+        </p:nvSpPr>
+        <p:spPr>
+          <a:xfrm>
+            <a:off x="6291072" y="1508760"/>
+            <a:ext cx="146304" cy="146304"/>
+          </a:xfrm>
+          <a:prstGeom prst="ellipse">
+            <a:avLst/>
+          </a:prstGeom>
+          <a:solidFill>
+            <a:srgbClr val="FF5F57"/>
+          </a:solidFill>
+          <a:ln/>
+        </p:spPr>
+      </p:sp>
+      <p:sp>
+        <p:nvSpPr>
+          <p:cNvPr id="14" name="Shape 12"/>
+          <p:cNvSpPr/>
+          <p:nvPr/>
+        </p:nvSpPr>
+        <p:spPr>
+          <a:xfrm>
+            <a:off x="6510528" y="1508760"/>
+            <a:ext cx="146304" cy="146304"/>
+          </a:xfrm>
+          <a:prstGeom prst="ellipse">
+            <a:avLst/>
+          </a:prstGeom>
+          <a:solidFill>
+            <a:srgbClr val="FEBC2E"/>
+          </a:solidFill>
+          <a:ln/>
+        </p:spPr>
+      </p:sp>
+      <p:sp>
+        <p:nvSpPr>
+          <p:cNvPr id="15" name="Shape 13"/>
+          <p:cNvSpPr/>
+          <p:nvPr/>
+        </p:nvSpPr>
+        <p:spPr>
+          <a:xfrm>
+            <a:off x="6729984" y="1508760"/>
+            <a:ext cx="146304" cy="146304"/>
+          </a:xfrm>
+          <a:prstGeom prst="ellipse">
+            <a:avLst/>
+          </a:prstGeom>
+          <a:solidFill>
+            <a:srgbClr val="28C840"/>
+          </a:solidFill>
+          <a:ln/>
+        </p:spPr>
+      </p:sp>
+      <p:sp>
+        <p:nvSpPr>
+          <p:cNvPr id="16" name="Text 14"/>
+          <p:cNvSpPr/>
+          <p:nvPr/>
+        </p:nvSpPr>
+        <p:spPr>
+          <a:xfrm>
+            <a:off x="7132320" y="1325880"/>
+            <a:ext cx="4480560" cy="502920"/>
+          </a:xfrm>
+          <a:prstGeom prst="rect">
+            <a:avLst/>
+          </a:prstGeom>
+          <a:noFill/>
+          <a:ln/>
+        </p:spPr>
+        <p:txBody>
+          <a:bodyPr wrap="square" rtlCol="0" anchor="ctr"/>
+          <a:lstStyle/>
+          <a:p>
+            <a:pPr indent="0" marL="0">
+              <a:buNone/>
+            </a:pPr>
+            <a:r>
+              <a:rPr lang="en-US" sz="1200" b="1" dirty="0">
                 <a:solidFill>
                   <a:srgbClr val="FFFFFF"/>
                 </a:solidFill>
@@ -9841,22 +9487,22 @@
                 <a:ea typeface="Arial" pitchFamily="34" charset="-122"/>
                 <a:cs typeface="Arial" pitchFamily="34" charset="-120"/>
               </a:rPr>
-              <a:t>Candidate</a:t>
-            </a:r>
-            <a:endParaRPr lang="en-US" sz="4000" dirty="0"/>
-          </a:p>
-        </p:txBody>
-      </p:sp>
-      <p:sp>
-        <p:nvSpPr>
-          <p:cNvPr id="5" name="Text 3"/>
-          <p:cNvSpPr/>
-          <p:nvPr/>
-        </p:nvSpPr>
-        <p:spPr>
-          <a:xfrm>
-            <a:off x="822960" y="3401568"/>
-            <a:ext cx="10058400" cy="731520"/>
+              <a:t>Candidate · Apply</a:t>
+            </a:r>
+            <a:endParaRPr lang="en-US" sz="1200" dirty="0"/>
+          </a:p>
+        </p:txBody>
+      </p:sp>
+      <p:sp>
+        <p:nvSpPr>
+          <p:cNvPr id="17" name="Text 15"/>
+          <p:cNvSpPr/>
+          <p:nvPr/>
+        </p:nvSpPr>
+        <p:spPr>
+          <a:xfrm>
+            <a:off x="6446520" y="2103120"/>
+            <a:ext cx="4937760" cy="457200"/>
           </a:xfrm>
           <a:prstGeom prst="rect">
             <a:avLst/>
@@ -9872,17 +9518,102 @@
               <a:buNone/>
             </a:pPr>
             <a:r>
-              <a:rPr lang="en-US" sz="1600" dirty="0">
-                <a:solidFill>
-                  <a:srgbClr val="C9C4BD"/>
-                </a:solidFill>
-                <a:latin typeface="Arial" pitchFamily="34" charset="0"/>
-                <a:ea typeface="Arial" pitchFamily="34" charset="-122"/>
-                <a:cs typeface="Arial" pitchFamily="34" charset="-120"/>
-              </a:rPr>
-              <a:t>The external experience</a:t>
-            </a:r>
-            <a:endParaRPr lang="en-US" sz="1600" dirty="0"/>
+              <a:rPr lang="en-US" sz="1700" b="1" dirty="0">
+                <a:solidFill>
+                  <a:srgbClr val="1A1A1A"/>
+                </a:solidFill>
+                <a:latin typeface="Arial" pitchFamily="34" charset="0"/>
+                <a:ea typeface="Arial" pitchFamily="34" charset="-122"/>
+                <a:cs typeface="Arial" pitchFamily="34" charset="-120"/>
+              </a:rPr>
+              <a:t>A frictionless application</a:t>
+            </a:r>
+            <a:endParaRPr lang="en-US" sz="1700" dirty="0"/>
+          </a:p>
+        </p:txBody>
+      </p:sp>
+      <p:sp>
+        <p:nvSpPr>
+          <p:cNvPr id="18" name="Text 16"/>
+          <p:cNvSpPr/>
+          <p:nvPr/>
+        </p:nvSpPr>
+        <p:spPr>
+          <a:xfrm>
+            <a:off x="6492240" y="2697480"/>
+            <a:ext cx="4846320" cy="3017520"/>
+          </a:xfrm>
+          <a:prstGeom prst="rect">
+            <a:avLst/>
+          </a:prstGeom>
+          <a:noFill/>
+          <a:ln/>
+        </p:spPr>
+        <p:txBody>
+          <a:bodyPr wrap="square" rtlCol="0" anchor="t"/>
+          <a:lstStyle/>
+          <a:p>
+            <a:pPr marL="203200" indent="-203200">
+              <a:spcAft>
+                <a:spcPts val="900"/>
+              </a:spcAft>
+              <a:buSzPct val="100000"/>
+              <a:buChar char="✓"/>
+            </a:pPr>
+            <a:r>
+              <a:rPr lang="en-US" sz="1250" dirty="0">
+                <a:solidFill>
+                  <a:srgbClr val="6B6B6B"/>
+                </a:solidFill>
+                <a:latin typeface="Arial" pitchFamily="34" charset="0"/>
+                <a:ea typeface="Arial" pitchFamily="34" charset="-122"/>
+                <a:cs typeface="Arial" pitchFamily="34" charset="-120"/>
+              </a:rPr>
+              <a:t>No account required</a:t>
+            </a:r>
+            <a:endParaRPr lang="en-US" sz="1250" dirty="0"/>
+          </a:p>
+          <a:p>
+            <a:pPr marL="203200" indent="-203200">
+              <a:spcAft>
+                <a:spcPts val="900"/>
+              </a:spcAft>
+              <a:buSzPct val="100000"/>
+              <a:buChar char="✓"/>
+            </a:pPr>
+            <a:r>
+              <a:rPr lang="en-US" sz="1250" dirty="0">
+                <a:solidFill>
+                  <a:srgbClr val="6B6B6B"/>
+                </a:solidFill>
+                <a:latin typeface="Arial" pitchFamily="34" charset="0"/>
+                <a:ea typeface="Arial" pitchFamily="34" charset="-122"/>
+                <a:cs typeface="Arial" pitchFamily="34" charset="-120"/>
+              </a:rPr>
+              <a:t>Profile + CV upload</a:t>
+            </a:r>
+            <a:endParaRPr lang="en-US" sz="1250" dirty="0"/>
+          </a:p>
+          <a:p>
+            <a:pPr marL="203200" indent="-203200">
+              <a:spcAft>
+                <a:spcPts val="900"/>
+              </a:spcAft>
+              <a:buSzPct val="100000"/>
+              <a:buChar char="✓"/>
+            </a:pPr>
+            <a:r>
+              <a:rPr lang="en-US" sz="1250" dirty="0">
+                <a:solidFill>
+                  <a:srgbClr val="6B6B6B"/>
+                </a:solidFill>
+                <a:latin typeface="Arial" pitchFamily="34" charset="0"/>
+                <a:ea typeface="Arial" pitchFamily="34" charset="-122"/>
+                <a:cs typeface="Arial" pitchFamily="34" charset="-120"/>
+              </a:rPr>
+              <a:t>Your brand, not a generic form</a:t>
+            </a:r>
+            <a:endParaRPr lang="en-US" sz="1250" dirty="0"/>
           </a:p>
         </p:txBody>
       </p:sp>
@@ -9971,7 +9702,7 @@
                 <a:ea typeface="Arial" pitchFamily="34" charset="-122"/>
                 <a:cs typeface="Arial" pitchFamily="34" charset="-120"/>
               </a:rPr>
-              <a:t>CANDIDATE · STEP 1</a:t>
+              <a:t>CANDIDATE · STEP 2</a:t>
             </a:r>
             <a:endParaRPr lang="en-US" sz="1200" dirty="0"/>
           </a:p>
@@ -10010,7 +9741,7 @@
                 <a:ea typeface="Arial" pitchFamily="34" charset="-122"/>
                 <a:cs typeface="Arial" pitchFamily="34" charset="-120"/>
               </a:rPr>
-              <a:t>Apply in minutes</a:t>
+              <a:t>Take assessments &amp; track status</a:t>
             </a:r>
             <a:endParaRPr lang="en-US" sz="2500" dirty="0"/>
           </a:p>
@@ -10116,7 +9847,7 @@
                 <a:ea typeface="Arial" pitchFamily="34" charset="-122"/>
                 <a:cs typeface="Arial" pitchFamily="34" charset="-120"/>
               </a:rPr>
-              <a:t>Public apply link
+              <a:t>Distraction-free runner
 </a:t>
             </a:r>
             <a:pPr indent="0" marL="0">
@@ -10134,7 +9865,7 @@
                 <a:ea typeface="Arial" pitchFamily="34" charset="-122"/>
                 <a:cs typeface="Arial" pitchFamily="34" charset="-120"/>
               </a:rPr>
-              <a:t>No account needed — add profile details and upload a CV.</a:t>
+              <a:t>A timed test with autosave and a question palette.</a:t>
             </a:r>
             <a:endParaRPr lang="en-US" sz="1300" dirty="0"/>
           </a:p>
@@ -10240,7 +9971,7 @@
                 <a:ea typeface="Arial" pitchFamily="34" charset="-122"/>
                 <a:cs typeface="Arial" pitchFamily="34" charset="-120"/>
               </a:rPr>
-              <a:t>Branded &amp; clear
+              <a:t>Integrity
 </a:t>
             </a:r>
             <a:pPr indent="0" marL="0">
@@ -10258,7 +9989,7 @@
                 <a:ea typeface="Arial" pitchFamily="34" charset="-122"/>
                 <a:cs typeface="Arial" pitchFamily="34" charset="-120"/>
               </a:rPr>
-              <a:t>Candidates see your company's brand, not a generic form.</a:t>
+              <a:t>Tab-switch/copy detection; question text can't be copied.</a:t>
             </a:r>
             <a:endParaRPr lang="en-US" sz="1300" dirty="0"/>
           </a:p>
@@ -10267,6 +9998,130 @@
       <p:sp>
         <p:nvSpPr>
           <p:cNvPr id="11" name="Shape 9"/>
+          <p:cNvSpPr/>
+          <p:nvPr/>
+        </p:nvSpPr>
+        <p:spPr>
+          <a:xfrm>
+            <a:off x="548640" y="3236976"/>
+            <a:ext cx="384048" cy="384048"/>
+          </a:xfrm>
+          <a:prstGeom prst="ellipse">
+            <a:avLst/>
+          </a:prstGeom>
+          <a:solidFill>
+            <a:srgbClr val="FBE3E0"/>
+          </a:solidFill>
+          <a:ln w="12700">
+            <a:solidFill>
+              <a:srgbClr val="E0342C"/>
+            </a:solidFill>
+            <a:prstDash val="solid"/>
+          </a:ln>
+        </p:spPr>
+      </p:sp>
+      <p:sp>
+        <p:nvSpPr>
+          <p:cNvPr id="12" name="Text 10"/>
+          <p:cNvSpPr/>
+          <p:nvPr/>
+        </p:nvSpPr>
+        <p:spPr>
+          <a:xfrm>
+            <a:off x="548640" y="3236976"/>
+            <a:ext cx="384048" cy="384048"/>
+          </a:xfrm>
+          <a:prstGeom prst="rect">
+            <a:avLst/>
+          </a:prstGeom>
+          <a:noFill/>
+          <a:ln/>
+        </p:spPr>
+        <p:txBody>
+          <a:bodyPr wrap="square" rtlCol="0" anchor="ctr"/>
+          <a:lstStyle/>
+          <a:p>
+            <a:pPr algn="ctr" indent="0" marL="0">
+              <a:buNone/>
+            </a:pPr>
+            <a:r>
+              <a:rPr lang="en-US" sz="1300" b="1" dirty="0">
+                <a:solidFill>
+                  <a:srgbClr val="E0342C"/>
+                </a:solidFill>
+                <a:latin typeface="Arial" pitchFamily="34" charset="0"/>
+                <a:ea typeface="Arial" pitchFamily="34" charset="-122"/>
+                <a:cs typeface="Arial" pitchFamily="34" charset="-120"/>
+              </a:rPr>
+              <a:t>3</a:t>
+            </a:r>
+            <a:endParaRPr lang="en-US" sz="1300" dirty="0"/>
+          </a:p>
+        </p:txBody>
+      </p:sp>
+      <p:sp>
+        <p:nvSpPr>
+          <p:cNvPr id="13" name="Text 11"/>
+          <p:cNvSpPr/>
+          <p:nvPr/>
+        </p:nvSpPr>
+        <p:spPr>
+          <a:xfrm>
+            <a:off x="1097280" y="3172968"/>
+            <a:ext cx="4754880" cy="914400"/>
+          </a:xfrm>
+          <a:prstGeom prst="rect">
+            <a:avLst/>
+          </a:prstGeom>
+          <a:noFill/>
+          <a:ln/>
+        </p:spPr>
+        <p:txBody>
+          <a:bodyPr wrap="square" rtlCol="0" anchor="t"/>
+          <a:lstStyle/>
+          <a:p>
+            <a:pPr indent="0" marL="0">
+              <a:lnSpc>
+                <a:spcPct val="95000"/>
+              </a:lnSpc>
+              <a:buNone/>
+            </a:pPr>
+            <a:r>
+              <a:rPr lang="en-US" sz="1300" b="1" dirty="0">
+                <a:solidFill>
+                  <a:srgbClr val="1A1A1A"/>
+                </a:solidFill>
+                <a:latin typeface="Arial" pitchFamily="34" charset="0"/>
+                <a:ea typeface="Arial" pitchFamily="34" charset="-122"/>
+                <a:cs typeface="Arial" pitchFamily="34" charset="-120"/>
+              </a:rPr>
+              <a:t>Candidate portal
+</a:t>
+            </a:r>
+            <a:pPr indent="0" marL="0">
+              <a:lnSpc>
+                <a:spcPct val="95000"/>
+              </a:lnSpc>
+              <a:buNone/>
+            </a:pPr>
+            <a:r>
+              <a:rPr lang="en-US" sz="1100" dirty="0">
+                <a:solidFill>
+                  <a:srgbClr val="6B6B6B"/>
+                </a:solidFill>
+                <a:latin typeface="Arial" pitchFamily="34" charset="0"/>
+                <a:ea typeface="Arial" pitchFamily="34" charset="-122"/>
+                <a:cs typeface="Arial" pitchFamily="34" charset="-120"/>
+              </a:rPr>
+              <a:t>Track application status and next steps from one link.</a:t>
+            </a:r>
+            <a:endParaRPr lang="en-US" sz="1300" dirty="0"/>
+          </a:p>
+        </p:txBody>
+      </p:sp>
+      <p:sp>
+        <p:nvSpPr>
+          <p:cNvPr id="14" name="Shape 12"/>
           <p:cNvSpPr/>
           <p:nvPr/>
         </p:nvSpPr>
@@ -10300,7 +10155,7 @@
       </p:sp>
       <p:sp>
         <p:nvSpPr>
-          <p:cNvPr id="12" name="Shape 10"/>
+          <p:cNvPr id="15" name="Shape 13"/>
           <p:cNvSpPr/>
           <p:nvPr/>
         </p:nvSpPr>
@@ -10320,7 +10175,7 @@
       </p:sp>
       <p:sp>
         <p:nvSpPr>
-          <p:cNvPr id="13" name="Shape 11"/>
+          <p:cNvPr id="16" name="Shape 14"/>
           <p:cNvSpPr/>
           <p:nvPr/>
         </p:nvSpPr>
@@ -10340,7 +10195,7 @@
       </p:sp>
       <p:sp>
         <p:nvSpPr>
-          <p:cNvPr id="14" name="Shape 12"/>
+          <p:cNvPr id="17" name="Shape 15"/>
           <p:cNvSpPr/>
           <p:nvPr/>
         </p:nvSpPr>
@@ -10360,7 +10215,7 @@
       </p:sp>
       <p:sp>
         <p:nvSpPr>
-          <p:cNvPr id="15" name="Shape 13"/>
+          <p:cNvPr id="18" name="Shape 16"/>
           <p:cNvSpPr/>
           <p:nvPr/>
         </p:nvSpPr>
@@ -10380,7 +10235,7 @@
       </p:sp>
       <p:sp>
         <p:nvSpPr>
-          <p:cNvPr id="16" name="Text 14"/>
+          <p:cNvPr id="19" name="Text 17"/>
           <p:cNvSpPr/>
           <p:nvPr/>
         </p:nvSpPr>
@@ -10411,7 +10266,7 @@
                 <a:ea typeface="Arial" pitchFamily="34" charset="-122"/>
                 <a:cs typeface="Arial" pitchFamily="34" charset="-120"/>
               </a:rPr>
-              <a:t>Candidate · Apply</a:t>
+              <a:t>Candidate · Portal</a:t>
             </a:r>
             <a:endParaRPr lang="en-US" sz="1200" dirty="0"/>
           </a:p>
@@ -10419,7 +10274,7 @@
       </p:sp>
       <p:sp>
         <p:nvSpPr>
-          <p:cNvPr id="17" name="Text 15"/>
+          <p:cNvPr id="20" name="Text 18"/>
           <p:cNvSpPr/>
           <p:nvPr/>
         </p:nvSpPr>
@@ -10450,7 +10305,7 @@
                 <a:ea typeface="Arial" pitchFamily="34" charset="-122"/>
                 <a:cs typeface="Arial" pitchFamily="34" charset="-120"/>
               </a:rPr>
-              <a:t>A frictionless application</a:t>
+              <a:t>Fair, transparent testing</a:t>
             </a:r>
             <a:endParaRPr lang="en-US" sz="1700" dirty="0"/>
           </a:p>
@@ -10458,7 +10313,7 @@
       </p:sp>
       <p:sp>
         <p:nvSpPr>
-          <p:cNvPr id="18" name="Text 16"/>
+          <p:cNvPr id="21" name="Text 19"/>
           <p:cNvSpPr/>
           <p:nvPr/>
         </p:nvSpPr>
@@ -10493,7 +10348,7 @@
                 <a:ea typeface="Arial" pitchFamily="34" charset="-122"/>
                 <a:cs typeface="Arial" pitchFamily="34" charset="-120"/>
               </a:rPr>
-              <a:t>No account required</a:t>
+              <a:t>Timed runner with autosave</a:t>
             </a:r>
             <a:endParaRPr lang="en-US" sz="1250" dirty="0"/>
           </a:p>
@@ -10514,7 +10369,7 @@
                 <a:ea typeface="Arial" pitchFamily="34" charset="-122"/>
                 <a:cs typeface="Arial" pitchFamily="34" charset="-120"/>
               </a:rPr>
-              <a:t>Profile + CV upload</a:t>
+              <a:t>Copy-proof, proctored</a:t>
             </a:r>
             <a:endParaRPr lang="en-US" sz="1250" dirty="0"/>
           </a:p>
@@ -10535,7 +10390,7 @@
                 <a:ea typeface="Arial" pitchFamily="34" charset="-122"/>
                 <a:cs typeface="Arial" pitchFamily="34" charset="-120"/>
               </a:rPr>
-              <a:t>Your brand, not a generic form</a:t>
+              <a:t>Live status in the portal</a:t>
             </a:r>
             <a:endParaRPr lang="en-US" sz="1250" dirty="0"/>
           </a:p>
@@ -10601,8 +10456,8 @@
         </p:nvSpPr>
         <p:spPr>
           <a:xfrm>
-            <a:off x="548640" y="457200"/>
-            <a:ext cx="5486400" cy="320040"/>
+            <a:off x="640080" y="640080"/>
+            <a:ext cx="10972800" cy="640080"/>
           </a:xfrm>
           <a:prstGeom prst="rect">
             <a:avLst/>
@@ -10618,17 +10473,17 @@
               <a:buNone/>
             </a:pPr>
             <a:r>
-              <a:rPr lang="en-US" sz="1200" b="1" spc="200" kern="0" dirty="0">
-                <a:solidFill>
-                  <a:srgbClr val="E0342C"/>
-                </a:solidFill>
-                <a:latin typeface="Arial" pitchFamily="34" charset="0"/>
-                <a:ea typeface="Arial" pitchFamily="34" charset="-122"/>
-                <a:cs typeface="Arial" pitchFamily="34" charset="-120"/>
-              </a:rPr>
-              <a:t>CANDIDATE · STEP 2</a:t>
-            </a:r>
-            <a:endParaRPr lang="en-US" sz="1200" dirty="0"/>
+              <a:rPr lang="en-US" sz="3000" b="1" dirty="0">
+                <a:solidFill>
+                  <a:srgbClr val="1A1A1A"/>
+                </a:solidFill>
+                <a:latin typeface="Arial" pitchFamily="34" charset="0"/>
+                <a:ea typeface="Arial" pitchFamily="34" charset="-122"/>
+                <a:cs typeface="Arial" pitchFamily="34" charset="-120"/>
+              </a:rPr>
+              <a:t>Secure &amp; multi-tenant by design</a:t>
+            </a:r>
+            <a:endParaRPr lang="en-US" sz="3000" dirty="0"/>
           </a:p>
         </p:txBody>
       </p:sp>
@@ -10640,8 +10495,8 @@
         </p:nvSpPr>
         <p:spPr>
           <a:xfrm>
-            <a:off x="548640" y="758952"/>
-            <a:ext cx="5486400" cy="640080"/>
+            <a:off x="640080" y="1325880"/>
+            <a:ext cx="10972800" cy="457200"/>
           </a:xfrm>
           <a:prstGeom prst="rect">
             <a:avLst/>
@@ -10657,94 +10512,30 @@
               <a:buNone/>
             </a:pPr>
             <a:r>
-              <a:rPr lang="en-US" sz="2500" b="1" dirty="0">
-                <a:solidFill>
-                  <a:srgbClr val="1A1A1A"/>
-                </a:solidFill>
-                <a:latin typeface="Arial" pitchFamily="34" charset="0"/>
-                <a:ea typeface="Arial" pitchFamily="34" charset="-122"/>
-                <a:cs typeface="Arial" pitchFamily="34" charset="-120"/>
-              </a:rPr>
-              <a:t>Take assessments &amp; track status</a:t>
-            </a:r>
-            <a:endParaRPr lang="en-US" sz="2500" dirty="0"/>
-          </a:p>
-        </p:txBody>
-      </p:sp>
-      <p:sp>
-        <p:nvSpPr>
-          <p:cNvPr id="5" name="Shape 3"/>
-          <p:cNvSpPr/>
-          <p:nvPr/>
-        </p:nvSpPr>
-        <p:spPr>
-          <a:xfrm>
-            <a:off x="548640" y="1664208"/>
-            <a:ext cx="384048" cy="384048"/>
-          </a:xfrm>
-          <a:prstGeom prst="ellipse">
-            <a:avLst/>
-          </a:prstGeom>
-          <a:solidFill>
-            <a:srgbClr val="FBE3E0"/>
-          </a:solidFill>
-          <a:ln w="12700">
-            <a:solidFill>
-              <a:srgbClr val="E0342C"/>
-            </a:solidFill>
-            <a:prstDash val="solid"/>
-          </a:ln>
-        </p:spPr>
-      </p:sp>
-      <p:sp>
-        <p:nvSpPr>
-          <p:cNvPr id="6" name="Text 4"/>
-          <p:cNvSpPr/>
-          <p:nvPr/>
-        </p:nvSpPr>
-        <p:spPr>
-          <a:xfrm>
-            <a:off x="548640" y="1664208"/>
-            <a:ext cx="384048" cy="384048"/>
-          </a:xfrm>
-          <a:prstGeom prst="rect">
-            <a:avLst/>
-          </a:prstGeom>
-          <a:noFill/>
-          <a:ln/>
-        </p:spPr>
-        <p:txBody>
-          <a:bodyPr wrap="square" rtlCol="0" anchor="ctr"/>
-          <a:lstStyle/>
-          <a:p>
-            <a:pPr algn="ctr" indent="0" marL="0">
-              <a:buNone/>
-            </a:pPr>
-            <a:r>
-              <a:rPr lang="en-US" sz="1300" b="1" dirty="0">
-                <a:solidFill>
-                  <a:srgbClr val="E0342C"/>
-                </a:solidFill>
-                <a:latin typeface="Arial" pitchFamily="34" charset="0"/>
-                <a:ea typeface="Arial" pitchFamily="34" charset="-122"/>
-                <a:cs typeface="Arial" pitchFamily="34" charset="-120"/>
-              </a:rPr>
-              <a:t>1</a:t>
-            </a:r>
-            <a:endParaRPr lang="en-US" sz="1300" dirty="0"/>
-          </a:p>
-        </p:txBody>
-      </p:sp>
-      <p:sp>
-        <p:nvSpPr>
-          <p:cNvPr id="7" name="Text 5"/>
-          <p:cNvSpPr/>
-          <p:nvPr/>
-        </p:nvSpPr>
-        <p:spPr>
-          <a:xfrm>
-            <a:off x="1097280" y="1600200"/>
-            <a:ext cx="4754880" cy="914400"/>
+              <a:rPr lang="en-US" sz="1500" dirty="0">
+                <a:solidFill>
+                  <a:srgbClr val="6B6B6B"/>
+                </a:solidFill>
+                <a:latin typeface="Arial" pitchFamily="34" charset="0"/>
+                <a:ea typeface="Arial" pitchFamily="34" charset="-122"/>
+                <a:cs typeface="Arial" pitchFamily="34" charset="-120"/>
+              </a:rPr>
+              <a:t>Trust built in</a:t>
+            </a:r>
+            <a:endParaRPr lang="en-US" sz="1500" dirty="0"/>
+          </a:p>
+        </p:txBody>
+      </p:sp>
+      <p:sp>
+        <p:nvSpPr>
+          <p:cNvPr id="5" name="Text 3"/>
+          <p:cNvSpPr/>
+          <p:nvPr/>
+        </p:nvSpPr>
+        <p:spPr>
+          <a:xfrm>
+            <a:off x="822960" y="2103120"/>
+            <a:ext cx="10424160" cy="4206240"/>
           </a:xfrm>
           <a:prstGeom prst="rect">
             <a:avLst/>
@@ -10756,567 +10547,88 @@
           <a:bodyPr wrap="square" rtlCol="0" anchor="t"/>
           <a:lstStyle/>
           <a:p>
-            <a:pPr indent="0" marL="0">
-              <a:lnSpc>
-                <a:spcPct val="95000"/>
-              </a:lnSpc>
-              <a:buNone/>
-            </a:pPr>
-            <a:r>
-              <a:rPr lang="en-US" sz="1300" b="1" dirty="0">
-                <a:solidFill>
-                  <a:srgbClr val="1A1A1A"/>
-                </a:solidFill>
-                <a:latin typeface="Arial" pitchFamily="34" charset="0"/>
-                <a:ea typeface="Arial" pitchFamily="34" charset="-122"/>
-                <a:cs typeface="Arial" pitchFamily="34" charset="-120"/>
-              </a:rPr>
-              <a:t>Distraction-free runner
-</a:t>
-            </a:r>
-            <a:pPr indent="0" marL="0">
-              <a:lnSpc>
-                <a:spcPct val="95000"/>
-              </a:lnSpc>
-              <a:buNone/>
-            </a:pPr>
-            <a:r>
-              <a:rPr lang="en-US" sz="1100" dirty="0">
-                <a:solidFill>
-                  <a:srgbClr val="6B6B6B"/>
-                </a:solidFill>
-                <a:latin typeface="Arial" pitchFamily="34" charset="0"/>
-                <a:ea typeface="Arial" pitchFamily="34" charset="-122"/>
-                <a:cs typeface="Arial" pitchFamily="34" charset="-120"/>
-              </a:rPr>
-              <a:t>A timed test with autosave and a question palette.</a:t>
-            </a:r>
-            <a:endParaRPr lang="en-US" sz="1300" dirty="0"/>
-          </a:p>
-        </p:txBody>
-      </p:sp>
-      <p:sp>
-        <p:nvSpPr>
-          <p:cNvPr id="8" name="Shape 6"/>
-          <p:cNvSpPr/>
-          <p:nvPr/>
-        </p:nvSpPr>
-        <p:spPr>
-          <a:xfrm>
-            <a:off x="548640" y="2450592"/>
-            <a:ext cx="384048" cy="384048"/>
-          </a:xfrm>
-          <a:prstGeom prst="ellipse">
-            <a:avLst/>
-          </a:prstGeom>
-          <a:solidFill>
-            <a:srgbClr val="FBE3E0"/>
-          </a:solidFill>
-          <a:ln w="12700">
-            <a:solidFill>
-              <a:srgbClr val="E0342C"/>
-            </a:solidFill>
-            <a:prstDash val="solid"/>
-          </a:ln>
-        </p:spPr>
-      </p:sp>
-      <p:sp>
-        <p:nvSpPr>
-          <p:cNvPr id="9" name="Text 7"/>
-          <p:cNvSpPr/>
-          <p:nvPr/>
-        </p:nvSpPr>
-        <p:spPr>
-          <a:xfrm>
-            <a:off x="548640" y="2450592"/>
-            <a:ext cx="384048" cy="384048"/>
-          </a:xfrm>
-          <a:prstGeom prst="rect">
-            <a:avLst/>
-          </a:prstGeom>
-          <a:noFill/>
-          <a:ln/>
-        </p:spPr>
-        <p:txBody>
-          <a:bodyPr wrap="square" rtlCol="0" anchor="ctr"/>
-          <a:lstStyle/>
-          <a:p>
-            <a:pPr algn="ctr" indent="0" marL="0">
-              <a:buNone/>
-            </a:pPr>
-            <a:r>
-              <a:rPr lang="en-US" sz="1300" b="1" dirty="0">
-                <a:solidFill>
-                  <a:srgbClr val="E0342C"/>
-                </a:solidFill>
-                <a:latin typeface="Arial" pitchFamily="34" charset="0"/>
-                <a:ea typeface="Arial" pitchFamily="34" charset="-122"/>
-                <a:cs typeface="Arial" pitchFamily="34" charset="-120"/>
-              </a:rPr>
-              <a:t>2</a:t>
-            </a:r>
-            <a:endParaRPr lang="en-US" sz="1300" dirty="0"/>
-          </a:p>
-        </p:txBody>
-      </p:sp>
-      <p:sp>
-        <p:nvSpPr>
-          <p:cNvPr id="10" name="Text 8"/>
-          <p:cNvSpPr/>
-          <p:nvPr/>
-        </p:nvSpPr>
-        <p:spPr>
-          <a:xfrm>
-            <a:off x="1097280" y="2386584"/>
-            <a:ext cx="4754880" cy="914400"/>
-          </a:xfrm>
-          <a:prstGeom prst="rect">
-            <a:avLst/>
-          </a:prstGeom>
-          <a:noFill/>
-          <a:ln/>
-        </p:spPr>
-        <p:txBody>
-          <a:bodyPr wrap="square" rtlCol="0" anchor="t"/>
-          <a:lstStyle/>
-          <a:p>
-            <a:pPr indent="0" marL="0">
-              <a:lnSpc>
-                <a:spcPct val="95000"/>
-              </a:lnSpc>
-              <a:buNone/>
-            </a:pPr>
-            <a:r>
-              <a:rPr lang="en-US" sz="1300" b="1" dirty="0">
-                <a:solidFill>
-                  <a:srgbClr val="1A1A1A"/>
-                </a:solidFill>
-                <a:latin typeface="Arial" pitchFamily="34" charset="0"/>
-                <a:ea typeface="Arial" pitchFamily="34" charset="-122"/>
-                <a:cs typeface="Arial" pitchFamily="34" charset="-120"/>
-              </a:rPr>
-              <a:t>Integrity
-</a:t>
-            </a:r>
-            <a:pPr indent="0" marL="0">
-              <a:lnSpc>
-                <a:spcPct val="95000"/>
-              </a:lnSpc>
-              <a:buNone/>
-            </a:pPr>
-            <a:r>
-              <a:rPr lang="en-US" sz="1100" dirty="0">
-                <a:solidFill>
-                  <a:srgbClr val="6B6B6B"/>
-                </a:solidFill>
-                <a:latin typeface="Arial" pitchFamily="34" charset="0"/>
-                <a:ea typeface="Arial" pitchFamily="34" charset="-122"/>
-                <a:cs typeface="Arial" pitchFamily="34" charset="-120"/>
-              </a:rPr>
-              <a:t>Tab-switch/copy detection; question text can't be copied.</a:t>
-            </a:r>
-            <a:endParaRPr lang="en-US" sz="1300" dirty="0"/>
-          </a:p>
-        </p:txBody>
-      </p:sp>
-      <p:sp>
-        <p:nvSpPr>
-          <p:cNvPr id="11" name="Shape 9"/>
-          <p:cNvSpPr/>
-          <p:nvPr/>
-        </p:nvSpPr>
-        <p:spPr>
-          <a:xfrm>
-            <a:off x="548640" y="3236976"/>
-            <a:ext cx="384048" cy="384048"/>
-          </a:xfrm>
-          <a:prstGeom prst="ellipse">
-            <a:avLst/>
-          </a:prstGeom>
-          <a:solidFill>
-            <a:srgbClr val="FBE3E0"/>
-          </a:solidFill>
-          <a:ln w="12700">
-            <a:solidFill>
-              <a:srgbClr val="E0342C"/>
-            </a:solidFill>
-            <a:prstDash val="solid"/>
-          </a:ln>
-        </p:spPr>
-      </p:sp>
-      <p:sp>
-        <p:nvSpPr>
-          <p:cNvPr id="12" name="Text 10"/>
-          <p:cNvSpPr/>
-          <p:nvPr/>
-        </p:nvSpPr>
-        <p:spPr>
-          <a:xfrm>
-            <a:off x="548640" y="3236976"/>
-            <a:ext cx="384048" cy="384048"/>
-          </a:xfrm>
-          <a:prstGeom prst="rect">
-            <a:avLst/>
-          </a:prstGeom>
-          <a:noFill/>
-          <a:ln/>
-        </p:spPr>
-        <p:txBody>
-          <a:bodyPr wrap="square" rtlCol="0" anchor="ctr"/>
-          <a:lstStyle/>
-          <a:p>
-            <a:pPr algn="ctr" indent="0" marL="0">
-              <a:buNone/>
-            </a:pPr>
-            <a:r>
-              <a:rPr lang="en-US" sz="1300" b="1" dirty="0">
-                <a:solidFill>
-                  <a:srgbClr val="E0342C"/>
-                </a:solidFill>
-                <a:latin typeface="Arial" pitchFamily="34" charset="0"/>
-                <a:ea typeface="Arial" pitchFamily="34" charset="-122"/>
-                <a:cs typeface="Arial" pitchFamily="34" charset="-120"/>
-              </a:rPr>
-              <a:t>3</a:t>
-            </a:r>
-            <a:endParaRPr lang="en-US" sz="1300" dirty="0"/>
-          </a:p>
-        </p:txBody>
-      </p:sp>
-      <p:sp>
-        <p:nvSpPr>
-          <p:cNvPr id="13" name="Text 11"/>
-          <p:cNvSpPr/>
-          <p:nvPr/>
-        </p:nvSpPr>
-        <p:spPr>
-          <a:xfrm>
-            <a:off x="1097280" y="3172968"/>
-            <a:ext cx="4754880" cy="914400"/>
-          </a:xfrm>
-          <a:prstGeom prst="rect">
-            <a:avLst/>
-          </a:prstGeom>
-          <a:noFill/>
-          <a:ln/>
-        </p:spPr>
-        <p:txBody>
-          <a:bodyPr wrap="square" rtlCol="0" anchor="t"/>
-          <a:lstStyle/>
-          <a:p>
-            <a:pPr indent="0" marL="0">
-              <a:lnSpc>
-                <a:spcPct val="95000"/>
-              </a:lnSpc>
-              <a:buNone/>
-            </a:pPr>
-            <a:r>
-              <a:rPr lang="en-US" sz="1300" b="1" dirty="0">
-                <a:solidFill>
-                  <a:srgbClr val="1A1A1A"/>
-                </a:solidFill>
-                <a:latin typeface="Arial" pitchFamily="34" charset="0"/>
-                <a:ea typeface="Arial" pitchFamily="34" charset="-122"/>
-                <a:cs typeface="Arial" pitchFamily="34" charset="-120"/>
-              </a:rPr>
-              <a:t>Candidate portal
-</a:t>
-            </a:r>
-            <a:pPr indent="0" marL="0">
-              <a:lnSpc>
-                <a:spcPct val="95000"/>
-              </a:lnSpc>
-              <a:buNone/>
-            </a:pPr>
-            <a:r>
-              <a:rPr lang="en-US" sz="1100" dirty="0">
-                <a:solidFill>
-                  <a:srgbClr val="6B6B6B"/>
-                </a:solidFill>
-                <a:latin typeface="Arial" pitchFamily="34" charset="0"/>
-                <a:ea typeface="Arial" pitchFamily="34" charset="-122"/>
-                <a:cs typeface="Arial" pitchFamily="34" charset="-120"/>
-              </a:rPr>
-              <a:t>Track application status and next steps from one link.</a:t>
-            </a:r>
-            <a:endParaRPr lang="en-US" sz="1300" dirty="0"/>
-          </a:p>
-        </p:txBody>
-      </p:sp>
-      <p:sp>
-        <p:nvSpPr>
-          <p:cNvPr id="14" name="Shape 12"/>
-          <p:cNvSpPr/>
-          <p:nvPr/>
-        </p:nvSpPr>
-        <p:spPr>
-          <a:xfrm>
-            <a:off x="6016752" y="1216152"/>
-            <a:ext cx="5797296" cy="4791456"/>
-          </a:xfrm>
-          <a:prstGeom prst="roundRect">
-            <a:avLst>
-              <a:gd name="adj" fmla="val 1527"/>
-            </a:avLst>
-          </a:prstGeom>
-          <a:solidFill>
-            <a:srgbClr val="FFFFFF"/>
-          </a:solidFill>
-          <a:ln w="12700">
-            <a:solidFill>
-              <a:srgbClr val="E6DED3"/>
-            </a:solidFill>
-            <a:prstDash val="solid"/>
-          </a:ln>
-          <a:effectLst>
-            <a:outerShdw sx="100000" sy="100000" kx="0" ky="0" algn="bl" rotWithShape="0" blurRad="152400" dist="38100" dir="5400000">
-              <a:srgbClr val="999999">
-                <a:alpha val="30000"/>
-              </a:srgbClr>
-            </a:outerShdw>
-          </a:effectLst>
-        </p:spPr>
-      </p:sp>
-      <p:sp>
-        <p:nvSpPr>
-          <p:cNvPr id="15" name="Shape 13"/>
-          <p:cNvSpPr/>
-          <p:nvPr/>
-        </p:nvSpPr>
-        <p:spPr>
-          <a:xfrm>
-            <a:off x="6126480" y="1325880"/>
-            <a:ext cx="5577840" cy="502920"/>
-          </a:xfrm>
-          <a:prstGeom prst="rect">
-            <a:avLst/>
-          </a:prstGeom>
-          <a:solidFill>
-            <a:srgbClr val="1A1A1A"/>
-          </a:solidFill>
-          <a:ln/>
-        </p:spPr>
-      </p:sp>
-      <p:sp>
-        <p:nvSpPr>
-          <p:cNvPr id="16" name="Shape 14"/>
-          <p:cNvSpPr/>
-          <p:nvPr/>
-        </p:nvSpPr>
-        <p:spPr>
-          <a:xfrm>
-            <a:off x="6291072" y="1508760"/>
-            <a:ext cx="146304" cy="146304"/>
-          </a:xfrm>
-          <a:prstGeom prst="ellipse">
-            <a:avLst/>
-          </a:prstGeom>
-          <a:solidFill>
-            <a:srgbClr val="FF5F57"/>
-          </a:solidFill>
-          <a:ln/>
-        </p:spPr>
-      </p:sp>
-      <p:sp>
-        <p:nvSpPr>
-          <p:cNvPr id="17" name="Shape 15"/>
-          <p:cNvSpPr/>
-          <p:nvPr/>
-        </p:nvSpPr>
-        <p:spPr>
-          <a:xfrm>
-            <a:off x="6510528" y="1508760"/>
-            <a:ext cx="146304" cy="146304"/>
-          </a:xfrm>
-          <a:prstGeom prst="ellipse">
-            <a:avLst/>
-          </a:prstGeom>
-          <a:solidFill>
-            <a:srgbClr val="FEBC2E"/>
-          </a:solidFill>
-          <a:ln/>
-        </p:spPr>
-      </p:sp>
-      <p:sp>
-        <p:nvSpPr>
-          <p:cNvPr id="18" name="Shape 16"/>
-          <p:cNvSpPr/>
-          <p:nvPr/>
-        </p:nvSpPr>
-        <p:spPr>
-          <a:xfrm>
-            <a:off x="6729984" y="1508760"/>
-            <a:ext cx="146304" cy="146304"/>
-          </a:xfrm>
-          <a:prstGeom prst="ellipse">
-            <a:avLst/>
-          </a:prstGeom>
-          <a:solidFill>
-            <a:srgbClr val="28C840"/>
-          </a:solidFill>
-          <a:ln/>
-        </p:spPr>
-      </p:sp>
-      <p:sp>
-        <p:nvSpPr>
-          <p:cNvPr id="19" name="Text 17"/>
-          <p:cNvSpPr/>
-          <p:nvPr/>
-        </p:nvSpPr>
-        <p:spPr>
-          <a:xfrm>
-            <a:off x="7132320" y="1325880"/>
-            <a:ext cx="4480560" cy="502920"/>
-          </a:xfrm>
-          <a:prstGeom prst="rect">
-            <a:avLst/>
-          </a:prstGeom>
-          <a:noFill/>
-          <a:ln/>
-        </p:spPr>
-        <p:txBody>
-          <a:bodyPr wrap="square" rtlCol="0" anchor="ctr"/>
-          <a:lstStyle/>
-          <a:p>
-            <a:pPr indent="0" marL="0">
-              <a:buNone/>
-            </a:pPr>
-            <a:r>
-              <a:rPr lang="en-US" sz="1200" b="1" dirty="0">
-                <a:solidFill>
-                  <a:srgbClr val="FFFFFF"/>
-                </a:solidFill>
-                <a:latin typeface="Arial" pitchFamily="34" charset="0"/>
-                <a:ea typeface="Arial" pitchFamily="34" charset="-122"/>
-                <a:cs typeface="Arial" pitchFamily="34" charset="-120"/>
-              </a:rPr>
-              <a:t>Candidate · Portal</a:t>
-            </a:r>
-            <a:endParaRPr lang="en-US" sz="1200" dirty="0"/>
-          </a:p>
-        </p:txBody>
-      </p:sp>
-      <p:sp>
-        <p:nvSpPr>
-          <p:cNvPr id="20" name="Text 18"/>
-          <p:cNvSpPr/>
-          <p:nvPr/>
-        </p:nvSpPr>
-        <p:spPr>
-          <a:xfrm>
-            <a:off x="6446520" y="2103120"/>
-            <a:ext cx="4937760" cy="457200"/>
-          </a:xfrm>
-          <a:prstGeom prst="rect">
-            <a:avLst/>
-          </a:prstGeom>
-          <a:noFill/>
-          <a:ln/>
-        </p:spPr>
-        <p:txBody>
-          <a:bodyPr wrap="square" rtlCol="0" anchor="ctr"/>
-          <a:lstStyle/>
-          <a:p>
-            <a:pPr indent="0" marL="0">
-              <a:buNone/>
-            </a:pPr>
-            <a:r>
-              <a:rPr lang="en-US" sz="1700" b="1" dirty="0">
-                <a:solidFill>
-                  <a:srgbClr val="1A1A1A"/>
-                </a:solidFill>
-                <a:latin typeface="Arial" pitchFamily="34" charset="0"/>
-                <a:ea typeface="Arial" pitchFamily="34" charset="-122"/>
-                <a:cs typeface="Arial" pitchFamily="34" charset="-120"/>
-              </a:rPr>
-              <a:t>Fair, transparent testing</a:t>
-            </a:r>
-            <a:endParaRPr lang="en-US" sz="1700" dirty="0"/>
-          </a:p>
-        </p:txBody>
-      </p:sp>
-      <p:sp>
-        <p:nvSpPr>
-          <p:cNvPr id="21" name="Text 19"/>
-          <p:cNvSpPr/>
-          <p:nvPr/>
-        </p:nvSpPr>
-        <p:spPr>
-          <a:xfrm>
-            <a:off x="6492240" y="2697480"/>
-            <a:ext cx="4846320" cy="3017520"/>
-          </a:xfrm>
-          <a:prstGeom prst="rect">
-            <a:avLst/>
-          </a:prstGeom>
-          <a:noFill/>
-          <a:ln/>
-        </p:spPr>
-        <p:txBody>
-          <a:bodyPr wrap="square" rtlCol="0" anchor="t"/>
-          <a:lstStyle/>
-          <a:p>
-            <a:pPr marL="203200" indent="-203200">
+            <a:pPr marL="228600" indent="-228600">
               <a:spcAft>
-                <a:spcPts val="900"/>
+                <a:spcPts val="1100"/>
               </a:spcAft>
               <a:buSzPct val="100000"/>
-              <a:buChar char="✓"/>
-            </a:pPr>
-            <a:r>
-              <a:rPr lang="en-US" sz="1250" dirty="0">
-                <a:solidFill>
-                  <a:srgbClr val="6B6B6B"/>
-                </a:solidFill>
-                <a:latin typeface="Arial" pitchFamily="34" charset="0"/>
-                <a:ea typeface="Arial" pitchFamily="34" charset="-122"/>
-                <a:cs typeface="Arial" pitchFamily="34" charset="-120"/>
-              </a:rPr>
-              <a:t>Timed runner with autosave</a:t>
-            </a:r>
-            <a:endParaRPr lang="en-US" sz="1250" dirty="0"/>
-          </a:p>
-          <a:p>
-            <a:pPr marL="203200" indent="-203200">
+              <a:buChar char="•"/>
+            </a:pPr>
+            <a:r>
+              <a:rPr lang="en-US" sz="1500" dirty="0">
+                <a:solidFill>
+                  <a:srgbClr val="1A1A1A"/>
+                </a:solidFill>
+                <a:latin typeface="Arial" pitchFamily="34" charset="0"/>
+                <a:ea typeface="Arial" pitchFamily="34" charset="-122"/>
+                <a:cs typeface="Arial" pitchFamily="34" charset="-120"/>
+              </a:rPr>
+              <a:t>Row-Level Security isolates every tenant's data at the database layer.</a:t>
+            </a:r>
+            <a:endParaRPr lang="en-US" sz="1500" dirty="0"/>
+          </a:p>
+          <a:p>
+            <a:pPr marL="228600" indent="-228600">
               <a:spcAft>
-                <a:spcPts val="900"/>
+                <a:spcPts val="1100"/>
               </a:spcAft>
               <a:buSzPct val="100000"/>
-              <a:buChar char="✓"/>
-            </a:pPr>
-            <a:r>
-              <a:rPr lang="en-US" sz="1250" dirty="0">
-                <a:solidFill>
-                  <a:srgbClr val="6B6B6B"/>
-                </a:solidFill>
-                <a:latin typeface="Arial" pitchFamily="34" charset="0"/>
-                <a:ea typeface="Arial" pitchFamily="34" charset="-122"/>
-                <a:cs typeface="Arial" pitchFamily="34" charset="-120"/>
-              </a:rPr>
-              <a:t>Copy-proof, proctored</a:t>
-            </a:r>
-            <a:endParaRPr lang="en-US" sz="1250" dirty="0"/>
-          </a:p>
-          <a:p>
-            <a:pPr marL="203200" indent="-203200">
+              <a:buChar char="•"/>
+            </a:pPr>
+            <a:r>
+              <a:rPr lang="en-US" sz="1500" dirty="0">
+                <a:solidFill>
+                  <a:srgbClr val="1A1A1A"/>
+                </a:solidFill>
+                <a:latin typeface="Arial" pitchFamily="34" charset="0"/>
+                <a:ea typeface="Arial" pitchFamily="34" charset="-122"/>
+                <a:cs typeface="Arial" pitchFamily="34" charset="-120"/>
+              </a:rPr>
+              <a:t>Role-based permissions from a central catalogue — the UI and DB never disagree.</a:t>
+            </a:r>
+            <a:endParaRPr lang="en-US" sz="1500" dirty="0"/>
+          </a:p>
+          <a:p>
+            <a:pPr marL="228600" indent="-228600">
               <a:spcAft>
-                <a:spcPts val="900"/>
+                <a:spcPts val="1100"/>
               </a:spcAft>
               <a:buSzPct val="100000"/>
-              <a:buChar char="✓"/>
-            </a:pPr>
-            <a:r>
-              <a:rPr lang="en-US" sz="1250" dirty="0">
-                <a:solidFill>
-                  <a:srgbClr val="6B6B6B"/>
-                </a:solidFill>
-                <a:latin typeface="Arial" pitchFamily="34" charset="0"/>
-                <a:ea typeface="Arial" pitchFamily="34" charset="-122"/>
-                <a:cs typeface="Arial" pitchFamily="34" charset="-120"/>
-              </a:rPr>
-              <a:t>Live status in the portal</a:t>
-            </a:r>
-            <a:endParaRPr lang="en-US" sz="1250" dirty="0"/>
+              <a:buChar char="•"/>
+            </a:pPr>
+            <a:r>
+              <a:rPr lang="en-US" sz="1500" dirty="0">
+                <a:solidFill>
+                  <a:srgbClr val="1A1A1A"/>
+                </a:solidFill>
+                <a:latin typeface="Arial" pitchFamily="34" charset="0"/>
+                <a:ea typeface="Arial" pitchFamily="34" charset="-122"/>
+                <a:cs typeface="Arial" pitchFamily="34" charset="-120"/>
+              </a:rPr>
+              <a:t>Optional two-factor authentication (TOTP / Google Authenticator).</a:t>
+            </a:r>
+            <a:endParaRPr lang="en-US" sz="1500" dirty="0"/>
+          </a:p>
+          <a:p>
+            <a:pPr marL="228600" indent="-228600">
+              <a:spcAft>
+                <a:spcPts val="1100"/>
+              </a:spcAft>
+              <a:buSzPct val="100000"/>
+              <a:buChar char="•"/>
+            </a:pPr>
+            <a:r>
+              <a:rPr lang="en-US" sz="1500" dirty="0">
+                <a:solidFill>
+                  <a:srgbClr val="1A1A1A"/>
+                </a:solidFill>
+                <a:latin typeface="Arial" pitchFamily="34" charset="0"/>
+                <a:ea typeface="Arial" pitchFamily="34" charset="-122"/>
+                <a:cs typeface="Arial" pitchFamily="34" charset="-120"/>
+              </a:rPr>
+              <a:t>Full audit log of privileged actions; proctoring evidence with retention limits.</a:t>
+            </a:r>
+            <a:endParaRPr lang="en-US" sz="1500" dirty="0"/>
           </a:p>
         </p:txBody>
       </p:sp>
@@ -11331,499 +10643,6 @@
 <file path=ppt/slides/slide23.xml><?xml version="1.0" encoding="utf-8"?>
 <p:sld xmlns:a="http://schemas.openxmlformats.org/drawingml/2006/main" xmlns:r="http://schemas.openxmlformats.org/officeDocument/2006/relationships" xmlns:p="http://schemas.openxmlformats.org/presentationml/2006/main">
   <p:cSld name="Slide 23">
-    <p:bg>
-      <p:bgPr>
-        <a:solidFill>
-          <a:srgbClr val="FBF7F1"/>
-        </a:solidFill>
-      </p:bgPr>
-    </p:bg>
-    <p:spTree>
-      <p:nvGrpSpPr>
-        <p:cNvPr id="1" name=""/>
-        <p:cNvGrpSpPr/>
-        <p:nvPr/>
-      </p:nvGrpSpPr>
-      <p:grpSpPr>
-        <a:xfrm>
-          <a:off x="0" y="0"/>
-          <a:ext cx="0" cy="0"/>
-          <a:chOff x="0" y="0"/>
-          <a:chExt cx="0" cy="0"/>
-        </a:xfrm>
-      </p:grpSpPr>
-      <p:sp>
-        <p:nvSpPr>
-          <p:cNvPr id="2" name="Shape 0"/>
-          <p:cNvSpPr/>
-          <p:nvPr/>
-        </p:nvSpPr>
-        <p:spPr>
-          <a:xfrm>
-            <a:off x="0" y="0"/>
-            <a:ext cx="164592" cy="6858000"/>
-          </a:xfrm>
-          <a:prstGeom prst="rect">
-            <a:avLst/>
-          </a:prstGeom>
-          <a:solidFill>
-            <a:srgbClr val="E0342C"/>
-          </a:solidFill>
-          <a:ln/>
-        </p:spPr>
-      </p:sp>
-      <p:sp>
-        <p:nvSpPr>
-          <p:cNvPr id="3" name="Text 1"/>
-          <p:cNvSpPr/>
-          <p:nvPr/>
-        </p:nvSpPr>
-        <p:spPr>
-          <a:xfrm>
-            <a:off x="640080" y="640080"/>
-            <a:ext cx="10972800" cy="640080"/>
-          </a:xfrm>
-          <a:prstGeom prst="rect">
-            <a:avLst/>
-          </a:prstGeom>
-          <a:noFill/>
-          <a:ln/>
-        </p:spPr>
-        <p:txBody>
-          <a:bodyPr wrap="square" rtlCol="0" anchor="ctr"/>
-          <a:lstStyle/>
-          <a:p>
-            <a:pPr indent="0" marL="0">
-              <a:buNone/>
-            </a:pPr>
-            <a:r>
-              <a:rPr lang="en-US" sz="3000" b="1" dirty="0">
-                <a:solidFill>
-                  <a:srgbClr val="1A1A1A"/>
-                </a:solidFill>
-                <a:latin typeface="Arial" pitchFamily="34" charset="0"/>
-                <a:ea typeface="Arial" pitchFamily="34" charset="-122"/>
-                <a:cs typeface="Arial" pitchFamily="34" charset="-120"/>
-              </a:rPr>
-              <a:t>Plans &amp; pricing</a:t>
-            </a:r>
-            <a:endParaRPr lang="en-US" sz="3000" dirty="0"/>
-          </a:p>
-        </p:txBody>
-      </p:sp>
-      <p:sp>
-        <p:nvSpPr>
-          <p:cNvPr id="4" name="Text 2"/>
-          <p:cNvSpPr/>
-          <p:nvPr/>
-        </p:nvSpPr>
-        <p:spPr>
-          <a:xfrm>
-            <a:off x="640080" y="1325880"/>
-            <a:ext cx="10972800" cy="457200"/>
-          </a:xfrm>
-          <a:prstGeom prst="rect">
-            <a:avLst/>
-          </a:prstGeom>
-          <a:noFill/>
-          <a:ln/>
-        </p:spPr>
-        <p:txBody>
-          <a:bodyPr wrap="square" rtlCol="0" anchor="ctr"/>
-          <a:lstStyle/>
-          <a:p>
-            <a:pPr indent="0" marL="0">
-              <a:buNone/>
-            </a:pPr>
-            <a:r>
-              <a:rPr lang="en-US" sz="1500" dirty="0">
-                <a:solidFill>
-                  <a:srgbClr val="6B6B6B"/>
-                </a:solidFill>
-                <a:latin typeface="Arial" pitchFamily="34" charset="0"/>
-                <a:ea typeface="Arial" pitchFamily="34" charset="-122"/>
-                <a:cs typeface="Arial" pitchFamily="34" charset="-120"/>
-              </a:rPr>
-              <a:t>Simple, transparent tiers — enforced server-side</a:t>
-            </a:r>
-            <a:endParaRPr lang="en-US" sz="1500" dirty="0"/>
-          </a:p>
-        </p:txBody>
-      </p:sp>
-      <p:sp>
-        <p:nvSpPr>
-          <p:cNvPr id="5" name="Text 3"/>
-          <p:cNvSpPr/>
-          <p:nvPr/>
-        </p:nvSpPr>
-        <p:spPr>
-          <a:xfrm>
-            <a:off x="822960" y="2103120"/>
-            <a:ext cx="10424160" cy="4206240"/>
-          </a:xfrm>
-          <a:prstGeom prst="rect">
-            <a:avLst/>
-          </a:prstGeom>
-          <a:noFill/>
-          <a:ln/>
-        </p:spPr>
-        <p:txBody>
-          <a:bodyPr wrap="square" rtlCol="0" anchor="t"/>
-          <a:lstStyle/>
-          <a:p>
-            <a:pPr marL="228600" indent="-228600">
-              <a:spcAft>
-                <a:spcPts val="1100"/>
-              </a:spcAft>
-              <a:buSzPct val="100000"/>
-              <a:buChar char="•"/>
-            </a:pPr>
-            <a:r>
-              <a:rPr lang="en-US" sz="1500" dirty="0">
-                <a:solidFill>
-                  <a:srgbClr val="1A1A1A"/>
-                </a:solidFill>
-                <a:latin typeface="Arial" pitchFamily="34" charset="0"/>
-                <a:ea typeface="Arial" pitchFamily="34" charset="-122"/>
-                <a:cs typeface="Arial" pitchFamily="34" charset="-120"/>
-              </a:rPr>
-              <a:t>Free — 1 seat, up to 5 openings, applicant tracking &amp; pipeline.</a:t>
-            </a:r>
-            <a:endParaRPr lang="en-US" sz="1500" dirty="0"/>
-          </a:p>
-          <a:p>
-            <a:pPr marL="228600" indent="-228600">
-              <a:spcAft>
-                <a:spcPts val="1100"/>
-              </a:spcAft>
-              <a:buSzPct val="100000"/>
-              <a:buChar char="•"/>
-            </a:pPr>
-            <a:r>
-              <a:rPr lang="en-US" sz="1500" dirty="0">
-                <a:solidFill>
-                  <a:srgbClr val="1A1A1A"/>
-                </a:solidFill>
-                <a:latin typeface="Arial" pitchFamily="34" charset="0"/>
-                <a:ea typeface="Arial" pitchFamily="34" charset="-122"/>
-                <a:cs typeface="Arial" pitchFamily="34" charset="-120"/>
-              </a:rPr>
-              <a:t>Basic ($49/mo) — 3 seats, unlimited openings, AI job-post generation.</a:t>
-            </a:r>
-            <a:endParaRPr lang="en-US" sz="1500" dirty="0"/>
-          </a:p>
-          <a:p>
-            <a:pPr marL="228600" indent="-228600">
-              <a:spcAft>
-                <a:spcPts val="1100"/>
-              </a:spcAft>
-              <a:buSzPct val="100000"/>
-              <a:buChar char="•"/>
-            </a:pPr>
-            <a:r>
-              <a:rPr lang="en-US" sz="1500" dirty="0">
-                <a:solidFill>
-                  <a:srgbClr val="1A1A1A"/>
-                </a:solidFill>
-                <a:latin typeface="Arial" pitchFamily="34" charset="0"/>
-                <a:ea typeface="Arial" pitchFamily="34" charset="-122"/>
-                <a:cs typeface="Arial" pitchFamily="34" charset="-120"/>
-              </a:rPr>
-              <a:t>Premium ($149/mo) — up to 10 seats, AI screening &amp; match reports, AI assessments + grading, proctoring &amp; interviews.</a:t>
-            </a:r>
-            <a:endParaRPr lang="en-US" sz="1500" dirty="0"/>
-          </a:p>
-          <a:p>
-            <a:pPr marL="228600" indent="-228600">
-              <a:spcAft>
-                <a:spcPts val="1100"/>
-              </a:spcAft>
-              <a:buSzPct val="100000"/>
-              <a:buChar char="•"/>
-            </a:pPr>
-            <a:r>
-              <a:rPr lang="en-US" sz="1500" dirty="0">
-                <a:solidFill>
-                  <a:srgbClr val="1A1A1A"/>
-                </a:solidFill>
-                <a:latin typeface="Arial" pitchFamily="34" charset="0"/>
-                <a:ea typeface="Arial" pitchFamily="34" charset="-122"/>
-                <a:cs typeface="Arial" pitchFamily="34" charset="-120"/>
-              </a:rPr>
-              <a:t>Custom — bespoke limits &amp; all features, assigned by our team.</a:t>
-            </a:r>
-            <a:endParaRPr lang="en-US" sz="1500" dirty="0"/>
-          </a:p>
-          <a:p>
-            <a:pPr marL="228600" indent="-228600">
-              <a:spcAft>
-                <a:spcPts val="1100"/>
-              </a:spcAft>
-              <a:buSzPct val="100000"/>
-              <a:buChar char="•"/>
-            </a:pPr>
-            <a:r>
-              <a:rPr lang="en-US" sz="1500" dirty="0">
-                <a:solidFill>
-                  <a:srgbClr val="1A1A1A"/>
-                </a:solidFill>
-                <a:latin typeface="Arial" pitchFamily="34" charset="0"/>
-                <a:ea typeface="Arial" pitchFamily="34" charset="-122"/>
-                <a:cs typeface="Arial" pitchFamily="34" charset="-120"/>
-              </a:rPr>
-              <a:t>Add-on seats, prorated. Limits and locked features are enforced in the database — not just hidden.</a:t>
-            </a:r>
-            <a:endParaRPr lang="en-US" sz="1500" dirty="0"/>
-          </a:p>
-        </p:txBody>
-      </p:sp>
-    </p:spTree>
-  </p:cSld>
-  <p:clrMapOvr>
-    <a:masterClrMapping/>
-  </p:clrMapOvr>
-</p:sld>
-</file>
-
-<file path=ppt/slides/slide24.xml><?xml version="1.0" encoding="utf-8"?>
-<p:sld xmlns:a="http://schemas.openxmlformats.org/drawingml/2006/main" xmlns:r="http://schemas.openxmlformats.org/officeDocument/2006/relationships" xmlns:p="http://schemas.openxmlformats.org/presentationml/2006/main">
-  <p:cSld name="Slide 24">
-    <p:bg>
-      <p:bgPr>
-        <a:solidFill>
-          <a:srgbClr val="FBF7F1"/>
-        </a:solidFill>
-      </p:bgPr>
-    </p:bg>
-    <p:spTree>
-      <p:nvGrpSpPr>
-        <p:cNvPr id="1" name=""/>
-        <p:cNvGrpSpPr/>
-        <p:nvPr/>
-      </p:nvGrpSpPr>
-      <p:grpSpPr>
-        <a:xfrm>
-          <a:off x="0" y="0"/>
-          <a:ext cx="0" cy="0"/>
-          <a:chOff x="0" y="0"/>
-          <a:chExt cx="0" cy="0"/>
-        </a:xfrm>
-      </p:grpSpPr>
-      <p:sp>
-        <p:nvSpPr>
-          <p:cNvPr id="2" name="Shape 0"/>
-          <p:cNvSpPr/>
-          <p:nvPr/>
-        </p:nvSpPr>
-        <p:spPr>
-          <a:xfrm>
-            <a:off x="0" y="0"/>
-            <a:ext cx="164592" cy="6858000"/>
-          </a:xfrm>
-          <a:prstGeom prst="rect">
-            <a:avLst/>
-          </a:prstGeom>
-          <a:solidFill>
-            <a:srgbClr val="E0342C"/>
-          </a:solidFill>
-          <a:ln/>
-        </p:spPr>
-      </p:sp>
-      <p:sp>
-        <p:nvSpPr>
-          <p:cNvPr id="3" name="Text 1"/>
-          <p:cNvSpPr/>
-          <p:nvPr/>
-        </p:nvSpPr>
-        <p:spPr>
-          <a:xfrm>
-            <a:off x="640080" y="640080"/>
-            <a:ext cx="10972800" cy="640080"/>
-          </a:xfrm>
-          <a:prstGeom prst="rect">
-            <a:avLst/>
-          </a:prstGeom>
-          <a:noFill/>
-          <a:ln/>
-        </p:spPr>
-        <p:txBody>
-          <a:bodyPr wrap="square" rtlCol="0" anchor="ctr"/>
-          <a:lstStyle/>
-          <a:p>
-            <a:pPr indent="0" marL="0">
-              <a:buNone/>
-            </a:pPr>
-            <a:r>
-              <a:rPr lang="en-US" sz="3000" b="1" dirty="0">
-                <a:solidFill>
-                  <a:srgbClr val="1A1A1A"/>
-                </a:solidFill>
-                <a:latin typeface="Arial" pitchFamily="34" charset="0"/>
-                <a:ea typeface="Arial" pitchFamily="34" charset="-122"/>
-                <a:cs typeface="Arial" pitchFamily="34" charset="-120"/>
-              </a:rPr>
-              <a:t>Secure &amp; multi-tenant by design</a:t>
-            </a:r>
-            <a:endParaRPr lang="en-US" sz="3000" dirty="0"/>
-          </a:p>
-        </p:txBody>
-      </p:sp>
-      <p:sp>
-        <p:nvSpPr>
-          <p:cNvPr id="4" name="Text 2"/>
-          <p:cNvSpPr/>
-          <p:nvPr/>
-        </p:nvSpPr>
-        <p:spPr>
-          <a:xfrm>
-            <a:off x="640080" y="1325880"/>
-            <a:ext cx="10972800" cy="457200"/>
-          </a:xfrm>
-          <a:prstGeom prst="rect">
-            <a:avLst/>
-          </a:prstGeom>
-          <a:noFill/>
-          <a:ln/>
-        </p:spPr>
-        <p:txBody>
-          <a:bodyPr wrap="square" rtlCol="0" anchor="ctr"/>
-          <a:lstStyle/>
-          <a:p>
-            <a:pPr indent="0" marL="0">
-              <a:buNone/>
-            </a:pPr>
-            <a:r>
-              <a:rPr lang="en-US" sz="1500" dirty="0">
-                <a:solidFill>
-                  <a:srgbClr val="6B6B6B"/>
-                </a:solidFill>
-                <a:latin typeface="Arial" pitchFamily="34" charset="0"/>
-                <a:ea typeface="Arial" pitchFamily="34" charset="-122"/>
-                <a:cs typeface="Arial" pitchFamily="34" charset="-120"/>
-              </a:rPr>
-              <a:t>Trust built in</a:t>
-            </a:r>
-            <a:endParaRPr lang="en-US" sz="1500" dirty="0"/>
-          </a:p>
-        </p:txBody>
-      </p:sp>
-      <p:sp>
-        <p:nvSpPr>
-          <p:cNvPr id="5" name="Text 3"/>
-          <p:cNvSpPr/>
-          <p:nvPr/>
-        </p:nvSpPr>
-        <p:spPr>
-          <a:xfrm>
-            <a:off x="822960" y="2103120"/>
-            <a:ext cx="10424160" cy="4206240"/>
-          </a:xfrm>
-          <a:prstGeom prst="rect">
-            <a:avLst/>
-          </a:prstGeom>
-          <a:noFill/>
-          <a:ln/>
-        </p:spPr>
-        <p:txBody>
-          <a:bodyPr wrap="square" rtlCol="0" anchor="t"/>
-          <a:lstStyle/>
-          <a:p>
-            <a:pPr marL="228600" indent="-228600">
-              <a:spcAft>
-                <a:spcPts val="1100"/>
-              </a:spcAft>
-              <a:buSzPct val="100000"/>
-              <a:buChar char="•"/>
-            </a:pPr>
-            <a:r>
-              <a:rPr lang="en-US" sz="1500" dirty="0">
-                <a:solidFill>
-                  <a:srgbClr val="1A1A1A"/>
-                </a:solidFill>
-                <a:latin typeface="Arial" pitchFamily="34" charset="0"/>
-                <a:ea typeface="Arial" pitchFamily="34" charset="-122"/>
-                <a:cs typeface="Arial" pitchFamily="34" charset="-120"/>
-              </a:rPr>
-              <a:t>Row-Level Security isolates every tenant's data at the database layer.</a:t>
-            </a:r>
-            <a:endParaRPr lang="en-US" sz="1500" dirty="0"/>
-          </a:p>
-          <a:p>
-            <a:pPr marL="228600" indent="-228600">
-              <a:spcAft>
-                <a:spcPts val="1100"/>
-              </a:spcAft>
-              <a:buSzPct val="100000"/>
-              <a:buChar char="•"/>
-            </a:pPr>
-            <a:r>
-              <a:rPr lang="en-US" sz="1500" dirty="0">
-                <a:solidFill>
-                  <a:srgbClr val="1A1A1A"/>
-                </a:solidFill>
-                <a:latin typeface="Arial" pitchFamily="34" charset="0"/>
-                <a:ea typeface="Arial" pitchFamily="34" charset="-122"/>
-                <a:cs typeface="Arial" pitchFamily="34" charset="-120"/>
-              </a:rPr>
-              <a:t>Role-based permissions from a central catalogue — the UI and DB never disagree.</a:t>
-            </a:r>
-            <a:endParaRPr lang="en-US" sz="1500" dirty="0"/>
-          </a:p>
-          <a:p>
-            <a:pPr marL="228600" indent="-228600">
-              <a:spcAft>
-                <a:spcPts val="1100"/>
-              </a:spcAft>
-              <a:buSzPct val="100000"/>
-              <a:buChar char="•"/>
-            </a:pPr>
-            <a:r>
-              <a:rPr lang="en-US" sz="1500" dirty="0">
-                <a:solidFill>
-                  <a:srgbClr val="1A1A1A"/>
-                </a:solidFill>
-                <a:latin typeface="Arial" pitchFamily="34" charset="0"/>
-                <a:ea typeface="Arial" pitchFamily="34" charset="-122"/>
-                <a:cs typeface="Arial" pitchFamily="34" charset="-120"/>
-              </a:rPr>
-              <a:t>Optional two-factor authentication (TOTP / Google Authenticator).</a:t>
-            </a:r>
-            <a:endParaRPr lang="en-US" sz="1500" dirty="0"/>
-          </a:p>
-          <a:p>
-            <a:pPr marL="228600" indent="-228600">
-              <a:spcAft>
-                <a:spcPts val="1100"/>
-              </a:spcAft>
-              <a:buSzPct val="100000"/>
-              <a:buChar char="•"/>
-            </a:pPr>
-            <a:r>
-              <a:rPr lang="en-US" sz="1500" dirty="0">
-                <a:solidFill>
-                  <a:srgbClr val="1A1A1A"/>
-                </a:solidFill>
-                <a:latin typeface="Arial" pitchFamily="34" charset="0"/>
-                <a:ea typeface="Arial" pitchFamily="34" charset="-122"/>
-                <a:cs typeface="Arial" pitchFamily="34" charset="-120"/>
-              </a:rPr>
-              <a:t>Full audit log of privileged actions; proctoring evidence with retention limits.</a:t>
-            </a:r>
-            <a:endParaRPr lang="en-US" sz="1500" dirty="0"/>
-          </a:p>
-        </p:txBody>
-      </p:sp>
-    </p:spTree>
-  </p:cSld>
-  <p:clrMapOvr>
-    <a:masterClrMapping/>
-  </p:clrMapOvr>
-</p:sld>
-</file>
-
-<file path=ppt/slides/slide25.xml><?xml version="1.0" encoding="utf-8"?>
-<p:sld xmlns:a="http://schemas.openxmlformats.org/drawingml/2006/main" xmlns:r="http://schemas.openxmlformats.org/officeDocument/2006/relationships" xmlns:p="http://schemas.openxmlformats.org/presentationml/2006/main">
-  <p:cSld name="Slide 25">
     <p:bg>
       <p:bgPr>
         <a:solidFill>
@@ -15708,7 +14527,7 @@
                 <a:ea typeface="Arial" pitchFamily="34" charset="-122"/>
                 <a:cs typeface="Arial" pitchFamily="34" charset="-120"/>
               </a:rPr>
-              <a:t>Choose a plan &amp; manage billing</a:t>
+              <a:t>Manage billing &amp; the workspace</a:t>
             </a:r>
             <a:endParaRPr lang="en-US" sz="2500" dirty="0"/>
           </a:p>
@@ -15832,7 +14651,7 @@
                 <a:ea typeface="Arial" pitchFamily="34" charset="-122"/>
                 <a:cs typeface="Arial" pitchFamily="34" charset="-120"/>
               </a:rPr>
-              <a:t>Compare Free / Basic / Premium and see usage vs limits.</a:t>
+              <a:t>See usage vs limits; upgrade, add seats, or cancel in-app.</a:t>
             </a:r>
             <a:endParaRPr lang="en-US" sz="1300" dirty="0"/>
           </a:p>
@@ -15938,7 +14757,7 @@
                 <a:ea typeface="Arial" pitchFamily="34" charset="-122"/>
                 <a:cs typeface="Arial" pitchFamily="34" charset="-120"/>
               </a:rPr>
-              <a:t>Pay in-app
+              <a:t>Secure in-app checkout
 </a:t>
             </a:r>
             <a:pPr indent="0" marL="0">
@@ -15956,7 +14775,7 @@
                 <a:ea typeface="Arial" pitchFamily="34" charset="-122"/>
                 <a:cs typeface="Arial" pitchFamily="34" charset="-120"/>
               </a:rPr>
-              <a:t>Secure Stripe card entry embedded on the page — no redirect.</a:t>
+              <a:t>Card entry is embedded on the page — no redirect.</a:t>
             </a:r>
             <a:endParaRPr lang="en-US" sz="1300" dirty="0"/>
           </a:p>
@@ -15970,7 +14789,7 @@
         </p:nvSpPr>
         <p:spPr>
           <a:xfrm>
-            <a:off x="548640" y="3346704"/>
+            <a:off x="548640" y="3236976"/>
             <a:ext cx="384048" cy="384048"/>
           </a:xfrm>
           <a:prstGeom prst="ellipse">
@@ -15995,7 +14814,7 @@
         </p:nvSpPr>
         <p:spPr>
           <a:xfrm>
-            <a:off x="548640" y="3346704"/>
+            <a:off x="548640" y="3236976"/>
             <a:ext cx="384048" cy="384048"/>
           </a:xfrm>
           <a:prstGeom prst="rect">
@@ -16034,7 +14853,7 @@
         </p:nvSpPr>
         <p:spPr>
           <a:xfrm>
-            <a:off x="1097280" y="3282696"/>
+            <a:off x="1097280" y="3172968"/>
             <a:ext cx="4754880" cy="914400"/>
           </a:xfrm>
           <a:prstGeom prst="rect">
@@ -16062,7 +14881,7 @@
                 <a:ea typeface="Arial" pitchFamily="34" charset="-122"/>
                 <a:cs typeface="Arial" pitchFamily="34" charset="-120"/>
               </a:rPr>
-              <a:t>Scale &amp; control
+              <a:t>Audit &amp; policy
 </a:t>
             </a:r>
             <a:pPr indent="0" marL="0">
@@ -16080,7 +14899,7 @@
                 <a:ea typeface="Arial" pitchFamily="34" charset="-122"/>
                 <a:cs typeface="Arial" pitchFamily="34" charset="-120"/>
               </a:rPr>
-              <a:t>Add seats, switch or cancel any time; over-limit alerts guide upgrades.</a:t>
+              <a:t>Full action trail, plus org-wide assessment/proctoring defaults.</a:t>
             </a:r>
             <a:endParaRPr lang="en-US" sz="1300" dirty="0"/>
           </a:p>
@@ -16233,7 +15052,7 @@
                 <a:ea typeface="Arial" pitchFamily="34" charset="-122"/>
                 <a:cs typeface="Arial" pitchFamily="34" charset="-120"/>
               </a:rPr>
-              <a:t>Admin · Plans &amp; billing</a:t>
+              <a:t>Admin · Billing &amp; audit</a:t>
             </a:r>
             <a:endParaRPr lang="en-US" sz="1200" dirty="0"/>
           </a:p>
@@ -16272,7 +15091,7 @@
                 <a:ea typeface="Arial" pitchFamily="34" charset="-122"/>
                 <a:cs typeface="Arial" pitchFamily="34" charset="-120"/>
               </a:rPr>
-              <a:t>Flexible, transparent billing</a:t>
+              <a:t>Control &amp; accountability</a:t>
             </a:r>
             <a:endParaRPr lang="en-US" sz="1700" dirty="0"/>
           </a:p>
@@ -16315,7 +15134,7 @@
                 <a:ea typeface="Arial" pitchFamily="34" charset="-122"/>
                 <a:cs typeface="Arial" pitchFamily="34" charset="-120"/>
               </a:rPr>
-              <a:t>Free / Basic / Premium / Custom</a:t>
+              <a:t>Embedded Stripe checkout &amp; seats</a:t>
             </a:r>
             <a:endParaRPr lang="en-US" sz="1250" dirty="0"/>
           </a:p>
@@ -16336,7 +15155,7 @@
                 <a:ea typeface="Arial" pitchFamily="34" charset="-122"/>
                 <a:cs typeface="Arial" pitchFamily="34" charset="-120"/>
               </a:rPr>
-              <a:t>Embedded Stripe checkout &amp; seats</a:t>
+              <a:t>Live usage vs plan limits</a:t>
             </a:r>
             <a:endParaRPr lang="en-US" sz="1250" dirty="0"/>
           </a:p>
@@ -16357,7 +15176,7 @@
                 <a:ea typeface="Arial" pitchFamily="34" charset="-122"/>
                 <a:cs typeface="Arial" pitchFamily="34" charset="-120"/>
               </a:rPr>
-              <a:t>Live usage vs plan limits</a:t>
+              <a:t>Every privileged action logged</a:t>
             </a:r>
             <a:endParaRPr lang="en-US" sz="1250" dirty="0"/>
           </a:p>
